--- a/신용카드_이상거래_탐지.pptx
+++ b/신용카드_이상거래_탐지.pptx
@@ -14,11 +14,9 @@
     <p:sldId id="262" r:id="rId8"/>
     <p:sldId id="263" r:id="rId9"/>
     <p:sldId id="264" r:id="rId10"/>
-    <p:sldId id="265" r:id="rId11"/>
-    <p:sldId id="266" r:id="rId12"/>
   </p:sldIdLst>
   <p:notesMasterIdLst>
-    <p:notesMasterId r:id="rId13"/>
+    <p:notesMasterId r:id="rId11"/>
   </p:notesMasterIdLst>
   <p:sldSz cx="9144000" cy="5143500"/>
   <p:notesSz cx="5143500" cy="9144000"/>
@@ -536,182 +534,6 @@
             <a:fld id="{F7021451-1387-4CA6-816F-3879F97B5CBC}" type="slidenum">
               <a:rPr lang="en-US"/>
               <a:t>1</a:t>
-            </a:fld>
-            <a:endParaRPr lang="en-US"/>
-          </a:p>
-        </p:txBody>
-      </p:sp>
-    </p:spTree>
-    <p:extLst>
-      <p:ext uri="{BB962C8B-B14F-4D97-AF65-F5344CB8AC3E}">
-        <p14:creationId xmlns:p14="http://schemas.microsoft.com/office/powerpoint/2010/main" val="1024086991"/>
-      </p:ext>
-    </p:extLst>
-  </p:cSld>
-  <p:clrMapOvr>
-    <a:masterClrMapping/>
-  </p:clrMapOvr>
-</p:notes>
-</file>
-
-<file path=ppt/notesSlides/notesSlide10.xml><?xml version="1.0" encoding="utf-8"?>
-<p:notes xmlns:a="http://schemas.openxmlformats.org/drawingml/2006/main" xmlns:r="http://schemas.openxmlformats.org/officeDocument/2006/relationships" xmlns:p="http://schemas.openxmlformats.org/presentationml/2006/main">
-  <p:cSld>
-    <p:spTree>
-      <p:nvGrpSpPr>
-        <p:cNvPr id="1" name=""/>
-        <p:cNvGrpSpPr/>
-        <p:nvPr/>
-      </p:nvGrpSpPr>
-      <p:grpSpPr>
-        <a:xfrm>
-          <a:off x="0" y="0"/>
-          <a:ext cx="0" cy="0"/>
-          <a:chOff x="0" y="0"/>
-          <a:chExt cx="0" cy="0"/>
-        </a:xfrm>
-      </p:grpSpPr>
-      <p:sp>
-        <p:nvSpPr>
-          <p:cNvPr id="2" name="Slide Image Placeholder 1"/>
-          <p:cNvSpPr>
-            <a:spLocks noGrp="1" noRot="1" noChangeAspect="1"/>
-          </p:cNvSpPr>
-          <p:nvPr>
-            <p:ph type="sldImg"/>
-          </p:nvPr>
-        </p:nvSpPr>
-        <p:spPr/>
-      </p:sp>
-      <p:sp>
-        <p:nvSpPr>
-          <p:cNvPr id="3" name="Notes Placeholder 2"/>
-          <p:cNvSpPr>
-            <a:spLocks noGrp="1"/>
-          </p:cNvSpPr>
-          <p:nvPr>
-            <p:ph type="body" idx="1"/>
-          </p:nvPr>
-        </p:nvSpPr>
-        <p:spPr/>
-        <p:txBody>
-          <a:bodyPr/>
-          <a:lstStyle/>
-          <a:p>
-            <a:r>
-              <a:rPr lang="en-US" dirty="0"/>
-              <a:t/>
-            </a:r>
-            <a:endParaRPr lang="en-US" dirty="0"/>
-          </a:p>
-        </p:txBody>
-      </p:sp>
-      <p:sp>
-        <p:nvSpPr>
-          <p:cNvPr id="4" name="Slide Number Placeholder 3"/>
-          <p:cNvSpPr>
-            <a:spLocks noGrp="1"/>
-          </p:cNvSpPr>
-          <p:nvPr>
-            <p:ph type="sldNum" sz="quarter" idx="10"/>
-          </p:nvPr>
-        </p:nvSpPr>
-        <p:spPr/>
-        <p:txBody>
-          <a:bodyPr/>
-          <a:lstStyle/>
-          <a:p>
-            <a:fld id="{F7021451-1387-4CA6-816F-3879F97B5CBC}" type="slidenum">
-              <a:rPr lang="en-US"/>
-              <a:t>10</a:t>
-            </a:fld>
-            <a:endParaRPr lang="en-US"/>
-          </a:p>
-        </p:txBody>
-      </p:sp>
-    </p:spTree>
-    <p:extLst>
-      <p:ext uri="{BB962C8B-B14F-4D97-AF65-F5344CB8AC3E}">
-        <p14:creationId xmlns:p14="http://schemas.microsoft.com/office/powerpoint/2010/main" val="1024086991"/>
-      </p:ext>
-    </p:extLst>
-  </p:cSld>
-  <p:clrMapOvr>
-    <a:masterClrMapping/>
-  </p:clrMapOvr>
-</p:notes>
-</file>
-
-<file path=ppt/notesSlides/notesSlide11.xml><?xml version="1.0" encoding="utf-8"?>
-<p:notes xmlns:a="http://schemas.openxmlformats.org/drawingml/2006/main" xmlns:r="http://schemas.openxmlformats.org/officeDocument/2006/relationships" xmlns:p="http://schemas.openxmlformats.org/presentationml/2006/main">
-  <p:cSld>
-    <p:spTree>
-      <p:nvGrpSpPr>
-        <p:cNvPr id="1" name=""/>
-        <p:cNvGrpSpPr/>
-        <p:nvPr/>
-      </p:nvGrpSpPr>
-      <p:grpSpPr>
-        <a:xfrm>
-          <a:off x="0" y="0"/>
-          <a:ext cx="0" cy="0"/>
-          <a:chOff x="0" y="0"/>
-          <a:chExt cx="0" cy="0"/>
-        </a:xfrm>
-      </p:grpSpPr>
-      <p:sp>
-        <p:nvSpPr>
-          <p:cNvPr id="2" name="Slide Image Placeholder 1"/>
-          <p:cNvSpPr>
-            <a:spLocks noGrp="1" noRot="1" noChangeAspect="1"/>
-          </p:cNvSpPr>
-          <p:nvPr>
-            <p:ph type="sldImg"/>
-          </p:nvPr>
-        </p:nvSpPr>
-        <p:spPr/>
-      </p:sp>
-      <p:sp>
-        <p:nvSpPr>
-          <p:cNvPr id="3" name="Notes Placeholder 2"/>
-          <p:cNvSpPr>
-            <a:spLocks noGrp="1"/>
-          </p:cNvSpPr>
-          <p:nvPr>
-            <p:ph type="body" idx="1"/>
-          </p:nvPr>
-        </p:nvSpPr>
-        <p:spPr/>
-        <p:txBody>
-          <a:bodyPr/>
-          <a:lstStyle/>
-          <a:p>
-            <a:r>
-              <a:rPr lang="en-US" dirty="0"/>
-              <a:t/>
-            </a:r>
-            <a:endParaRPr lang="en-US" dirty="0"/>
-          </a:p>
-        </p:txBody>
-      </p:sp>
-      <p:sp>
-        <p:nvSpPr>
-          <p:cNvPr id="4" name="Slide Number Placeholder 3"/>
-          <p:cNvSpPr>
-            <a:spLocks noGrp="1"/>
-          </p:cNvSpPr>
-          <p:nvPr>
-            <p:ph type="sldNum" sz="quarter" idx="10"/>
-          </p:nvPr>
-        </p:nvSpPr>
-        <p:spPr/>
-        <p:txBody>
-          <a:bodyPr/>
-          <a:lstStyle/>
-          <a:p>
-            <a:fld id="{F7021451-1387-4CA6-816F-3879F97B5CBC}" type="slidenum">
-              <a:rPr lang="en-US"/>
-              <a:t>11</a:t>
             </a:fld>
             <a:endParaRPr lang="en-US"/>
           </a:p>
@@ -1782,176 +1604,390 @@
           </a:prstGeom>
         </p:spPr>
       </p:pic>
-      <p:pic>
-        <p:nvPicPr>
-          <p:cNvPr id="3" name="Image 1" descr="preencoded.png">    </p:cNvPr>
-          <p:cNvPicPr>
-            <a:picLocks noChangeAspect="1"/>
-          </p:cNvPicPr>
-          <p:nvPr/>
-        </p:nvPicPr>
-        <p:blipFill>
-          <a:blip r:embed="rId2"/>
-          <a:stretch>
-            <a:fillRect/>
-          </a:stretch>
-        </p:blipFill>
-        <p:spPr>
-          <a:xfrm>
-            <a:off x="0" y="0"/>
-            <a:ext cx="9144000" cy="5143500"/>
-          </a:xfrm>
-          <a:prstGeom prst="rect">
-            <a:avLst/>
-          </a:prstGeom>
-        </p:spPr>
-      </p:pic>
-    </p:spTree>
-  </p:cSld>
-  <p:clrMapOvr>
-    <a:masterClrMapping/>
-  </p:clrMapOvr>
-</p:sld>
-</file>
-
-<file path=ppt/slides/slide10.xml><?xml version="1.0" encoding="utf-8"?>
-<p:sld xmlns:a="http://schemas.openxmlformats.org/drawingml/2006/main" xmlns:r="http://schemas.openxmlformats.org/officeDocument/2006/relationships" xmlns:p="http://schemas.openxmlformats.org/presentationml/2006/main">
-  <p:cSld name="Slide 10">
-    <p:spTree>
-      <p:nvGrpSpPr>
-        <p:cNvPr id="1" name=""/>
-        <p:cNvGrpSpPr/>
-        <p:nvPr/>
-      </p:nvGrpSpPr>
-      <p:grpSpPr>
-        <a:xfrm>
-          <a:off x="0" y="0"/>
-          <a:ext cx="0" cy="0"/>
-          <a:chOff x="0" y="0"/>
-          <a:chExt cx="0" cy="0"/>
-        </a:xfrm>
-      </p:grpSpPr>
-      <p:pic>
-        <p:nvPicPr>
-          <p:cNvPr id="2" name="Image 0" descr="preencoded.png">    </p:cNvPr>
-          <p:cNvPicPr>
-            <a:picLocks noChangeAspect="1"/>
-          </p:cNvPicPr>
-          <p:nvPr/>
-        </p:nvPicPr>
-        <p:blipFill>
-          <a:blip r:embed="rId1"/>
-          <a:stretch>
-            <a:fillRect/>
-          </a:stretch>
-        </p:blipFill>
-        <p:spPr>
-          <a:xfrm>
-            <a:off x="0" y="0"/>
-            <a:ext cx="9144000" cy="5143500"/>
-          </a:xfrm>
-          <a:prstGeom prst="rect">
-            <a:avLst/>
-          </a:prstGeom>
-        </p:spPr>
-      </p:pic>
-      <p:pic>
-        <p:nvPicPr>
-          <p:cNvPr id="3" name="Image 1" descr="preencoded.png">    </p:cNvPr>
-          <p:cNvPicPr>
-            <a:picLocks noChangeAspect="1"/>
-          </p:cNvPicPr>
-          <p:nvPr/>
-        </p:nvPicPr>
-        <p:blipFill>
-          <a:blip r:embed="rId2"/>
-          <a:stretch>
-            <a:fillRect/>
-          </a:stretch>
-        </p:blipFill>
-        <p:spPr>
-          <a:xfrm>
-            <a:off x="0" y="0"/>
-            <a:ext cx="9144000" cy="5143500"/>
-          </a:xfrm>
-          <a:prstGeom prst="rect">
-            <a:avLst/>
-          </a:prstGeom>
-        </p:spPr>
-      </p:pic>
-    </p:spTree>
-  </p:cSld>
-  <p:clrMapOvr>
-    <a:masterClrMapping/>
-  </p:clrMapOvr>
-</p:sld>
-</file>
-
-<file path=ppt/slides/slide11.xml><?xml version="1.0" encoding="utf-8"?>
-<p:sld xmlns:a="http://schemas.openxmlformats.org/drawingml/2006/main" xmlns:r="http://schemas.openxmlformats.org/officeDocument/2006/relationships" xmlns:p="http://schemas.openxmlformats.org/presentationml/2006/main">
-  <p:cSld name="Slide 11">
-    <p:spTree>
-      <p:nvGrpSpPr>
-        <p:cNvPr id="1" name=""/>
-        <p:cNvGrpSpPr/>
-        <p:nvPr/>
-      </p:nvGrpSpPr>
-      <p:grpSpPr>
-        <a:xfrm>
-          <a:off x="0" y="0"/>
-          <a:ext cx="0" cy="0"/>
-          <a:chOff x="0" y="0"/>
-          <a:chExt cx="0" cy="0"/>
-        </a:xfrm>
-      </p:grpSpPr>
-      <p:pic>
-        <p:nvPicPr>
-          <p:cNvPr id="2" name="Image 0" descr="preencoded.png">    </p:cNvPr>
-          <p:cNvPicPr>
-            <a:picLocks noChangeAspect="1"/>
-          </p:cNvPicPr>
-          <p:nvPr/>
-        </p:nvPicPr>
-        <p:blipFill>
-          <a:blip r:embed="rId1"/>
-          <a:stretch>
-            <a:fillRect/>
-          </a:stretch>
-        </p:blipFill>
-        <p:spPr>
-          <a:xfrm>
-            <a:off x="0" y="0"/>
-            <a:ext cx="9144000" cy="5143500"/>
-          </a:xfrm>
-          <a:prstGeom prst="rect">
-            <a:avLst/>
-          </a:prstGeom>
-        </p:spPr>
-      </p:pic>
-      <p:pic>
-        <p:nvPicPr>
-          <p:cNvPr id="3" name="Image 1" descr="preencoded.png">    </p:cNvPr>
-          <p:cNvPicPr>
-            <a:picLocks noChangeAspect="1"/>
-          </p:cNvPicPr>
-          <p:nvPr/>
-        </p:nvPicPr>
-        <p:blipFill>
-          <a:blip r:embed="rId2"/>
-          <a:stretch>
-            <a:fillRect/>
-          </a:stretch>
-        </p:blipFill>
-        <p:spPr>
-          <a:xfrm>
-            <a:off x="0" y="0"/>
-            <a:ext cx="9144000" cy="5143500"/>
-          </a:xfrm>
-          <a:prstGeom prst="rect">
-            <a:avLst/>
-          </a:prstGeom>
-        </p:spPr>
-      </p:pic>
+      <p:sp>
+        <p:nvSpPr>
+          <p:cNvPr id="3" name="Text 0"/>
+          <p:cNvSpPr/>
+          <p:nvPr/>
+        </p:nvSpPr>
+        <p:spPr>
+          <a:xfrm>
+            <a:off x="571500" y="1407877"/>
+            <a:ext cx="8572500" cy="278606"/>
+          </a:xfrm>
+          <a:prstGeom prst="rect">
+            <a:avLst/>
+          </a:prstGeom>
+          <a:noFill/>
+          <a:ln/>
+        </p:spPr>
+        <p:txBody>
+          <a:bodyPr wrap="square" lIns="0" tIns="0" rIns="0" bIns="0" rtlCol="0" anchor="t">
+            <a:spAutoFit/>
+          </a:bodyPr>
+          <a:lstStyle/>
+          <a:p>
+            <a:pPr algn="l" indent="0" marL="0">
+              <a:buNone/>
+            </a:pPr>
+            <a:r>
+              <a:rPr lang="en-US" sz="1700" dirty="0">
+                <a:solidFill>
+                  <a:srgbClr val="087F5B"/>
+                </a:solidFill>
+                <a:latin typeface="Montserrat Light" pitchFamily="34" charset="0"/>
+                <a:ea typeface="Montserrat Light" pitchFamily="34" charset="-122"/>
+                <a:cs typeface="Montserrat Light" pitchFamily="34" charset="-120"/>
+              </a:rPr>
+              <a:t>Credit Card Fraud Detection</a:t>
+            </a:r>
+            <a:endParaRPr lang="en-US" sz="1700" dirty="0"/>
+          </a:p>
+        </p:txBody>
+      </p:sp>
+      <p:sp>
+        <p:nvSpPr>
+          <p:cNvPr id="4" name="Text 1"/>
+          <p:cNvSpPr/>
+          <p:nvPr/>
+        </p:nvSpPr>
+        <p:spPr>
+          <a:xfrm>
+            <a:off x="571500" y="2115108"/>
+            <a:ext cx="8572500" cy="1097235"/>
+          </a:xfrm>
+          <a:prstGeom prst="rect">
+            <a:avLst/>
+          </a:prstGeom>
+          <a:noFill/>
+          <a:ln/>
+        </p:spPr>
+        <p:txBody>
+          <a:bodyPr wrap="square" lIns="0" tIns="0" rIns="0" bIns="0" rtlCol="0" anchor="t">
+            <a:spAutoFit/>
+          </a:bodyPr>
+          <a:lstStyle/>
+          <a:p>
+            <a:pPr algn="l" indent="0" marL="0">
+              <a:lnSpc>
+                <a:spcPct val="96000"/>
+              </a:lnSpc>
+              <a:buNone/>
+            </a:pPr>
+            <a:r>
+              <a:rPr lang="en-US" sz="3300" b="1" dirty="0">
+                <a:solidFill>
+                  <a:srgbClr val="212529"/>
+                </a:solidFill>
+                <a:latin typeface="Montserrat Bold" pitchFamily="34" charset="0"/>
+                <a:ea typeface="Montserrat Bold" pitchFamily="34" charset="-122"/>
+                <a:cs typeface="Montserrat Bold" pitchFamily="34" charset="-120"/>
+              </a:rPr>
+              <a:t>신용카드 이상거래</a:t>
+            </a:r>
+            <a:r>
+              <a:rPr lang="en-US" sz="3300" b="1" dirty="0">
+                <a:solidFill>
+                  <a:srgbClr val="212529"/>
+                </a:solidFill>
+                <a:latin typeface="Montserrat Bold" pitchFamily="34" charset="0"/>
+                <a:ea typeface="Montserrat Bold" pitchFamily="34" charset="-122"/>
+                <a:cs typeface="Montserrat Bold" pitchFamily="34" charset="-120"/>
+              </a:rPr>
+              <a:t>
+</a:t>
+            </a:r>
+            <a:r>
+              <a:rPr lang="en-US" sz="3300" b="1" dirty="0">
+                <a:solidFill>
+                  <a:srgbClr val="212529"/>
+                </a:solidFill>
+                <a:latin typeface="Montserrat Bold" pitchFamily="34" charset="0"/>
+                <a:ea typeface="Montserrat Bold" pitchFamily="34" charset="-122"/>
+                <a:cs typeface="Montserrat Bold" pitchFamily="34" charset="-120"/>
+              </a:rPr>
+              <a:t>탐지 프로젝트</a:t>
+            </a:r>
+            <a:endParaRPr lang="en-US" sz="3300" dirty="0"/>
+          </a:p>
+        </p:txBody>
+      </p:sp>
+      <p:sp>
+        <p:nvSpPr>
+          <p:cNvPr id="5" name="Text 2"/>
+          <p:cNvSpPr/>
+          <p:nvPr/>
+        </p:nvSpPr>
+        <p:spPr>
+          <a:xfrm>
+            <a:off x="728663" y="3383793"/>
+            <a:ext cx="8415338" cy="180380"/>
+          </a:xfrm>
+          <a:prstGeom prst="rect">
+            <a:avLst/>
+          </a:prstGeom>
+          <a:noFill/>
+          <a:ln/>
+        </p:spPr>
+        <p:txBody>
+          <a:bodyPr wrap="square" lIns="0" tIns="0" rIns="0" bIns="0" rtlCol="0" anchor="t">
+            <a:spAutoFit/>
+          </a:bodyPr>
+          <a:lstStyle/>
+          <a:p>
+            <a:pPr algn="l" indent="0" marL="0">
+              <a:buNone/>
+            </a:pPr>
+            <a:r>
+              <a:rPr lang="en-US" sz="950" dirty="0">
+                <a:solidFill>
+                  <a:srgbClr val="495057"/>
+                </a:solidFill>
+                <a:latin typeface="Open Sans" pitchFamily="34" charset="0"/>
+                <a:ea typeface="Open Sans" pitchFamily="34" charset="-122"/>
+                <a:cs typeface="Open Sans" pitchFamily="34" charset="-120"/>
+              </a:rPr>
+              <a:t>머신러닝 기반 불균형 이진 분류 프로젝트</a:t>
+            </a:r>
+            <a:endParaRPr lang="en-US" sz="950" dirty="0"/>
+          </a:p>
+        </p:txBody>
+      </p:sp>
+      <p:sp>
+        <p:nvSpPr>
+          <p:cNvPr id="6" name="Shape 3"/>
+          <p:cNvSpPr/>
+          <p:nvPr/>
+        </p:nvSpPr>
+        <p:spPr>
+          <a:xfrm>
+            <a:off x="6286500" y="0"/>
+            <a:ext cx="2857500" cy="5143500"/>
+          </a:xfrm>
+          <a:prstGeom prst="rect">
+            <a:avLst/>
+          </a:prstGeom>
+          <a:solidFill>
+            <a:srgbClr val="212529"/>
+          </a:solidFill>
+          <a:ln/>
+        </p:spPr>
+      </p:sp>
+      <p:sp>
+        <p:nvSpPr>
+          <p:cNvPr id="7" name="Text 4"/>
+          <p:cNvSpPr/>
+          <p:nvPr/>
+        </p:nvSpPr>
+        <p:spPr>
+          <a:xfrm>
+            <a:off x="6170414" y="1415355"/>
+            <a:ext cx="3089672" cy="348258"/>
+          </a:xfrm>
+          <a:prstGeom prst="rect">
+            <a:avLst/>
+          </a:prstGeom>
+          <a:noFill/>
+          <a:ln/>
+        </p:spPr>
+        <p:txBody>
+          <a:bodyPr wrap="square" lIns="0" tIns="0" rIns="0" bIns="0" rtlCol="0" anchor="t">
+            <a:spAutoFit/>
+          </a:bodyPr>
+          <a:lstStyle/>
+          <a:p>
+            <a:pPr algn="l" indent="0" marL="0">
+              <a:buNone/>
+            </a:pPr>
+            <a:r>
+              <a:rPr lang="en-US" sz="2000" b="1" dirty="0">
+                <a:solidFill>
+                  <a:srgbClr val="F8F9FA">
+                    <a:alpha val="10000"/>
+                  </a:srgbClr>
+                </a:solidFill>
+                <a:latin typeface="Montserrat Bold" pitchFamily="34" charset="0"/>
+                <a:ea typeface="Montserrat Bold" pitchFamily="34" charset="-122"/>
+                <a:cs typeface="Montserrat Bold" pitchFamily="34" charset="-120"/>
+              </a:rPr>
+              <a:t>MACHINE LEARNING</a:t>
+            </a:r>
+            <a:endParaRPr lang="en-US" sz="2000" dirty="0"/>
+          </a:p>
+        </p:txBody>
+      </p:sp>
+      <p:sp>
+        <p:nvSpPr>
+          <p:cNvPr id="8" name="Text 5"/>
+          <p:cNvSpPr/>
+          <p:nvPr/>
+        </p:nvSpPr>
+        <p:spPr>
+          <a:xfrm>
+            <a:off x="6526709" y="1906488"/>
+            <a:ext cx="2377083" cy="348258"/>
+          </a:xfrm>
+          <a:prstGeom prst="rect">
+            <a:avLst/>
+          </a:prstGeom>
+          <a:noFill/>
+          <a:ln/>
+        </p:spPr>
+        <p:txBody>
+          <a:bodyPr wrap="square" lIns="0" tIns="0" rIns="0" bIns="0" rtlCol="0" anchor="t">
+            <a:spAutoFit/>
+          </a:bodyPr>
+          <a:lstStyle/>
+          <a:p>
+            <a:pPr algn="l" indent="0" marL="0">
+              <a:buNone/>
+            </a:pPr>
+            <a:r>
+              <a:rPr lang="en-US" sz="2000" b="1" dirty="0">
+                <a:solidFill>
+                  <a:srgbClr val="F8F9FA">
+                    <a:alpha val="10000"/>
+                  </a:srgbClr>
+                </a:solidFill>
+                <a:latin typeface="Montserrat Bold" pitchFamily="34" charset="0"/>
+                <a:ea typeface="Montserrat Bold" pitchFamily="34" charset="-122"/>
+                <a:cs typeface="Montserrat Bold" pitchFamily="34" charset="-120"/>
+              </a:rPr>
+              <a:t>DATA ANALYSIS</a:t>
+            </a:r>
+            <a:endParaRPr lang="en-US" sz="2000" dirty="0"/>
+          </a:p>
+        </p:txBody>
+      </p:sp>
+      <p:sp>
+        <p:nvSpPr>
+          <p:cNvPr id="9" name="Text 6"/>
+          <p:cNvSpPr/>
+          <p:nvPr/>
+        </p:nvSpPr>
+        <p:spPr>
+          <a:xfrm>
+            <a:off x="6270427" y="2397621"/>
+            <a:ext cx="2889647" cy="348258"/>
+          </a:xfrm>
+          <a:prstGeom prst="rect">
+            <a:avLst/>
+          </a:prstGeom>
+          <a:noFill/>
+          <a:ln/>
+        </p:spPr>
+        <p:txBody>
+          <a:bodyPr wrap="square" lIns="0" tIns="0" rIns="0" bIns="0" rtlCol="0" anchor="t">
+            <a:spAutoFit/>
+          </a:bodyPr>
+          <a:lstStyle/>
+          <a:p>
+            <a:pPr algn="l" indent="0" marL="0">
+              <a:buNone/>
+            </a:pPr>
+            <a:r>
+              <a:rPr lang="en-US" sz="2000" b="1" dirty="0">
+                <a:solidFill>
+                  <a:srgbClr val="F8F9FA">
+                    <a:alpha val="10000"/>
+                  </a:srgbClr>
+                </a:solidFill>
+                <a:latin typeface="Montserrat Bold" pitchFamily="34" charset="0"/>
+                <a:ea typeface="Montserrat Bold" pitchFamily="34" charset="-122"/>
+                <a:cs typeface="Montserrat Bold" pitchFamily="34" charset="-120"/>
+              </a:rPr>
+              <a:t>FRAUD DETECTION</a:t>
+            </a:r>
+            <a:endParaRPr lang="en-US" sz="2000" dirty="0"/>
+          </a:p>
+        </p:txBody>
+      </p:sp>
+      <p:sp>
+        <p:nvSpPr>
+          <p:cNvPr id="10" name="Text 7"/>
+          <p:cNvSpPr/>
+          <p:nvPr/>
+        </p:nvSpPr>
+        <p:spPr>
+          <a:xfrm>
+            <a:off x="6227564" y="2888754"/>
+            <a:ext cx="2975372" cy="348258"/>
+          </a:xfrm>
+          <a:prstGeom prst="rect">
+            <a:avLst/>
+          </a:prstGeom>
+          <a:noFill/>
+          <a:ln/>
+        </p:spPr>
+        <p:txBody>
+          <a:bodyPr wrap="square" lIns="0" tIns="0" rIns="0" bIns="0" rtlCol="0" anchor="t">
+            <a:spAutoFit/>
+          </a:bodyPr>
+          <a:lstStyle/>
+          <a:p>
+            <a:pPr algn="l" indent="0" marL="0">
+              <a:buNone/>
+            </a:pPr>
+            <a:r>
+              <a:rPr lang="en-US" sz="2000" b="1" dirty="0">
+                <a:solidFill>
+                  <a:srgbClr val="F8F9FA">
+                    <a:alpha val="10000"/>
+                  </a:srgbClr>
+                </a:solidFill>
+                <a:latin typeface="Montserrat Bold" pitchFamily="34" charset="0"/>
+                <a:ea typeface="Montserrat Bold" pitchFamily="34" charset="-122"/>
+                <a:cs typeface="Montserrat Bold" pitchFamily="34" charset="-120"/>
+              </a:rPr>
+              <a:t>SMOTE ALGORITHM</a:t>
+            </a:r>
+            <a:endParaRPr lang="en-US" sz="2000" dirty="0"/>
+          </a:p>
+        </p:txBody>
+      </p:sp>
+      <p:sp>
+        <p:nvSpPr>
+          <p:cNvPr id="11" name="Text 8"/>
+          <p:cNvSpPr/>
+          <p:nvPr/>
+        </p:nvSpPr>
+        <p:spPr>
+          <a:xfrm>
+            <a:off x="6114157" y="3379887"/>
+            <a:ext cx="3202186" cy="348258"/>
+          </a:xfrm>
+          <a:prstGeom prst="rect">
+            <a:avLst/>
+          </a:prstGeom>
+          <a:noFill/>
+          <a:ln/>
+        </p:spPr>
+        <p:txBody>
+          <a:bodyPr wrap="square" lIns="0" tIns="0" rIns="0" bIns="0" rtlCol="0" anchor="t">
+            <a:spAutoFit/>
+          </a:bodyPr>
+          <a:lstStyle/>
+          <a:p>
+            <a:pPr algn="l" indent="0" marL="0">
+              <a:buNone/>
+            </a:pPr>
+            <a:r>
+              <a:rPr lang="en-US" sz="2000" b="1" dirty="0">
+                <a:solidFill>
+                  <a:srgbClr val="F8F9FA">
+                    <a:alpha val="10000"/>
+                  </a:srgbClr>
+                </a:solidFill>
+                <a:latin typeface="Montserrat Bold" pitchFamily="34" charset="0"/>
+                <a:ea typeface="Montserrat Bold" pitchFamily="34" charset="-122"/>
+                <a:cs typeface="Montserrat Bold" pitchFamily="34" charset="-120"/>
+              </a:rPr>
+              <a:t>F1-SCORE OPTIMIZED</a:t>
+            </a:r>
+            <a:endParaRPr lang="en-US" sz="2000" dirty="0"/>
+          </a:p>
+        </p:txBody>
+      </p:sp>
     </p:spTree>
   </p:cSld>
   <p:clrMapOvr>
@@ -1993,17 +2029,476 @@
         </p:blipFill>
         <p:spPr>
           <a:xfrm>
-            <a:off x="0" y="0"/>
-            <a:ext cx="9144000" cy="5143500"/>
+            <a:off x="57150" y="57150"/>
+            <a:ext cx="9029700" cy="5960957"/>
           </a:xfrm>
           <a:prstGeom prst="rect">
             <a:avLst/>
           </a:prstGeom>
         </p:spPr>
       </p:pic>
+      <p:sp>
+        <p:nvSpPr>
+          <p:cNvPr id="3" name="Text 0"/>
+          <p:cNvSpPr/>
+          <p:nvPr/>
+        </p:nvSpPr>
+        <p:spPr>
+          <a:xfrm>
+            <a:off x="628650" y="770381"/>
+            <a:ext cx="8572500" cy="462558"/>
+          </a:xfrm>
+          <a:prstGeom prst="rect">
+            <a:avLst/>
+          </a:prstGeom>
+          <a:noFill/>
+          <a:ln/>
+        </p:spPr>
+        <p:txBody>
+          <a:bodyPr wrap="square" lIns="170053" tIns="0" rIns="0" bIns="0" rtlCol="0" anchor="t">
+            <a:spAutoFit/>
+          </a:bodyPr>
+          <a:lstStyle/>
+          <a:p>
+            <a:pPr algn="l" indent="0" marL="0">
+              <a:buNone/>
+            </a:pPr>
+            <a:r>
+              <a:rPr lang="en-US" sz="2450" b="1" dirty="0">
+                <a:solidFill>
+                  <a:srgbClr val="212529"/>
+                </a:solidFill>
+                <a:latin typeface="Montserrat Bold" pitchFamily="34" charset="0"/>
+                <a:ea typeface="Montserrat Bold" pitchFamily="34" charset="-122"/>
+                <a:cs typeface="Montserrat Bold" pitchFamily="34" charset="-120"/>
+              </a:rPr>
+              <a:t>단순 정확도보다 실질적 탐지력이 중요한 이유</a:t>
+            </a:r>
+            <a:endParaRPr lang="en-US" sz="2450" dirty="0"/>
+          </a:p>
+        </p:txBody>
+      </p:sp>
+      <p:sp>
+        <p:nvSpPr>
+          <p:cNvPr id="4" name="Text 1"/>
+          <p:cNvSpPr/>
+          <p:nvPr/>
+        </p:nvSpPr>
+        <p:spPr>
+          <a:xfrm>
+            <a:off x="785813" y="1684818"/>
+            <a:ext cx="3700463" cy="232172"/>
+          </a:xfrm>
+          <a:prstGeom prst="rect">
+            <a:avLst/>
+          </a:prstGeom>
+          <a:noFill/>
+          <a:ln/>
+        </p:spPr>
+        <p:txBody>
+          <a:bodyPr wrap="square" lIns="0" tIns="0" rIns="0" bIns="0" rtlCol="0" anchor="t">
+            <a:spAutoFit/>
+          </a:bodyPr>
+          <a:lstStyle/>
+          <a:p>
+            <a:pPr algn="l" indent="0" marL="0">
+              <a:buNone/>
+            </a:pPr>
+            <a:r>
+              <a:rPr lang="en-US" sz="1200" b="1" dirty="0">
+                <a:solidFill>
+                  <a:srgbClr val="212529"/>
+                </a:solidFill>
+                <a:latin typeface="Montserrat Bold" pitchFamily="34" charset="0"/>
+                <a:ea typeface="Montserrat Bold" pitchFamily="34" charset="-122"/>
+                <a:cs typeface="Montserrat Bold" pitchFamily="34" charset="-120"/>
+              </a:rPr>
+              <a:t>핵심 문제: 정확도의 함정</a:t>
+            </a:r>
+            <a:endParaRPr lang="en-US" sz="1200" dirty="0"/>
+          </a:p>
+        </p:txBody>
+      </p:sp>
+      <p:sp>
+        <p:nvSpPr>
+          <p:cNvPr id="5" name="Text 2"/>
+          <p:cNvSpPr/>
+          <p:nvPr/>
+        </p:nvSpPr>
+        <p:spPr>
+          <a:xfrm>
+            <a:off x="785813" y="1988428"/>
+            <a:ext cx="3700463" cy="617153"/>
+          </a:xfrm>
+          <a:prstGeom prst="rect">
+            <a:avLst/>
+          </a:prstGeom>
+          <a:noFill/>
+          <a:ln/>
+        </p:spPr>
+        <p:txBody>
+          <a:bodyPr wrap="square" lIns="0" tIns="0" rIns="0" bIns="0" rtlCol="0" anchor="t">
+            <a:spAutoFit/>
+          </a:bodyPr>
+          <a:lstStyle/>
+          <a:p>
+            <a:pPr algn="l" indent="0" marL="0">
+              <a:lnSpc>
+                <a:spcPct val="128000"/>
+              </a:lnSpc>
+              <a:buNone/>
+            </a:pPr>
+            <a:r>
+              <a:rPr lang="en-US" sz="950" dirty="0">
+                <a:solidFill>
+                  <a:srgbClr val="495057"/>
+                </a:solidFill>
+                <a:latin typeface="Open Sans Light" pitchFamily="34" charset="0"/>
+                <a:ea typeface="Open Sans Light" pitchFamily="34" charset="-122"/>
+                <a:cs typeface="Open Sans Light" pitchFamily="34" charset="-120"/>
+              </a:rPr>
+              <a:t>전체 거래 중 99.83%가 정상인 데이터셋에서는 </a:t>
+            </a:r>
+            <a:r>
+              <a:rPr lang="en-US" sz="950" dirty="0">
+                <a:solidFill>
+                  <a:srgbClr val="495057"/>
+                </a:solidFill>
+                <a:latin typeface="Open Sans" pitchFamily="34" charset="0"/>
+                <a:ea typeface="Open Sans" pitchFamily="34" charset="-122"/>
+                <a:cs typeface="Open Sans" pitchFamily="34" charset="-120"/>
+              </a:rPr>
+              <a:t>"모두 정상"</a:t>
+            </a:r>
+            <a:r>
+              <a:rPr lang="en-US" sz="950" dirty="0">
+                <a:solidFill>
+                  <a:srgbClr val="495057"/>
+                </a:solidFill>
+                <a:latin typeface="Open Sans Light" pitchFamily="34" charset="0"/>
+                <a:ea typeface="Open Sans Light" pitchFamily="34" charset="-122"/>
+                <a:cs typeface="Open Sans Light" pitchFamily="34" charset="-120"/>
+              </a:rPr>
+              <a:t>이라</a:t>
+            </a:r>
+            <a:r>
+              <a:rPr lang="en-US" sz="950" dirty="0">
+                <a:solidFill>
+                  <a:srgbClr val="495057"/>
+                </a:solidFill>
+                <a:latin typeface="Open Sans Light" pitchFamily="34" charset="0"/>
+                <a:ea typeface="Open Sans Light" pitchFamily="34" charset="-122"/>
+                <a:cs typeface="Open Sans Light" pitchFamily="34" charset="-120"/>
+              </a:rPr>
+              <a:t>고만 예측해도 99.8%의 정확도가 나옵니다. 이는 모델이 사기를 </a:t>
+            </a:r>
+            <a:r>
+              <a:rPr lang="en-US" sz="950" dirty="0">
+                <a:solidFill>
+                  <a:srgbClr val="495057"/>
+                </a:solidFill>
+                <a:latin typeface="Open Sans Light" pitchFamily="34" charset="0"/>
+                <a:ea typeface="Open Sans Light" pitchFamily="34" charset="-122"/>
+                <a:cs typeface="Open Sans Light" pitchFamily="34" charset="-120"/>
+              </a:rPr>
+              <a:t>전혀 잡지 못해도 높은 점수를 받는 모순을 낳습니다.</a:t>
+            </a:r>
+            <a:endParaRPr lang="en-US" sz="950" dirty="0"/>
+          </a:p>
+        </p:txBody>
+      </p:sp>
+      <p:sp>
+        <p:nvSpPr>
+          <p:cNvPr id="6" name="Text 3"/>
+          <p:cNvSpPr/>
+          <p:nvPr/>
+        </p:nvSpPr>
+        <p:spPr>
+          <a:xfrm>
+            <a:off x="785813" y="2891331"/>
+            <a:ext cx="3700463" cy="232172"/>
+          </a:xfrm>
+          <a:prstGeom prst="rect">
+            <a:avLst/>
+          </a:prstGeom>
+          <a:noFill/>
+          <a:ln/>
+        </p:spPr>
+        <p:txBody>
+          <a:bodyPr wrap="square" lIns="0" tIns="0" rIns="0" bIns="0" rtlCol="0" anchor="t">
+            <a:spAutoFit/>
+          </a:bodyPr>
+          <a:lstStyle/>
+          <a:p>
+            <a:pPr algn="l" indent="0" marL="0">
+              <a:buNone/>
+            </a:pPr>
+            <a:r>
+              <a:rPr lang="en-US" sz="1200" b="1" dirty="0">
+                <a:solidFill>
+                  <a:srgbClr val="212529"/>
+                </a:solidFill>
+                <a:latin typeface="Montserrat Bold" pitchFamily="34" charset="0"/>
+                <a:ea typeface="Montserrat Bold" pitchFamily="34" charset="-122"/>
+                <a:cs typeface="Montserrat Bold" pitchFamily="34" charset="-120"/>
+              </a:rPr>
+              <a:t>평가 지표의 전환</a:t>
+            </a:r>
+            <a:endParaRPr lang="en-US" sz="1200" dirty="0"/>
+          </a:p>
+        </p:txBody>
+      </p:sp>
+      <p:sp>
+        <p:nvSpPr>
+          <p:cNvPr id="7" name="Text 4"/>
+          <p:cNvSpPr/>
+          <p:nvPr/>
+        </p:nvSpPr>
+        <p:spPr>
+          <a:xfrm>
+            <a:off x="785813" y="3194940"/>
+            <a:ext cx="3700463" cy="617153"/>
+          </a:xfrm>
+          <a:prstGeom prst="rect">
+            <a:avLst/>
+          </a:prstGeom>
+          <a:noFill/>
+          <a:ln/>
+        </p:spPr>
+        <p:txBody>
+          <a:bodyPr wrap="square" lIns="0" tIns="0" rIns="0" bIns="0" rtlCol="0" anchor="t">
+            <a:spAutoFit/>
+          </a:bodyPr>
+          <a:lstStyle/>
+          <a:p>
+            <a:pPr algn="l" indent="0" marL="0">
+              <a:lnSpc>
+                <a:spcPct val="128000"/>
+              </a:lnSpc>
+              <a:buNone/>
+            </a:pPr>
+            <a:r>
+              <a:rPr lang="en-US" sz="950" dirty="0">
+                <a:solidFill>
+                  <a:srgbClr val="495057"/>
+                </a:solidFill>
+                <a:latin typeface="Open Sans Light" pitchFamily="34" charset="0"/>
+                <a:ea typeface="Open Sans Light" pitchFamily="34" charset="-122"/>
+                <a:cs typeface="Open Sans Light" pitchFamily="34" charset="-120"/>
+              </a:rPr>
+              <a:t>Accuracy는 무의미합니다. 실제 사기를 얼마나 놓치지 않는지</a:t>
+            </a:r>
+            <a:r>
+              <a:rPr lang="en-US" sz="950" dirty="0">
+                <a:solidFill>
+                  <a:srgbClr val="495057"/>
+                </a:solidFill>
+                <a:latin typeface="Open Sans Light" pitchFamily="34" charset="0"/>
+                <a:ea typeface="Open Sans Light" pitchFamily="34" charset="-122"/>
+                <a:cs typeface="Open Sans Light" pitchFamily="34" charset="-120"/>
+              </a:rPr>
+              <a:t>(Recall)와 오탐을 얼마나 줄이는지(Precision)의 조화인 </a:t>
+            </a:r>
+            <a:r>
+              <a:rPr lang="en-US" sz="950" dirty="0">
+                <a:solidFill>
+                  <a:srgbClr val="495057"/>
+                </a:solidFill>
+                <a:latin typeface="Open Sans" pitchFamily="34" charset="0"/>
+                <a:ea typeface="Open Sans" pitchFamily="34" charset="-122"/>
+                <a:cs typeface="Open Sans" pitchFamily="34" charset="-120"/>
+              </a:rPr>
+              <a:t>F1-Score</a:t>
+            </a:r>
+            <a:r>
+              <a:rPr lang="en-US" sz="950" dirty="0">
+                <a:solidFill>
+                  <a:srgbClr val="495057"/>
+                </a:solidFill>
+                <a:latin typeface="Open Sans Light" pitchFamily="34" charset="0"/>
+                <a:ea typeface="Open Sans Light" pitchFamily="34" charset="-122"/>
+                <a:cs typeface="Open Sans Light" pitchFamily="34" charset="-120"/>
+              </a:rPr>
+              <a:t>와 </a:t>
+            </a:r>
+            <a:r>
+              <a:rPr lang="en-US" sz="950" dirty="0">
+                <a:solidFill>
+                  <a:srgbClr val="495057"/>
+                </a:solidFill>
+                <a:latin typeface="Open Sans" pitchFamily="34" charset="0"/>
+                <a:ea typeface="Open Sans" pitchFamily="34" charset="-122"/>
+                <a:cs typeface="Open Sans" pitchFamily="34" charset="-120"/>
+              </a:rPr>
+              <a:t>AUC-ROC</a:t>
+            </a:r>
+            <a:r>
+              <a:rPr lang="en-US" sz="950" dirty="0">
+                <a:solidFill>
+                  <a:srgbClr val="495057"/>
+                </a:solidFill>
+                <a:latin typeface="Open Sans Light" pitchFamily="34" charset="0"/>
+                <a:ea typeface="Open Sans Light" pitchFamily="34" charset="-122"/>
+                <a:cs typeface="Open Sans Light" pitchFamily="34" charset="-120"/>
+              </a:rPr>
+              <a:t>를 핵심 지표로 삼아야 합니다.</a:t>
+            </a:r>
+            <a:endParaRPr lang="en-US" sz="950" dirty="0"/>
+          </a:p>
+        </p:txBody>
+      </p:sp>
+      <p:sp>
+        <p:nvSpPr>
+          <p:cNvPr id="8" name="Text 5"/>
+          <p:cNvSpPr/>
+          <p:nvPr/>
+        </p:nvSpPr>
+        <p:spPr>
+          <a:xfrm>
+            <a:off x="785813" y="4057728"/>
+            <a:ext cx="3700463" cy="232172"/>
+          </a:xfrm>
+          <a:prstGeom prst="rect">
+            <a:avLst/>
+          </a:prstGeom>
+          <a:noFill/>
+          <a:ln/>
+        </p:spPr>
+        <p:txBody>
+          <a:bodyPr wrap="square" lIns="0" tIns="0" rIns="0" bIns="0" rtlCol="0" anchor="t">
+            <a:spAutoFit/>
+          </a:bodyPr>
+          <a:lstStyle/>
+          <a:p>
+            <a:pPr algn="l" indent="0" marL="0">
+              <a:buNone/>
+            </a:pPr>
+            <a:r>
+              <a:rPr lang="en-US" sz="1200" b="1" dirty="0">
+                <a:solidFill>
+                  <a:srgbClr val="212529"/>
+                </a:solidFill>
+                <a:latin typeface="Montserrat Bold" pitchFamily="34" charset="0"/>
+                <a:ea typeface="Montserrat Bold" pitchFamily="34" charset="-122"/>
+                <a:cs typeface="Montserrat Bold" pitchFamily="34" charset="-120"/>
+              </a:rPr>
+              <a:t>비즈니스 가치</a:t>
+            </a:r>
+            <a:endParaRPr lang="en-US" sz="1200" dirty="0"/>
+          </a:p>
+        </p:txBody>
+      </p:sp>
+      <p:sp>
+        <p:nvSpPr>
+          <p:cNvPr id="9" name="Text 6"/>
+          <p:cNvSpPr/>
+          <p:nvPr/>
+        </p:nvSpPr>
+        <p:spPr>
+          <a:xfrm>
+            <a:off x="785813" y="4361337"/>
+            <a:ext cx="3700463" cy="617153"/>
+          </a:xfrm>
+          <a:prstGeom prst="rect">
+            <a:avLst/>
+          </a:prstGeom>
+          <a:noFill/>
+          <a:ln/>
+        </p:spPr>
+        <p:txBody>
+          <a:bodyPr wrap="square" lIns="0" tIns="0" rIns="0" bIns="0" rtlCol="0" anchor="t">
+            <a:spAutoFit/>
+          </a:bodyPr>
+          <a:lstStyle/>
+          <a:p>
+            <a:pPr algn="l" indent="0" marL="0">
+              <a:lnSpc>
+                <a:spcPct val="128000"/>
+              </a:lnSpc>
+              <a:buNone/>
+            </a:pPr>
+            <a:r>
+              <a:rPr lang="en-US" sz="950" dirty="0">
+                <a:solidFill>
+                  <a:srgbClr val="495057"/>
+                </a:solidFill>
+                <a:latin typeface="Open Sans Light" pitchFamily="34" charset="0"/>
+                <a:ea typeface="Open Sans Light" pitchFamily="34" charset="-122"/>
+                <a:cs typeface="Open Sans Light" pitchFamily="34" charset="-120"/>
+              </a:rPr>
+              <a:t>사기를 놓칠 경우 발생하는 직접적인 금전적 피해를 최소화하기 </a:t>
+            </a:r>
+            <a:r>
+              <a:rPr lang="en-US" sz="950" dirty="0">
+                <a:solidFill>
+                  <a:srgbClr val="495057"/>
+                </a:solidFill>
+                <a:latin typeface="Open Sans Light" pitchFamily="34" charset="0"/>
+                <a:ea typeface="Open Sans Light" pitchFamily="34" charset="-122"/>
+                <a:cs typeface="Open Sans Light" pitchFamily="34" charset="-120"/>
+              </a:rPr>
+              <a:t>위해 </a:t>
+            </a:r>
+            <a:r>
+              <a:rPr lang="en-US" sz="950" dirty="0">
+                <a:solidFill>
+                  <a:srgbClr val="495057"/>
+                </a:solidFill>
+                <a:latin typeface="Open Sans" pitchFamily="34" charset="0"/>
+                <a:ea typeface="Open Sans" pitchFamily="34" charset="-122"/>
+                <a:cs typeface="Open Sans" pitchFamily="34" charset="-120"/>
+              </a:rPr>
+              <a:t>Recall(재현율)</a:t>
+            </a:r>
+            <a:r>
+              <a:rPr lang="en-US" sz="950" dirty="0">
+                <a:solidFill>
+                  <a:srgbClr val="495057"/>
+                </a:solidFill>
+                <a:latin typeface="Open Sans Light" pitchFamily="34" charset="0"/>
+                <a:ea typeface="Open Sans Light" pitchFamily="34" charset="-122"/>
+                <a:cs typeface="Open Sans Light" pitchFamily="34" charset="-120"/>
+              </a:rPr>
+              <a:t> 지표를 최우선으로 고려하여 탐지 시스템을 </a:t>
+            </a:r>
+            <a:r>
+              <a:rPr lang="en-US" sz="950" dirty="0">
+                <a:solidFill>
+                  <a:srgbClr val="495057"/>
+                </a:solidFill>
+                <a:latin typeface="Open Sans Light" pitchFamily="34" charset="0"/>
+                <a:ea typeface="Open Sans Light" pitchFamily="34" charset="-122"/>
+                <a:cs typeface="Open Sans Light" pitchFamily="34" charset="-120"/>
+              </a:rPr>
+              <a:t>설계</a:t>
+            </a:r>
+            <a:endParaRPr lang="en-US" sz="950" dirty="0"/>
+          </a:p>
+        </p:txBody>
+      </p:sp>
+      <p:sp>
+        <p:nvSpPr>
+          <p:cNvPr id="10" name="Shape 7"/>
+          <p:cNvSpPr/>
+          <p:nvPr/>
+        </p:nvSpPr>
+        <p:spPr>
+          <a:xfrm>
+            <a:off x="4716414" y="1593378"/>
+            <a:ext cx="3857625" cy="2286000"/>
+          </a:xfrm>
+          <a:prstGeom prst="rect">
+            <a:avLst/>
+          </a:prstGeom>
+          <a:solidFill>
+            <a:srgbClr val="FFFFFF"/>
+          </a:solidFill>
+          <a:ln/>
+        </p:spPr>
+      </p:sp>
       <p:pic>
         <p:nvPicPr>
-          <p:cNvPr id="3" name="Image 1" descr="preencoded.png">    </p:cNvPr>
+          <p:cNvPr id="11" name="Image 1" descr="preencoded.png">    </p:cNvPr>
           <p:cNvPicPr>
             <a:picLocks noChangeAspect="1"/>
           </p:cNvPicPr>
@@ -2017,14 +2512,422 @@
         </p:blipFill>
         <p:spPr>
           <a:xfrm>
-            <a:off x="0" y="0"/>
-            <a:ext cx="9144000" cy="5143500"/>
+            <a:off x="4859289" y="1294550"/>
+            <a:ext cx="3571875" cy="2143125"/>
           </a:xfrm>
           <a:prstGeom prst="rect">
             <a:avLst/>
           </a:prstGeom>
         </p:spPr>
       </p:pic>
+      <p:sp>
+        <p:nvSpPr>
+          <p:cNvPr id="12" name="Shape 8"/>
+          <p:cNvSpPr/>
+          <p:nvPr/>
+        </p:nvSpPr>
+        <p:spPr>
+          <a:xfrm>
+            <a:off x="4859069" y="3468613"/>
+            <a:ext cx="1857375" cy="821531"/>
+          </a:xfrm>
+          <a:prstGeom prst="rect">
+            <a:avLst/>
+          </a:prstGeom>
+          <a:solidFill>
+            <a:srgbClr val="E9ECEF"/>
+          </a:solidFill>
+          <a:ln/>
+        </p:spPr>
+      </p:sp>
+      <p:sp>
+        <p:nvSpPr>
+          <p:cNvPr id="13" name="Text 9"/>
+          <p:cNvSpPr/>
+          <p:nvPr/>
+        </p:nvSpPr>
+        <p:spPr>
+          <a:xfrm>
+            <a:off x="4966225" y="3575769"/>
+            <a:ext cx="1750219" cy="135731"/>
+          </a:xfrm>
+          <a:prstGeom prst="rect">
+            <a:avLst/>
+          </a:prstGeom>
+          <a:noFill/>
+          <a:ln/>
+        </p:spPr>
+        <p:txBody>
+          <a:bodyPr wrap="square" lIns="0" tIns="0" rIns="0" bIns="0" rtlCol="0" anchor="t">
+            <a:spAutoFit/>
+          </a:bodyPr>
+          <a:lstStyle/>
+          <a:p>
+            <a:pPr algn="l" indent="0" marL="0">
+              <a:buNone/>
+            </a:pPr>
+            <a:r>
+              <a:rPr lang="en-US" sz="700" b="1" dirty="0">
+                <a:solidFill>
+                  <a:srgbClr val="087F5B"/>
+                </a:solidFill>
+                <a:latin typeface="Open Sans Bold" pitchFamily="34" charset="0"/>
+                <a:ea typeface="Open Sans Bold" pitchFamily="34" charset="-122"/>
+                <a:cs typeface="Open Sans Bold" pitchFamily="34" charset="-120"/>
+              </a:rPr>
+              <a:t>RECALL</a:t>
+            </a:r>
+            <a:endParaRPr lang="en-US" sz="700" dirty="0"/>
+          </a:p>
+        </p:txBody>
+      </p:sp>
+      <p:sp>
+        <p:nvSpPr>
+          <p:cNvPr id="14" name="Text 10"/>
+          <p:cNvSpPr/>
+          <p:nvPr/>
+        </p:nvSpPr>
+        <p:spPr>
+          <a:xfrm>
+            <a:off x="4966225" y="3711500"/>
+            <a:ext cx="1750219" cy="203597"/>
+          </a:xfrm>
+          <a:prstGeom prst="rect">
+            <a:avLst/>
+          </a:prstGeom>
+          <a:noFill/>
+          <a:ln/>
+        </p:spPr>
+        <p:txBody>
+          <a:bodyPr wrap="square" lIns="0" tIns="0" rIns="0" bIns="0" rtlCol="0" anchor="t">
+            <a:spAutoFit/>
+          </a:bodyPr>
+          <a:lstStyle/>
+          <a:p>
+            <a:pPr algn="l" indent="0" marL="0">
+              <a:buNone/>
+            </a:pPr>
+            <a:r>
+              <a:rPr lang="en-US" sz="1050" dirty="0">
+                <a:solidFill>
+                  <a:srgbClr val="212529"/>
+                </a:solidFill>
+                <a:latin typeface="Open Sans" pitchFamily="34" charset="0"/>
+                <a:ea typeface="Open Sans" pitchFamily="34" charset="-122"/>
+                <a:cs typeface="Open Sans" pitchFamily="34" charset="-120"/>
+              </a:rPr>
+              <a:t>실제 사기 중 탐지 비율</a:t>
+            </a:r>
+            <a:endParaRPr lang="en-US" sz="1050" dirty="0"/>
+          </a:p>
+        </p:txBody>
+      </p:sp>
+      <p:sp>
+        <p:nvSpPr>
+          <p:cNvPr id="15" name="Shape 11"/>
+          <p:cNvSpPr/>
+          <p:nvPr/>
+        </p:nvSpPr>
+        <p:spPr>
+          <a:xfrm>
+            <a:off x="6859319" y="3468613"/>
+            <a:ext cx="1857375" cy="821531"/>
+          </a:xfrm>
+          <a:prstGeom prst="rect">
+            <a:avLst/>
+          </a:prstGeom>
+          <a:solidFill>
+            <a:srgbClr val="E9ECEF"/>
+          </a:solidFill>
+          <a:ln/>
+        </p:spPr>
+      </p:sp>
+      <p:sp>
+        <p:nvSpPr>
+          <p:cNvPr id="16" name="Text 12"/>
+          <p:cNvSpPr/>
+          <p:nvPr/>
+        </p:nvSpPr>
+        <p:spPr>
+          <a:xfrm>
+            <a:off x="6966475" y="3575769"/>
+            <a:ext cx="1750219" cy="135731"/>
+          </a:xfrm>
+          <a:prstGeom prst="rect">
+            <a:avLst/>
+          </a:prstGeom>
+          <a:noFill/>
+          <a:ln/>
+        </p:spPr>
+        <p:txBody>
+          <a:bodyPr wrap="square" lIns="0" tIns="0" rIns="0" bIns="0" rtlCol="0" anchor="t">
+            <a:spAutoFit/>
+          </a:bodyPr>
+          <a:lstStyle/>
+          <a:p>
+            <a:pPr algn="l" indent="0" marL="0">
+              <a:buNone/>
+            </a:pPr>
+            <a:r>
+              <a:rPr lang="en-US" sz="700" b="1" dirty="0">
+                <a:solidFill>
+                  <a:srgbClr val="087F5B"/>
+                </a:solidFill>
+                <a:latin typeface="Open Sans Bold" pitchFamily="34" charset="0"/>
+                <a:ea typeface="Open Sans Bold" pitchFamily="34" charset="-122"/>
+                <a:cs typeface="Open Sans Bold" pitchFamily="34" charset="-120"/>
+              </a:rPr>
+              <a:t>PRECISION</a:t>
+            </a:r>
+            <a:endParaRPr lang="en-US" sz="700" dirty="0"/>
+          </a:p>
+        </p:txBody>
+      </p:sp>
+      <p:sp>
+        <p:nvSpPr>
+          <p:cNvPr id="17" name="Text 13"/>
+          <p:cNvSpPr/>
+          <p:nvPr/>
+        </p:nvSpPr>
+        <p:spPr>
+          <a:xfrm>
+            <a:off x="6966475" y="3711500"/>
+            <a:ext cx="1750219" cy="203597"/>
+          </a:xfrm>
+          <a:prstGeom prst="rect">
+            <a:avLst/>
+          </a:prstGeom>
+          <a:noFill/>
+          <a:ln/>
+        </p:spPr>
+        <p:txBody>
+          <a:bodyPr wrap="square" lIns="0" tIns="0" rIns="0" bIns="0" rtlCol="0" anchor="t">
+            <a:spAutoFit/>
+          </a:bodyPr>
+          <a:lstStyle/>
+          <a:p>
+            <a:pPr algn="l" indent="0" marL="0">
+              <a:buNone/>
+            </a:pPr>
+            <a:r>
+              <a:rPr lang="en-US" sz="1050" dirty="0">
+                <a:solidFill>
+                  <a:srgbClr val="212529"/>
+                </a:solidFill>
+                <a:latin typeface="Open Sans" pitchFamily="34" charset="0"/>
+                <a:ea typeface="Open Sans" pitchFamily="34" charset="-122"/>
+                <a:cs typeface="Open Sans" pitchFamily="34" charset="-120"/>
+              </a:rPr>
+              <a:t>사기 예측 중 실제 비율</a:t>
+            </a:r>
+            <a:endParaRPr lang="en-US" sz="1050" dirty="0"/>
+          </a:p>
+        </p:txBody>
+      </p:sp>
+      <p:sp>
+        <p:nvSpPr>
+          <p:cNvPr id="18" name="Shape 14"/>
+          <p:cNvSpPr/>
+          <p:nvPr/>
+        </p:nvSpPr>
+        <p:spPr>
+          <a:xfrm>
+            <a:off x="4859069" y="4063081"/>
+            <a:ext cx="1857375" cy="821531"/>
+          </a:xfrm>
+          <a:prstGeom prst="rect">
+            <a:avLst/>
+          </a:prstGeom>
+          <a:solidFill>
+            <a:srgbClr val="E9ECEF"/>
+          </a:solidFill>
+          <a:ln/>
+        </p:spPr>
+      </p:sp>
+      <p:sp>
+        <p:nvSpPr>
+          <p:cNvPr id="19" name="Text 15"/>
+          <p:cNvSpPr/>
+          <p:nvPr/>
+        </p:nvSpPr>
+        <p:spPr>
+          <a:xfrm>
+            <a:off x="4966225" y="4170237"/>
+            <a:ext cx="1750219" cy="135731"/>
+          </a:xfrm>
+          <a:prstGeom prst="rect">
+            <a:avLst/>
+          </a:prstGeom>
+          <a:noFill/>
+          <a:ln/>
+        </p:spPr>
+        <p:txBody>
+          <a:bodyPr wrap="square" lIns="0" tIns="0" rIns="0" bIns="0" rtlCol="0" anchor="t">
+            <a:spAutoFit/>
+          </a:bodyPr>
+          <a:lstStyle/>
+          <a:p>
+            <a:pPr algn="l" indent="0" marL="0">
+              <a:buNone/>
+            </a:pPr>
+            <a:r>
+              <a:rPr lang="en-US" sz="700" b="1" dirty="0">
+                <a:solidFill>
+                  <a:srgbClr val="087F5B"/>
+                </a:solidFill>
+                <a:latin typeface="Open Sans Bold" pitchFamily="34" charset="0"/>
+                <a:ea typeface="Open Sans Bold" pitchFamily="34" charset="-122"/>
+                <a:cs typeface="Open Sans Bold" pitchFamily="34" charset="-120"/>
+              </a:rPr>
+              <a:t>F1-SCORE</a:t>
+            </a:r>
+            <a:endParaRPr lang="en-US" sz="700" dirty="0"/>
+          </a:p>
+        </p:txBody>
+      </p:sp>
+      <p:sp>
+        <p:nvSpPr>
+          <p:cNvPr id="20" name="Text 16"/>
+          <p:cNvSpPr/>
+          <p:nvPr/>
+        </p:nvSpPr>
+        <p:spPr>
+          <a:xfrm>
+            <a:off x="4966225" y="4305968"/>
+            <a:ext cx="1750219" cy="203597"/>
+          </a:xfrm>
+          <a:prstGeom prst="rect">
+            <a:avLst/>
+          </a:prstGeom>
+          <a:noFill/>
+          <a:ln/>
+        </p:spPr>
+        <p:txBody>
+          <a:bodyPr wrap="square" lIns="0" tIns="0" rIns="0" bIns="0" rtlCol="0" anchor="t">
+            <a:spAutoFit/>
+          </a:bodyPr>
+          <a:lstStyle/>
+          <a:p>
+            <a:pPr algn="l" indent="0" marL="0">
+              <a:buNone/>
+            </a:pPr>
+            <a:r>
+              <a:rPr lang="en-US" sz="1050" dirty="0">
+                <a:solidFill>
+                  <a:srgbClr val="212529"/>
+                </a:solidFill>
+                <a:latin typeface="Open Sans" pitchFamily="34" charset="0"/>
+                <a:ea typeface="Open Sans" pitchFamily="34" charset="-122"/>
+                <a:cs typeface="Open Sans" pitchFamily="34" charset="-120"/>
+              </a:rPr>
+              <a:t>정밀도와 재현율의 조화</a:t>
+            </a:r>
+            <a:endParaRPr lang="en-US" sz="1050" dirty="0"/>
+          </a:p>
+        </p:txBody>
+      </p:sp>
+      <p:sp>
+        <p:nvSpPr>
+          <p:cNvPr id="21" name="Shape 17"/>
+          <p:cNvSpPr/>
+          <p:nvPr/>
+        </p:nvSpPr>
+        <p:spPr>
+          <a:xfrm>
+            <a:off x="6859319" y="4063080"/>
+            <a:ext cx="1857375" cy="821531"/>
+          </a:xfrm>
+          <a:prstGeom prst="rect">
+            <a:avLst/>
+          </a:prstGeom>
+          <a:solidFill>
+            <a:srgbClr val="E9ECEF"/>
+          </a:solidFill>
+          <a:ln/>
+        </p:spPr>
+      </p:sp>
+      <p:sp>
+        <p:nvSpPr>
+          <p:cNvPr id="22" name="Text 18"/>
+          <p:cNvSpPr/>
+          <p:nvPr/>
+        </p:nvSpPr>
+        <p:spPr>
+          <a:xfrm>
+            <a:off x="6966475" y="4170236"/>
+            <a:ext cx="1750219" cy="135731"/>
+          </a:xfrm>
+          <a:prstGeom prst="rect">
+            <a:avLst/>
+          </a:prstGeom>
+          <a:noFill/>
+          <a:ln/>
+        </p:spPr>
+        <p:txBody>
+          <a:bodyPr wrap="square" lIns="0" tIns="0" rIns="0" bIns="0" rtlCol="0" anchor="t">
+            <a:spAutoFit/>
+          </a:bodyPr>
+          <a:lstStyle/>
+          <a:p>
+            <a:pPr algn="l" indent="0" marL="0">
+              <a:buNone/>
+            </a:pPr>
+            <a:r>
+              <a:rPr lang="en-US" sz="700" b="1" dirty="0">
+                <a:solidFill>
+                  <a:srgbClr val="087F5B"/>
+                </a:solidFill>
+                <a:latin typeface="Open Sans Bold" pitchFamily="34" charset="0"/>
+                <a:ea typeface="Open Sans Bold" pitchFamily="34" charset="-122"/>
+                <a:cs typeface="Open Sans Bold" pitchFamily="34" charset="-120"/>
+              </a:rPr>
+              <a:t>AUC-ROC</a:t>
+            </a:r>
+            <a:endParaRPr lang="en-US" sz="700" dirty="0"/>
+          </a:p>
+        </p:txBody>
+      </p:sp>
+      <p:sp>
+        <p:nvSpPr>
+          <p:cNvPr id="23" name="Text 19"/>
+          <p:cNvSpPr/>
+          <p:nvPr/>
+        </p:nvSpPr>
+        <p:spPr>
+          <a:xfrm>
+            <a:off x="6966475" y="4305968"/>
+            <a:ext cx="1750219" cy="203597"/>
+          </a:xfrm>
+          <a:prstGeom prst="rect">
+            <a:avLst/>
+          </a:prstGeom>
+          <a:noFill/>
+          <a:ln/>
+        </p:spPr>
+        <p:txBody>
+          <a:bodyPr wrap="square" lIns="0" tIns="0" rIns="0" bIns="0" rtlCol="0" anchor="t">
+            <a:spAutoFit/>
+          </a:bodyPr>
+          <a:lstStyle/>
+          <a:p>
+            <a:pPr algn="l" indent="0" marL="0">
+              <a:buNone/>
+            </a:pPr>
+            <a:r>
+              <a:rPr lang="en-US" sz="1050" dirty="0">
+                <a:solidFill>
+                  <a:srgbClr val="212529"/>
+                </a:solidFill>
+                <a:latin typeface="Open Sans" pitchFamily="34" charset="0"/>
+                <a:ea typeface="Open Sans" pitchFamily="34" charset="-122"/>
+                <a:cs typeface="Open Sans" pitchFamily="34" charset="-120"/>
+              </a:rPr>
+              <a:t>전체적인 판별 성능</a:t>
+            </a:r>
+            <a:endParaRPr lang="en-US" sz="1050" dirty="0"/>
+          </a:p>
+        </p:txBody>
+      </p:sp>
     </p:spTree>
   </p:cSld>
   <p:clrMapOvr>
@@ -2074,30 +2977,883 @@
           </a:prstGeom>
         </p:spPr>
       </p:pic>
-      <p:pic>
-        <p:nvPicPr>
-          <p:cNvPr id="3" name="Image 1" descr="preencoded.png">    </p:cNvPr>
-          <p:cNvPicPr>
-            <a:picLocks noChangeAspect="1"/>
-          </p:cNvPicPr>
-          <p:nvPr/>
-        </p:nvPicPr>
-        <p:blipFill>
-          <a:blip r:embed="rId2"/>
-          <a:stretch>
-            <a:fillRect/>
-          </a:stretch>
-        </p:blipFill>
-        <p:spPr>
-          <a:xfrm>
-            <a:off x="0" y="0"/>
-            <a:ext cx="9144000" cy="5143500"/>
-          </a:xfrm>
-          <a:prstGeom prst="rect">
-            <a:avLst/>
-          </a:prstGeom>
-        </p:spPr>
-      </p:pic>
+      <p:sp>
+        <p:nvSpPr>
+          <p:cNvPr id="3" name="Text 0"/>
+          <p:cNvSpPr/>
+          <p:nvPr/>
+        </p:nvSpPr>
+        <p:spPr>
+          <a:xfrm>
+            <a:off x="571500" y="713231"/>
+            <a:ext cx="8572500" cy="462558"/>
+          </a:xfrm>
+          <a:prstGeom prst="rect">
+            <a:avLst/>
+          </a:prstGeom>
+          <a:noFill/>
+          <a:ln/>
+        </p:spPr>
+        <p:txBody>
+          <a:bodyPr wrap="square" lIns="170053" tIns="0" rIns="0" bIns="0" rtlCol="0" anchor="t">
+            <a:spAutoFit/>
+          </a:bodyPr>
+          <a:lstStyle/>
+          <a:p>
+            <a:pPr algn="l" indent="0" marL="0">
+              <a:buNone/>
+            </a:pPr>
+            <a:r>
+              <a:rPr lang="en-US" sz="2450" b="1" dirty="0">
+                <a:solidFill>
+                  <a:srgbClr val="212529"/>
+                </a:solidFill>
+                <a:latin typeface="Montserrat Bold" pitchFamily="34" charset="0"/>
+                <a:ea typeface="Montserrat Bold" pitchFamily="34" charset="-122"/>
+                <a:cs typeface="Montserrat Bold" pitchFamily="34" charset="-120"/>
+              </a:rPr>
+              <a:t>데이터 프로파일링: 0.17%의 사기 거래를 찾아서</a:t>
+            </a:r>
+            <a:endParaRPr lang="en-US" sz="2450" dirty="0"/>
+          </a:p>
+        </p:txBody>
+      </p:sp>
+      <p:sp>
+        <p:nvSpPr>
+          <p:cNvPr id="4" name="Shape 1"/>
+          <p:cNvSpPr/>
+          <p:nvPr/>
+        </p:nvSpPr>
+        <p:spPr>
+          <a:xfrm>
+            <a:off x="571500" y="1531832"/>
+            <a:ext cx="3957638" cy="714375"/>
+          </a:xfrm>
+          <a:prstGeom prst="rect">
+            <a:avLst/>
+          </a:prstGeom>
+          <a:solidFill>
+            <a:srgbClr val="FFFFFF"/>
+          </a:solidFill>
+          <a:ln/>
+        </p:spPr>
+      </p:sp>
+      <p:sp>
+        <p:nvSpPr>
+          <p:cNvPr id="5" name="Shape 2"/>
+          <p:cNvSpPr/>
+          <p:nvPr/>
+        </p:nvSpPr>
+        <p:spPr>
+          <a:xfrm>
+            <a:off x="571500" y="1531832"/>
+            <a:ext cx="14288" cy="714375"/>
+          </a:xfrm>
+          <a:prstGeom prst="rect">
+            <a:avLst/>
+          </a:prstGeom>
+          <a:solidFill>
+            <a:srgbClr val="087F5B"/>
+          </a:solidFill>
+          <a:ln/>
+        </p:spPr>
+      </p:sp>
+      <p:sp>
+        <p:nvSpPr>
+          <p:cNvPr id="6" name="Text 3"/>
+          <p:cNvSpPr/>
+          <p:nvPr/>
+        </p:nvSpPr>
+        <p:spPr>
+          <a:xfrm>
+            <a:off x="714375" y="1588982"/>
+            <a:ext cx="3671888" cy="121444"/>
+          </a:xfrm>
+          <a:prstGeom prst="rect">
+            <a:avLst/>
+          </a:prstGeom>
+          <a:noFill/>
+          <a:ln/>
+        </p:spPr>
+        <p:txBody>
+          <a:bodyPr wrap="square" lIns="0" tIns="0" rIns="0" bIns="0" rtlCol="0" anchor="t">
+            <a:spAutoFit/>
+          </a:bodyPr>
+          <a:lstStyle/>
+          <a:p>
+            <a:pPr algn="l" indent="0" marL="0">
+              <a:buNone/>
+            </a:pPr>
+            <a:r>
+              <a:rPr lang="en-US" sz="700" b="1" dirty="0">
+                <a:solidFill>
+                  <a:srgbClr val="087F5B"/>
+                </a:solidFill>
+                <a:latin typeface="Montserrat Bold" pitchFamily="34" charset="0"/>
+                <a:ea typeface="Montserrat Bold" pitchFamily="34" charset="-122"/>
+                <a:cs typeface="Montserrat Bold" pitchFamily="34" charset="-120"/>
+              </a:rPr>
+              <a:t>DATA SOURCE</a:t>
+            </a:r>
+            <a:endParaRPr lang="en-US" sz="700" dirty="0"/>
+          </a:p>
+        </p:txBody>
+      </p:sp>
+      <p:sp>
+        <p:nvSpPr>
+          <p:cNvPr id="7" name="Text 4"/>
+          <p:cNvSpPr/>
+          <p:nvPr/>
+        </p:nvSpPr>
+        <p:spPr>
+          <a:xfrm>
+            <a:off x="714375" y="1753288"/>
+            <a:ext cx="3671888" cy="233958"/>
+          </a:xfrm>
+          <a:prstGeom prst="rect">
+            <a:avLst/>
+          </a:prstGeom>
+          <a:noFill/>
+          <a:ln/>
+        </p:spPr>
+        <p:txBody>
+          <a:bodyPr wrap="square" lIns="0" tIns="0" rIns="0" bIns="0" rtlCol="0" anchor="t">
+            <a:spAutoFit/>
+          </a:bodyPr>
+          <a:lstStyle/>
+          <a:p>
+            <a:pPr algn="l" indent="0" marL="0">
+              <a:buNone/>
+            </a:pPr>
+            <a:r>
+              <a:rPr lang="en-US" sz="1250" dirty="0">
+                <a:solidFill>
+                  <a:srgbClr val="212529"/>
+                </a:solidFill>
+                <a:latin typeface="Open Sans" pitchFamily="34" charset="0"/>
+                <a:ea typeface="Open Sans" pitchFamily="34" charset="-122"/>
+                <a:cs typeface="Open Sans" pitchFamily="34" charset="-120"/>
+              </a:rPr>
+              <a:t>Kaggle (ULB Machine Learning Group)</a:t>
+            </a:r>
+            <a:endParaRPr lang="en-US" sz="1250" dirty="0"/>
+          </a:p>
+        </p:txBody>
+      </p:sp>
+      <p:sp>
+        <p:nvSpPr>
+          <p:cNvPr id="8" name="Shape 5"/>
+          <p:cNvSpPr/>
+          <p:nvPr/>
+        </p:nvSpPr>
+        <p:spPr>
+          <a:xfrm>
+            <a:off x="571500" y="2303357"/>
+            <a:ext cx="3957638" cy="714375"/>
+          </a:xfrm>
+          <a:prstGeom prst="rect">
+            <a:avLst/>
+          </a:prstGeom>
+          <a:solidFill>
+            <a:srgbClr val="FFFFFF"/>
+          </a:solidFill>
+          <a:ln/>
+        </p:spPr>
+      </p:sp>
+      <p:sp>
+        <p:nvSpPr>
+          <p:cNvPr id="9" name="Shape 6"/>
+          <p:cNvSpPr/>
+          <p:nvPr/>
+        </p:nvSpPr>
+        <p:spPr>
+          <a:xfrm>
+            <a:off x="571500" y="2303357"/>
+            <a:ext cx="14288" cy="714375"/>
+          </a:xfrm>
+          <a:prstGeom prst="rect">
+            <a:avLst/>
+          </a:prstGeom>
+          <a:solidFill>
+            <a:srgbClr val="087F5B"/>
+          </a:solidFill>
+          <a:ln/>
+        </p:spPr>
+      </p:sp>
+      <p:sp>
+        <p:nvSpPr>
+          <p:cNvPr id="10" name="Text 7"/>
+          <p:cNvSpPr/>
+          <p:nvPr/>
+        </p:nvSpPr>
+        <p:spPr>
+          <a:xfrm>
+            <a:off x="714375" y="2360507"/>
+            <a:ext cx="3671888" cy="121444"/>
+          </a:xfrm>
+          <a:prstGeom prst="rect">
+            <a:avLst/>
+          </a:prstGeom>
+          <a:noFill/>
+          <a:ln/>
+        </p:spPr>
+        <p:txBody>
+          <a:bodyPr wrap="square" lIns="0" tIns="0" rIns="0" bIns="0" rtlCol="0" anchor="t">
+            <a:spAutoFit/>
+          </a:bodyPr>
+          <a:lstStyle/>
+          <a:p>
+            <a:pPr algn="l" indent="0" marL="0">
+              <a:buNone/>
+            </a:pPr>
+            <a:r>
+              <a:rPr lang="en-US" sz="700" b="1" dirty="0">
+                <a:solidFill>
+                  <a:srgbClr val="087F5B"/>
+                </a:solidFill>
+                <a:latin typeface="Montserrat Bold" pitchFamily="34" charset="0"/>
+                <a:ea typeface="Montserrat Bold" pitchFamily="34" charset="-122"/>
+                <a:cs typeface="Montserrat Bold" pitchFamily="34" charset="-120"/>
+              </a:rPr>
+              <a:t>TOTAL TRANSACTIONS</a:t>
+            </a:r>
+            <a:endParaRPr lang="en-US" sz="700" dirty="0"/>
+          </a:p>
+        </p:txBody>
+      </p:sp>
+      <p:sp>
+        <p:nvSpPr>
+          <p:cNvPr id="11" name="Text 8"/>
+          <p:cNvSpPr/>
+          <p:nvPr/>
+        </p:nvSpPr>
+        <p:spPr>
+          <a:xfrm>
+            <a:off x="714375" y="2524813"/>
+            <a:ext cx="3671888" cy="244673"/>
+          </a:xfrm>
+          <a:prstGeom prst="rect">
+            <a:avLst/>
+          </a:prstGeom>
+          <a:noFill/>
+          <a:ln/>
+        </p:spPr>
+        <p:txBody>
+          <a:bodyPr wrap="square" lIns="0" tIns="0" rIns="0" bIns="0" rtlCol="0" anchor="t">
+            <a:spAutoFit/>
+          </a:bodyPr>
+          <a:lstStyle/>
+          <a:p>
+            <a:pPr algn="l" indent="0" marL="0">
+              <a:buNone/>
+            </a:pPr>
+            <a:r>
+              <a:rPr lang="en-US" sz="1250" dirty="0">
+                <a:solidFill>
+                  <a:srgbClr val="212529"/>
+                </a:solidFill>
+                <a:latin typeface="Open Sans" pitchFamily="34" charset="0"/>
+                <a:ea typeface="Open Sans" pitchFamily="34" charset="-122"/>
+                <a:cs typeface="Open Sans" pitchFamily="34" charset="-120"/>
+              </a:rPr>
+              <a:t>284,807 건</a:t>
+            </a:r>
+            <a:endParaRPr lang="en-US" sz="1250" dirty="0"/>
+          </a:p>
+        </p:txBody>
+      </p:sp>
+      <p:sp>
+        <p:nvSpPr>
+          <p:cNvPr id="12" name="Shape 9"/>
+          <p:cNvSpPr/>
+          <p:nvPr/>
+        </p:nvSpPr>
+        <p:spPr>
+          <a:xfrm>
+            <a:off x="571500" y="3074882"/>
+            <a:ext cx="3957638" cy="767953"/>
+          </a:xfrm>
+          <a:prstGeom prst="rect">
+            <a:avLst/>
+          </a:prstGeom>
+          <a:solidFill>
+            <a:srgbClr val="FFFFFF"/>
+          </a:solidFill>
+          <a:ln/>
+        </p:spPr>
+      </p:sp>
+      <p:sp>
+        <p:nvSpPr>
+          <p:cNvPr id="13" name="Shape 10"/>
+          <p:cNvSpPr/>
+          <p:nvPr/>
+        </p:nvSpPr>
+        <p:spPr>
+          <a:xfrm>
+            <a:off x="571500" y="3074882"/>
+            <a:ext cx="14288" cy="767953"/>
+          </a:xfrm>
+          <a:prstGeom prst="rect">
+            <a:avLst/>
+          </a:prstGeom>
+          <a:solidFill>
+            <a:srgbClr val="087F5B"/>
+          </a:solidFill>
+          <a:ln/>
+        </p:spPr>
+      </p:sp>
+      <p:sp>
+        <p:nvSpPr>
+          <p:cNvPr id="14" name="Text 11"/>
+          <p:cNvSpPr/>
+          <p:nvPr/>
+        </p:nvSpPr>
+        <p:spPr>
+          <a:xfrm>
+            <a:off x="714375" y="3132032"/>
+            <a:ext cx="3671888" cy="121444"/>
+          </a:xfrm>
+          <a:prstGeom prst="rect">
+            <a:avLst/>
+          </a:prstGeom>
+          <a:noFill/>
+          <a:ln/>
+        </p:spPr>
+        <p:txBody>
+          <a:bodyPr wrap="square" lIns="0" tIns="0" rIns="0" bIns="0" rtlCol="0" anchor="t">
+            <a:spAutoFit/>
+          </a:bodyPr>
+          <a:lstStyle/>
+          <a:p>
+            <a:pPr algn="l" indent="0" marL="0">
+              <a:buNone/>
+            </a:pPr>
+            <a:r>
+              <a:rPr lang="en-US" sz="700" b="1" dirty="0">
+                <a:solidFill>
+                  <a:srgbClr val="087F5B"/>
+                </a:solidFill>
+                <a:latin typeface="Montserrat Bold" pitchFamily="34" charset="0"/>
+                <a:ea typeface="Montserrat Bold" pitchFamily="34" charset="-122"/>
+                <a:cs typeface="Montserrat Bold" pitchFamily="34" charset="-120"/>
+              </a:rPr>
+              <a:t>CLASS DISTRIBUTION</a:t>
+            </a:r>
+            <a:endParaRPr lang="en-US" sz="700" dirty="0"/>
+          </a:p>
+        </p:txBody>
+      </p:sp>
+      <p:sp>
+        <p:nvSpPr>
+          <p:cNvPr id="15" name="Text 12"/>
+          <p:cNvSpPr/>
+          <p:nvPr/>
+        </p:nvSpPr>
+        <p:spPr>
+          <a:xfrm>
+            <a:off x="714375" y="3296338"/>
+            <a:ext cx="3671888" cy="489347"/>
+          </a:xfrm>
+          <a:prstGeom prst="rect">
+            <a:avLst/>
+          </a:prstGeom>
+          <a:noFill/>
+          <a:ln/>
+        </p:spPr>
+        <p:txBody>
+          <a:bodyPr wrap="square" lIns="0" tIns="0" rIns="0" bIns="0" rtlCol="0" anchor="t">
+            <a:spAutoFit/>
+          </a:bodyPr>
+          <a:lstStyle/>
+          <a:p>
+            <a:pPr algn="l" indent="0" marL="0">
+              <a:buNone/>
+            </a:pPr>
+            <a:r>
+              <a:rPr lang="en-US" sz="1250" dirty="0">
+                <a:solidFill>
+                  <a:srgbClr val="212529"/>
+                </a:solidFill>
+                <a:latin typeface="Open Sans" pitchFamily="34" charset="0"/>
+                <a:ea typeface="Open Sans" pitchFamily="34" charset="-122"/>
+                <a:cs typeface="Open Sans" pitchFamily="34" charset="-120"/>
+              </a:rPr>
+              <a:t>정상: 284,315건 (99.83%)</a:t>
+            </a:r>
+            <a:r>
+              <a:rPr lang="en-US" sz="1250" dirty="0">
+                <a:solidFill>
+                  <a:srgbClr val="212529"/>
+                </a:solidFill>
+                <a:latin typeface="Open Sans" pitchFamily="34" charset="0"/>
+                <a:ea typeface="Open Sans" pitchFamily="34" charset="-122"/>
+                <a:cs typeface="Open Sans" pitchFamily="34" charset="-120"/>
+              </a:rPr>
+              <a:t>
+</a:t>
+            </a:r>
+            <a:r>
+              <a:rPr lang="en-US" sz="1250" dirty="0">
+                <a:solidFill>
+                  <a:srgbClr val="212529"/>
+                </a:solidFill>
+                <a:latin typeface="Open Sans" pitchFamily="34" charset="0"/>
+                <a:ea typeface="Open Sans" pitchFamily="34" charset="-122"/>
+                <a:cs typeface="Open Sans" pitchFamily="34" charset="-120"/>
+              </a:rPr>
+              <a:t>사기: 492건 (0.17%)</a:t>
+            </a:r>
+            <a:endParaRPr lang="en-US" sz="1250" dirty="0"/>
+          </a:p>
+        </p:txBody>
+      </p:sp>
+      <p:sp>
+        <p:nvSpPr>
+          <p:cNvPr id="16" name="Shape 13"/>
+          <p:cNvSpPr/>
+          <p:nvPr/>
+        </p:nvSpPr>
+        <p:spPr>
+          <a:xfrm>
+            <a:off x="4614863" y="1531832"/>
+            <a:ext cx="3957638" cy="2482453"/>
+          </a:xfrm>
+          <a:prstGeom prst="rect">
+            <a:avLst/>
+          </a:prstGeom>
+          <a:solidFill>
+            <a:srgbClr val="212529"/>
+          </a:solidFill>
+          <a:ln/>
+        </p:spPr>
+      </p:sp>
+      <p:sp>
+        <p:nvSpPr>
+          <p:cNvPr id="17" name="Text 14"/>
+          <p:cNvSpPr/>
+          <p:nvPr/>
+        </p:nvSpPr>
+        <p:spPr>
+          <a:xfrm>
+            <a:off x="4757738" y="1646132"/>
+            <a:ext cx="3671888" cy="121444"/>
+          </a:xfrm>
+          <a:prstGeom prst="rect">
+            <a:avLst/>
+          </a:prstGeom>
+          <a:noFill/>
+          <a:ln/>
+        </p:spPr>
+        <p:txBody>
+          <a:bodyPr wrap="square" lIns="0" tIns="0" rIns="0" bIns="0" rtlCol="0" anchor="t">
+            <a:spAutoFit/>
+          </a:bodyPr>
+          <a:lstStyle/>
+          <a:p>
+            <a:pPr algn="l" indent="0" marL="0">
+              <a:buNone/>
+            </a:pPr>
+            <a:r>
+              <a:rPr lang="en-US" sz="700" b="1" dirty="0">
+                <a:solidFill>
+                  <a:srgbClr val="F8F9FA">
+                    <a:alpha val="90000"/>
+                  </a:srgbClr>
+                </a:solidFill>
+                <a:latin typeface="Montserrat Bold" pitchFamily="34" charset="0"/>
+                <a:ea typeface="Montserrat Bold" pitchFamily="34" charset="-122"/>
+                <a:cs typeface="Montserrat Bold" pitchFamily="34" charset="-120"/>
+              </a:rPr>
+              <a:t>COLUMN DESCRIPTIONS</a:t>
+            </a:r>
+            <a:endParaRPr lang="en-US" sz="700" dirty="0"/>
+          </a:p>
+        </p:txBody>
+      </p:sp>
+      <p:sp>
+        <p:nvSpPr>
+          <p:cNvPr id="18" name="Text 15"/>
+          <p:cNvSpPr/>
+          <p:nvPr/>
+        </p:nvSpPr>
+        <p:spPr>
+          <a:xfrm>
+            <a:off x="4757738" y="1810438"/>
+            <a:ext cx="3671888" cy="173236"/>
+          </a:xfrm>
+          <a:prstGeom prst="rect">
+            <a:avLst/>
+          </a:prstGeom>
+          <a:noFill/>
+          <a:ln/>
+        </p:spPr>
+        <p:txBody>
+          <a:bodyPr wrap="square" lIns="0" tIns="0" rIns="0" bIns="0" rtlCol="0" anchor="t">
+            <a:spAutoFit/>
+          </a:bodyPr>
+          <a:lstStyle/>
+          <a:p>
+            <a:pPr algn="l" indent="0" marL="0">
+              <a:buNone/>
+            </a:pPr>
+            <a:r>
+              <a:rPr lang="en-US" sz="1000" b="1" dirty="0">
+                <a:solidFill>
+                  <a:srgbClr val="087F5B"/>
+                </a:solidFill>
+                <a:latin typeface="Montserrat Bold" pitchFamily="34" charset="0"/>
+                <a:ea typeface="Montserrat Bold" pitchFamily="34" charset="-122"/>
+                <a:cs typeface="Montserrat Bold" pitchFamily="34" charset="-120"/>
+              </a:rPr>
+              <a:t>V1 ~ V28</a:t>
+            </a:r>
+            <a:endParaRPr lang="en-US" sz="1000" dirty="0"/>
+          </a:p>
+        </p:txBody>
+      </p:sp>
+      <p:sp>
+        <p:nvSpPr>
+          <p:cNvPr id="19" name="Text 16"/>
+          <p:cNvSpPr/>
+          <p:nvPr/>
+        </p:nvSpPr>
+        <p:spPr>
+          <a:xfrm>
+            <a:off x="4757738" y="2012249"/>
+            <a:ext cx="3671888" cy="320018"/>
+          </a:xfrm>
+          <a:prstGeom prst="rect">
+            <a:avLst/>
+          </a:prstGeom>
+          <a:noFill/>
+          <a:ln/>
+        </p:spPr>
+        <p:txBody>
+          <a:bodyPr wrap="square" lIns="0" tIns="0" rIns="0" bIns="0" rtlCol="0" anchor="t">
+            <a:spAutoFit/>
+          </a:bodyPr>
+          <a:lstStyle/>
+          <a:p>
+            <a:pPr algn="l" indent="0" marL="0">
+              <a:lnSpc>
+                <a:spcPct val="112000"/>
+              </a:lnSpc>
+              <a:buNone/>
+            </a:pPr>
+            <a:r>
+              <a:rPr lang="en-US" sz="850" dirty="0">
+                <a:solidFill>
+                  <a:srgbClr val="F8F9FA"/>
+                </a:solidFill>
+                <a:latin typeface="Open Sans Light" pitchFamily="34" charset="0"/>
+                <a:ea typeface="Open Sans Light" pitchFamily="34" charset="-122"/>
+                <a:cs typeface="Open Sans Light" pitchFamily="34" charset="-120"/>
+              </a:rPr>
+              <a:t>개인정보 보호를 위해 PCA로 익명화된 거래 특성. 이미 정규화가 완료된 상태</a:t>
+            </a:r>
+            <a:endParaRPr lang="en-US" sz="850" dirty="0"/>
+          </a:p>
+        </p:txBody>
+      </p:sp>
+      <p:sp>
+        <p:nvSpPr>
+          <p:cNvPr id="20" name="Text 17"/>
+          <p:cNvSpPr/>
+          <p:nvPr/>
+        </p:nvSpPr>
+        <p:spPr>
+          <a:xfrm>
+            <a:off x="4757738" y="2403704"/>
+            <a:ext cx="3671888" cy="173236"/>
+          </a:xfrm>
+          <a:prstGeom prst="rect">
+            <a:avLst/>
+          </a:prstGeom>
+          <a:noFill/>
+          <a:ln/>
+        </p:spPr>
+        <p:txBody>
+          <a:bodyPr wrap="square" lIns="0" tIns="0" rIns="0" bIns="0" rtlCol="0" anchor="t">
+            <a:spAutoFit/>
+          </a:bodyPr>
+          <a:lstStyle/>
+          <a:p>
+            <a:pPr algn="l" indent="0" marL="0">
+              <a:buNone/>
+            </a:pPr>
+            <a:r>
+              <a:rPr lang="en-US" sz="1000" b="1" dirty="0">
+                <a:solidFill>
+                  <a:srgbClr val="087F5B"/>
+                </a:solidFill>
+                <a:latin typeface="Montserrat Bold" pitchFamily="34" charset="0"/>
+                <a:ea typeface="Montserrat Bold" pitchFamily="34" charset="-122"/>
+                <a:cs typeface="Montserrat Bold" pitchFamily="34" charset="-120"/>
+              </a:rPr>
+              <a:t>Time &amp; Amount</a:t>
+            </a:r>
+            <a:endParaRPr lang="en-US" sz="1000" dirty="0"/>
+          </a:p>
+        </p:txBody>
+      </p:sp>
+      <p:sp>
+        <p:nvSpPr>
+          <p:cNvPr id="21" name="Text 18"/>
+          <p:cNvSpPr/>
+          <p:nvPr/>
+        </p:nvSpPr>
+        <p:spPr>
+          <a:xfrm>
+            <a:off x="4757738" y="2605515"/>
+            <a:ext cx="3671888" cy="320018"/>
+          </a:xfrm>
+          <a:prstGeom prst="rect">
+            <a:avLst/>
+          </a:prstGeom>
+          <a:noFill/>
+          <a:ln/>
+        </p:spPr>
+        <p:txBody>
+          <a:bodyPr wrap="square" lIns="0" tIns="0" rIns="0" bIns="0" rtlCol="0" anchor="t">
+            <a:spAutoFit/>
+          </a:bodyPr>
+          <a:lstStyle/>
+          <a:p>
+            <a:pPr algn="l" indent="0" marL="0">
+              <a:lnSpc>
+                <a:spcPct val="112000"/>
+              </a:lnSpc>
+              <a:buNone/>
+            </a:pPr>
+            <a:r>
+              <a:rPr lang="en-US" sz="850" dirty="0">
+                <a:solidFill>
+                  <a:srgbClr val="F8F9FA"/>
+                </a:solidFill>
+                <a:latin typeface="Open Sans Light" pitchFamily="34" charset="0"/>
+                <a:ea typeface="Open Sans Light" pitchFamily="34" charset="-122"/>
+                <a:cs typeface="Open Sans Light" pitchFamily="34" charset="-120"/>
+              </a:rPr>
+              <a:t>첫 거래 후 경과 시간(초) 및 거래 금액(달러). 원본 데이터 그대로의 스케일</a:t>
+            </a:r>
+            <a:endParaRPr lang="en-US" sz="850" dirty="0"/>
+          </a:p>
+        </p:txBody>
+      </p:sp>
+      <p:sp>
+        <p:nvSpPr>
+          <p:cNvPr id="22" name="Text 19"/>
+          <p:cNvSpPr/>
+          <p:nvPr/>
+        </p:nvSpPr>
+        <p:spPr>
+          <a:xfrm>
+            <a:off x="4757738" y="2996971"/>
+            <a:ext cx="3671888" cy="173236"/>
+          </a:xfrm>
+          <a:prstGeom prst="rect">
+            <a:avLst/>
+          </a:prstGeom>
+          <a:noFill/>
+          <a:ln/>
+        </p:spPr>
+        <p:txBody>
+          <a:bodyPr wrap="square" lIns="0" tIns="0" rIns="0" bIns="0" rtlCol="0" anchor="t">
+            <a:spAutoFit/>
+          </a:bodyPr>
+          <a:lstStyle/>
+          <a:p>
+            <a:pPr algn="l" indent="0" marL="0">
+              <a:buNone/>
+            </a:pPr>
+            <a:r>
+              <a:rPr lang="en-US" sz="1000" b="1" dirty="0">
+                <a:solidFill>
+                  <a:srgbClr val="087F5B"/>
+                </a:solidFill>
+                <a:latin typeface="Montserrat Bold" pitchFamily="34" charset="0"/>
+                <a:ea typeface="Montserrat Bold" pitchFamily="34" charset="-122"/>
+                <a:cs typeface="Montserrat Bold" pitchFamily="34" charset="-120"/>
+              </a:rPr>
+              <a:t>Class (Target)</a:t>
+            </a:r>
+            <a:endParaRPr lang="en-US" sz="1000" dirty="0"/>
+          </a:p>
+        </p:txBody>
+      </p:sp>
+      <p:sp>
+        <p:nvSpPr>
+          <p:cNvPr id="23" name="Text 20"/>
+          <p:cNvSpPr/>
+          <p:nvPr/>
+        </p:nvSpPr>
+        <p:spPr>
+          <a:xfrm>
+            <a:off x="4757738" y="3198781"/>
+            <a:ext cx="3671888" cy="160009"/>
+          </a:xfrm>
+          <a:prstGeom prst="rect">
+            <a:avLst/>
+          </a:prstGeom>
+          <a:noFill/>
+          <a:ln/>
+        </p:spPr>
+        <p:txBody>
+          <a:bodyPr wrap="none" lIns="0" tIns="0" rIns="0" bIns="0" rtlCol="0" anchor="t">
+            <a:spAutoFit/>
+          </a:bodyPr>
+          <a:lstStyle/>
+          <a:p>
+            <a:pPr algn="l" indent="0" marL="0">
+              <a:lnSpc>
+                <a:spcPct val="112000"/>
+              </a:lnSpc>
+              <a:buNone/>
+            </a:pPr>
+            <a:r>
+              <a:rPr lang="en-US" sz="850" dirty="0">
+                <a:solidFill>
+                  <a:srgbClr val="F8F9FA"/>
+                </a:solidFill>
+                <a:latin typeface="Open Sans Light" pitchFamily="34" charset="0"/>
+                <a:ea typeface="Open Sans Light" pitchFamily="34" charset="-122"/>
+                <a:cs typeface="Open Sans Light" pitchFamily="34" charset="-120"/>
+              </a:rPr>
+              <a:t>0 = 정상 거래, 1 = 사기 거래. 우리가 예측해야 할 핵심 타겟 변수</a:t>
+            </a:r>
+            <a:endParaRPr lang="en-US" sz="850" dirty="0"/>
+          </a:p>
+        </p:txBody>
+      </p:sp>
+      <p:sp>
+        <p:nvSpPr>
+          <p:cNvPr id="24" name="Shape 21"/>
+          <p:cNvSpPr/>
+          <p:nvPr/>
+        </p:nvSpPr>
+        <p:spPr>
+          <a:xfrm>
+            <a:off x="4757738" y="3430228"/>
+            <a:ext cx="3671888" cy="539353"/>
+          </a:xfrm>
+          <a:prstGeom prst="rect">
+            <a:avLst/>
+          </a:prstGeom>
+          <a:solidFill>
+            <a:srgbClr val="087F5B">
+              <a:alpha val="10000"/>
+            </a:srgbClr>
+          </a:solidFill>
+          <a:ln/>
+        </p:spPr>
+      </p:sp>
+      <p:sp>
+        <p:nvSpPr>
+          <p:cNvPr id="25" name="Shape 22"/>
+          <p:cNvSpPr/>
+          <p:nvPr/>
+        </p:nvSpPr>
+        <p:spPr>
+          <a:xfrm>
+            <a:off x="4757738" y="3430228"/>
+            <a:ext cx="14288" cy="539353"/>
+          </a:xfrm>
+          <a:prstGeom prst="rect">
+            <a:avLst/>
+          </a:prstGeom>
+          <a:solidFill>
+            <a:srgbClr val="087F5B"/>
+          </a:solidFill>
+          <a:ln/>
+        </p:spPr>
+      </p:sp>
+      <p:sp>
+        <p:nvSpPr>
+          <p:cNvPr id="26" name="Text 23"/>
+          <p:cNvSpPr/>
+          <p:nvPr/>
+        </p:nvSpPr>
+        <p:spPr>
+          <a:xfrm>
+            <a:off x="4757738" y="3430228"/>
+            <a:ext cx="3671888" cy="539353"/>
+          </a:xfrm>
+          <a:prstGeom prst="rect">
+            <a:avLst/>
+          </a:prstGeom>
+          <a:noFill/>
+          <a:ln/>
+        </p:spPr>
+        <p:txBody>
+          <a:bodyPr wrap="square" lIns="102108" tIns="68072" rIns="102108" bIns="0" rtlCol="0" anchor="t">
+            <a:spAutoFit/>
+          </a:bodyPr>
+          <a:lstStyle/>
+          <a:p>
+            <a:pPr algn="l" indent="0" marL="0">
+              <a:buNone/>
+            </a:pPr>
+            <a:r>
+              <a:rPr lang="en-US" sz="800" b="1" dirty="0">
+                <a:solidFill>
+                  <a:srgbClr val="FFFFFF"/>
+                </a:solidFill>
+                <a:latin typeface="Open Sans Bold" pitchFamily="34" charset="0"/>
+                <a:ea typeface="Open Sans Bold" pitchFamily="34" charset="-122"/>
+                <a:cs typeface="Open Sans Bold" pitchFamily="34" charset="-120"/>
+              </a:rPr>
+              <a:t>⚠️ 전처리 주의사항</a:t>
+            </a:r>
+            <a:r>
+              <a:rPr lang="en-US" sz="850" dirty="0">
+                <a:solidFill>
+                  <a:srgbClr val="FFFFFF"/>
+                </a:solidFill>
+                <a:latin typeface="Open Sans" pitchFamily="34" charset="0"/>
+                <a:ea typeface="Open Sans" pitchFamily="34" charset="-122"/>
+                <a:cs typeface="Open Sans" pitchFamily="34" charset="-120"/>
+              </a:rPr>
+              <a:t>
+</a:t>
+            </a:r>
+            <a:r>
+              <a:rPr lang="en-US" sz="850" dirty="0">
+                <a:solidFill>
+                  <a:srgbClr val="FFFFFF"/>
+                </a:solidFill>
+                <a:latin typeface="Open Sans" pitchFamily="34" charset="0"/>
+                <a:ea typeface="Open Sans" pitchFamily="34" charset="-122"/>
+                <a:cs typeface="Open Sans" pitchFamily="34" charset="-120"/>
+              </a:rPr>
+              <a:t>V1~V28과 달리 Time, Amount는 스케일이 매우 크므로 </a:t>
+            </a:r>
+            <a:r>
+              <a:rPr lang="en-US" sz="850" dirty="0">
+                <a:solidFill>
+                  <a:srgbClr val="212529"/>
+                </a:solidFill>
+                <a:latin typeface="Open Sans" pitchFamily="34" charset="0"/>
+                <a:ea typeface="Open Sans" pitchFamily="34" charset="-122"/>
+                <a:cs typeface="Open Sans" pitchFamily="34" charset="-120"/>
+              </a:rPr>
+              <a:t>
+</a:t>
+            </a:r>
+            <a:r>
+              <a:rPr lang="en-US" sz="850" dirty="0">
+                <a:solidFill>
+                  <a:srgbClr val="FFFFFF"/>
+                </a:solidFill>
+                <a:latin typeface="Open Sans" pitchFamily="34" charset="0"/>
+                <a:ea typeface="Open Sans" pitchFamily="34" charset="-122"/>
+                <a:cs typeface="Open Sans" pitchFamily="34" charset="-120"/>
+              </a:rPr>
+              <a:t>별도의 정규화 작업이 필요</a:t>
+            </a:r>
+            <a:endParaRPr lang="en-US" sz="800" dirty="0"/>
+          </a:p>
+        </p:txBody>
+      </p:sp>
     </p:spTree>
   </p:cSld>
   <p:clrMapOvr>
@@ -2139,17 +3895,789 @@
         </p:blipFill>
         <p:spPr>
           <a:xfrm>
-            <a:off x="0" y="0"/>
-            <a:ext cx="9144000" cy="5143500"/>
+            <a:off x="57150" y="57150"/>
+            <a:ext cx="9029700" cy="5143500"/>
           </a:xfrm>
           <a:prstGeom prst="rect">
             <a:avLst/>
           </a:prstGeom>
         </p:spPr>
       </p:pic>
+      <p:sp>
+        <p:nvSpPr>
+          <p:cNvPr id="3" name="Text 0"/>
+          <p:cNvSpPr/>
+          <p:nvPr/>
+        </p:nvSpPr>
+        <p:spPr>
+          <a:xfrm>
+            <a:off x="628650" y="770381"/>
+            <a:ext cx="8572500" cy="462558"/>
+          </a:xfrm>
+          <a:prstGeom prst="rect">
+            <a:avLst/>
+          </a:prstGeom>
+          <a:noFill/>
+          <a:ln/>
+        </p:spPr>
+        <p:txBody>
+          <a:bodyPr wrap="square" lIns="170053" tIns="0" rIns="0" bIns="0" rtlCol="0" anchor="t">
+            <a:spAutoFit/>
+          </a:bodyPr>
+          <a:lstStyle/>
+          <a:p>
+            <a:pPr algn="l" indent="0" marL="0">
+              <a:buNone/>
+            </a:pPr>
+            <a:r>
+              <a:rPr lang="en-US" sz="2450" b="1" dirty="0">
+                <a:solidFill>
+                  <a:srgbClr val="212529"/>
+                </a:solidFill>
+                <a:latin typeface="Montserrat Bold" pitchFamily="34" charset="0"/>
+                <a:ea typeface="Montserrat Bold" pitchFamily="34" charset="-122"/>
+                <a:cs typeface="Montserrat Bold" pitchFamily="34" charset="-120"/>
+              </a:rPr>
+              <a:t>이상거래의 결정적 단서: 시간, 금액, 그리고 패턴</a:t>
+            </a:r>
+            <a:endParaRPr lang="en-US" sz="2450" dirty="0"/>
+          </a:p>
+        </p:txBody>
+      </p:sp>
+      <p:sp>
+        <p:nvSpPr>
+          <p:cNvPr id="4" name="Shape 1"/>
+          <p:cNvSpPr/>
+          <p:nvPr/>
+        </p:nvSpPr>
+        <p:spPr>
+          <a:xfrm>
+            <a:off x="628650" y="1803295"/>
+            <a:ext cx="2523530" cy="3071813"/>
+          </a:xfrm>
+          <a:prstGeom prst="rect">
+            <a:avLst/>
+          </a:prstGeom>
+          <a:solidFill>
+            <a:srgbClr val="FFFFFF"/>
+          </a:solidFill>
+          <a:ln/>
+        </p:spPr>
+      </p:sp>
+      <p:sp>
+        <p:nvSpPr>
+          <p:cNvPr id="5" name="Shape 2"/>
+          <p:cNvSpPr/>
+          <p:nvPr/>
+        </p:nvSpPr>
+        <p:spPr>
+          <a:xfrm>
+            <a:off x="628650" y="1803295"/>
+            <a:ext cx="14288" cy="3071813"/>
+          </a:xfrm>
+          <a:prstGeom prst="rect">
+            <a:avLst/>
+          </a:prstGeom>
+          <a:solidFill>
+            <a:srgbClr val="087F5B"/>
+          </a:solidFill>
+          <a:ln/>
+        </p:spPr>
+      </p:sp>
+      <p:sp>
+        <p:nvSpPr>
+          <p:cNvPr id="6" name="Text 3"/>
+          <p:cNvSpPr/>
+          <p:nvPr/>
+        </p:nvSpPr>
+        <p:spPr>
+          <a:xfrm>
+            <a:off x="807244" y="2017607"/>
+            <a:ext cx="2166342" cy="121444"/>
+          </a:xfrm>
+          <a:prstGeom prst="rect">
+            <a:avLst/>
+          </a:prstGeom>
+          <a:noFill/>
+          <a:ln/>
+        </p:spPr>
+        <p:txBody>
+          <a:bodyPr wrap="square" lIns="0" tIns="0" rIns="0" bIns="0" rtlCol="0" anchor="t">
+            <a:spAutoFit/>
+          </a:bodyPr>
+          <a:lstStyle/>
+          <a:p>
+            <a:pPr algn="l" indent="0" marL="0">
+              <a:buNone/>
+            </a:pPr>
+            <a:r>
+              <a:rPr lang="en-US" sz="700" b="1" dirty="0">
+                <a:solidFill>
+                  <a:srgbClr val="087F5B"/>
+                </a:solidFill>
+                <a:latin typeface="Montserrat Bold" pitchFamily="34" charset="0"/>
+                <a:ea typeface="Montserrat Bold" pitchFamily="34" charset="-122"/>
+                <a:cs typeface="Montserrat Bold" pitchFamily="34" charset="-120"/>
+              </a:rPr>
+              <a:t>TEMPORAL PATTERN</a:t>
+            </a:r>
+            <a:endParaRPr lang="en-US" sz="700" dirty="0"/>
+          </a:p>
+        </p:txBody>
+      </p:sp>
+      <p:sp>
+        <p:nvSpPr>
+          <p:cNvPr id="7" name="Text 4"/>
+          <p:cNvSpPr/>
+          <p:nvPr/>
+        </p:nvSpPr>
+        <p:spPr>
+          <a:xfrm>
+            <a:off x="807244" y="2246207"/>
+            <a:ext cx="2166342" cy="408589"/>
+          </a:xfrm>
+          <a:prstGeom prst="rect">
+            <a:avLst/>
+          </a:prstGeom>
+          <a:noFill/>
+          <a:ln/>
+        </p:spPr>
+        <p:txBody>
+          <a:bodyPr wrap="square" lIns="0" tIns="0" rIns="0" bIns="0" rtlCol="0" anchor="t">
+            <a:spAutoFit/>
+          </a:bodyPr>
+          <a:lstStyle/>
+          <a:p>
+            <a:pPr algn="l" indent="0" marL="0">
+              <a:lnSpc>
+                <a:spcPct val="104000"/>
+              </a:lnSpc>
+              <a:buNone/>
+            </a:pPr>
+            <a:r>
+              <a:rPr lang="en-US" sz="1100" b="1" dirty="0">
+                <a:solidFill>
+                  <a:srgbClr val="212529"/>
+                </a:solidFill>
+                <a:latin typeface="Montserrat Bold" pitchFamily="34" charset="0"/>
+                <a:ea typeface="Montserrat Bold" pitchFamily="34" charset="-122"/>
+                <a:cs typeface="Montserrat Bold" pitchFamily="34" charset="-120"/>
+              </a:rPr>
+              <a:t>새벽 시간대의</a:t>
+            </a:r>
+            <a:r>
+              <a:rPr lang="en-US" sz="1100" b="1" dirty="0">
+                <a:solidFill>
+                  <a:srgbClr val="212529"/>
+                </a:solidFill>
+                <a:latin typeface="Montserrat Bold" pitchFamily="34" charset="0"/>
+                <a:ea typeface="Montserrat Bold" pitchFamily="34" charset="-122"/>
+                <a:cs typeface="Montserrat Bold" pitchFamily="34" charset="-120"/>
+              </a:rPr>
+              <a:t>
+</a:t>
+            </a:r>
+            <a:r>
+              <a:rPr lang="en-US" sz="1100" b="1" dirty="0">
+                <a:solidFill>
+                  <a:srgbClr val="212529"/>
+                </a:solidFill>
+                <a:latin typeface="Montserrat Bold" pitchFamily="34" charset="0"/>
+                <a:ea typeface="Montserrat Bold" pitchFamily="34" charset="-122"/>
+                <a:cs typeface="Montserrat Bold" pitchFamily="34" charset="-120"/>
+              </a:rPr>
+              <a:t>비정상적 집중</a:t>
+            </a:r>
+            <a:endParaRPr lang="en-US" sz="1100" dirty="0"/>
+          </a:p>
+        </p:txBody>
+      </p:sp>
+      <p:sp>
+        <p:nvSpPr>
+          <p:cNvPr id="8" name="Text 5"/>
+          <p:cNvSpPr/>
+          <p:nvPr/>
+        </p:nvSpPr>
+        <p:spPr>
+          <a:xfrm>
+            <a:off x="807244" y="2797671"/>
+            <a:ext cx="2166342" cy="731453"/>
+          </a:xfrm>
+          <a:prstGeom prst="rect">
+            <a:avLst/>
+          </a:prstGeom>
+          <a:noFill/>
+          <a:ln/>
+        </p:spPr>
+        <p:txBody>
+          <a:bodyPr wrap="square" lIns="0" tIns="0" rIns="0" bIns="0" rtlCol="0" anchor="t">
+            <a:spAutoFit/>
+          </a:bodyPr>
+          <a:lstStyle/>
+          <a:p>
+            <a:pPr algn="l" indent="0" marL="0">
+              <a:lnSpc>
+                <a:spcPct val="128000"/>
+              </a:lnSpc>
+              <a:buNone/>
+            </a:pPr>
+            <a:r>
+              <a:rPr lang="en-US" sz="850" dirty="0">
+                <a:solidFill>
+                  <a:srgbClr val="495057"/>
+                </a:solidFill>
+                <a:latin typeface="Open Sans Light" pitchFamily="34" charset="0"/>
+                <a:ea typeface="Open Sans Light" pitchFamily="34" charset="-122"/>
+                <a:cs typeface="Open Sans Light" pitchFamily="34" charset="-120"/>
+              </a:rPr>
+              <a:t>정상 거래는 활동량이 많은 낮 시간대에 집</a:t>
+            </a:r>
+            <a:r>
+              <a:rPr lang="en-US" sz="850" dirty="0">
+                <a:solidFill>
+                  <a:srgbClr val="495057"/>
+                </a:solidFill>
+                <a:latin typeface="Open Sans Light" pitchFamily="34" charset="0"/>
+                <a:ea typeface="Open Sans Light" pitchFamily="34" charset="-122"/>
+                <a:cs typeface="Open Sans Light" pitchFamily="34" charset="-120"/>
+              </a:rPr>
+              <a:t>중되지만, 사기 거래는 모니터링 공백을 노</a:t>
+            </a:r>
+            <a:r>
+              <a:rPr lang="en-US" sz="850" dirty="0">
+                <a:solidFill>
+                  <a:srgbClr val="495057"/>
+                </a:solidFill>
+                <a:latin typeface="Open Sans Light" pitchFamily="34" charset="0"/>
+                <a:ea typeface="Open Sans Light" pitchFamily="34" charset="-122"/>
+                <a:cs typeface="Open Sans Light" pitchFamily="34" charset="-120"/>
+              </a:rPr>
+              <a:t>린 </a:t>
+            </a:r>
+            <a:r>
+              <a:rPr lang="en-US" sz="850" dirty="0">
+                <a:solidFill>
+                  <a:srgbClr val="495057"/>
+                </a:solidFill>
+                <a:latin typeface="Open Sans Light" pitchFamily="34" charset="0"/>
+                <a:ea typeface="Open Sans Light" pitchFamily="34" charset="-122"/>
+                <a:cs typeface="Open Sans Light" pitchFamily="34" charset="-120"/>
+              </a:rPr>
+              <a:t>
+</a:t>
+            </a:r>
+            <a:r>
+              <a:rPr lang="en-US" sz="800" b="1" dirty="0">
+                <a:solidFill>
+                  <a:srgbClr val="087F5B"/>
+                </a:solidFill>
+                <a:latin typeface="Open Sans Bold" pitchFamily="34" charset="0"/>
+                <a:ea typeface="Open Sans Bold" pitchFamily="34" charset="-122"/>
+                <a:cs typeface="Open Sans Bold" pitchFamily="34" charset="-120"/>
+              </a:rPr>
+              <a:t>새벽 0~6시</a:t>
+            </a:r>
+            <a:r>
+              <a:rPr lang="en-US" sz="850" dirty="0">
+                <a:solidFill>
+                  <a:srgbClr val="495057"/>
+                </a:solidFill>
+                <a:latin typeface="Open Sans Light" pitchFamily="34" charset="0"/>
+                <a:ea typeface="Open Sans Light" pitchFamily="34" charset="-122"/>
+                <a:cs typeface="Open Sans Light" pitchFamily="34" charset="-120"/>
+              </a:rPr>
+              <a:t> 사이에 빈번하게 발생합니다.</a:t>
+            </a:r>
+            <a:endParaRPr lang="en-US" sz="850" dirty="0"/>
+          </a:p>
+        </p:txBody>
+      </p:sp>
+      <p:sp>
+        <p:nvSpPr>
+          <p:cNvPr id="9" name="Shape 6"/>
+          <p:cNvSpPr/>
+          <p:nvPr/>
+        </p:nvSpPr>
+        <p:spPr>
+          <a:xfrm>
+            <a:off x="3366492" y="1803295"/>
+            <a:ext cx="2523530" cy="3071813"/>
+          </a:xfrm>
+          <a:prstGeom prst="rect">
+            <a:avLst/>
+          </a:prstGeom>
+          <a:solidFill>
+            <a:srgbClr val="FFFFFF"/>
+          </a:solidFill>
+          <a:ln/>
+        </p:spPr>
+      </p:sp>
+      <p:sp>
+        <p:nvSpPr>
+          <p:cNvPr id="10" name="Shape 7"/>
+          <p:cNvSpPr/>
+          <p:nvPr/>
+        </p:nvSpPr>
+        <p:spPr>
+          <a:xfrm>
+            <a:off x="3366492" y="1803295"/>
+            <a:ext cx="14288" cy="3071813"/>
+          </a:xfrm>
+          <a:prstGeom prst="rect">
+            <a:avLst/>
+          </a:prstGeom>
+          <a:solidFill>
+            <a:srgbClr val="087F5B"/>
+          </a:solidFill>
+          <a:ln/>
+        </p:spPr>
+      </p:sp>
+      <p:sp>
+        <p:nvSpPr>
+          <p:cNvPr id="11" name="Text 8"/>
+          <p:cNvSpPr/>
+          <p:nvPr/>
+        </p:nvSpPr>
+        <p:spPr>
+          <a:xfrm>
+            <a:off x="3545086" y="2017607"/>
+            <a:ext cx="2166342" cy="121444"/>
+          </a:xfrm>
+          <a:prstGeom prst="rect">
+            <a:avLst/>
+          </a:prstGeom>
+          <a:noFill/>
+          <a:ln/>
+        </p:spPr>
+        <p:txBody>
+          <a:bodyPr wrap="square" lIns="0" tIns="0" rIns="0" bIns="0" rtlCol="0" anchor="t">
+            <a:spAutoFit/>
+          </a:bodyPr>
+          <a:lstStyle/>
+          <a:p>
+            <a:pPr algn="l" indent="0" marL="0">
+              <a:buNone/>
+            </a:pPr>
+            <a:r>
+              <a:rPr lang="en-US" sz="700" b="1" dirty="0">
+                <a:solidFill>
+                  <a:srgbClr val="087F5B"/>
+                </a:solidFill>
+                <a:latin typeface="Montserrat Bold" pitchFamily="34" charset="0"/>
+                <a:ea typeface="Montserrat Bold" pitchFamily="34" charset="-122"/>
+                <a:cs typeface="Montserrat Bold" pitchFamily="34" charset="-120"/>
+              </a:rPr>
+              <a:t>MONETARY PATTERN</a:t>
+            </a:r>
+            <a:endParaRPr lang="en-US" sz="700" dirty="0"/>
+          </a:p>
+        </p:txBody>
+      </p:sp>
+      <p:sp>
+        <p:nvSpPr>
+          <p:cNvPr id="12" name="Text 9"/>
+          <p:cNvSpPr/>
+          <p:nvPr/>
+        </p:nvSpPr>
+        <p:spPr>
+          <a:xfrm>
+            <a:off x="3545086" y="2246207"/>
+            <a:ext cx="2166342" cy="408589"/>
+          </a:xfrm>
+          <a:prstGeom prst="rect">
+            <a:avLst/>
+          </a:prstGeom>
+          <a:noFill/>
+          <a:ln/>
+        </p:spPr>
+        <p:txBody>
+          <a:bodyPr wrap="square" lIns="0" tIns="0" rIns="0" bIns="0" rtlCol="0" anchor="t">
+            <a:spAutoFit/>
+          </a:bodyPr>
+          <a:lstStyle/>
+          <a:p>
+            <a:pPr algn="l" indent="0" marL="0">
+              <a:lnSpc>
+                <a:spcPct val="104000"/>
+              </a:lnSpc>
+              <a:buNone/>
+            </a:pPr>
+            <a:r>
+              <a:rPr lang="en-US" sz="1100" b="1" dirty="0">
+                <a:solidFill>
+                  <a:srgbClr val="212529"/>
+                </a:solidFill>
+                <a:latin typeface="Montserrat Bold" pitchFamily="34" charset="0"/>
+                <a:ea typeface="Montserrat Bold" pitchFamily="34" charset="-122"/>
+                <a:cs typeface="Montserrat Bold" pitchFamily="34" charset="-120"/>
+              </a:rPr>
+              <a:t>소액 테스트 후</a:t>
+            </a:r>
+            <a:r>
+              <a:rPr lang="en-US" sz="1100" b="1" dirty="0">
+                <a:solidFill>
+                  <a:srgbClr val="212529"/>
+                </a:solidFill>
+                <a:latin typeface="Montserrat Bold" pitchFamily="34" charset="0"/>
+                <a:ea typeface="Montserrat Bold" pitchFamily="34" charset="-122"/>
+                <a:cs typeface="Montserrat Bold" pitchFamily="34" charset="-120"/>
+              </a:rPr>
+              <a:t>
+</a:t>
+            </a:r>
+            <a:r>
+              <a:rPr lang="en-US" sz="1100" b="1" dirty="0">
+                <a:solidFill>
+                  <a:srgbClr val="212529"/>
+                </a:solidFill>
+                <a:latin typeface="Montserrat Bold" pitchFamily="34" charset="0"/>
+                <a:ea typeface="Montserrat Bold" pitchFamily="34" charset="-122"/>
+                <a:cs typeface="Montserrat Bold" pitchFamily="34" charset="-120"/>
+              </a:rPr>
+              <a:t>고액 결제 시도</a:t>
+            </a:r>
+            <a:endParaRPr lang="en-US" sz="1100" dirty="0"/>
+          </a:p>
+        </p:txBody>
+      </p:sp>
+      <p:sp>
+        <p:nvSpPr>
+          <p:cNvPr id="13" name="Text 10"/>
+          <p:cNvSpPr/>
+          <p:nvPr/>
+        </p:nvSpPr>
+        <p:spPr>
+          <a:xfrm>
+            <a:off x="3545086" y="2797671"/>
+            <a:ext cx="2166342" cy="731453"/>
+          </a:xfrm>
+          <a:prstGeom prst="rect">
+            <a:avLst/>
+          </a:prstGeom>
+          <a:noFill/>
+          <a:ln/>
+        </p:spPr>
+        <p:txBody>
+          <a:bodyPr wrap="square" lIns="0" tIns="0" rIns="0" bIns="0" rtlCol="0" anchor="t">
+            <a:spAutoFit/>
+          </a:bodyPr>
+          <a:lstStyle/>
+          <a:p>
+            <a:pPr algn="l" indent="0" marL="0">
+              <a:lnSpc>
+                <a:spcPct val="128000"/>
+              </a:lnSpc>
+              <a:buNone/>
+            </a:pPr>
+            <a:r>
+              <a:rPr lang="en-US" sz="850" dirty="0">
+                <a:solidFill>
+                  <a:srgbClr val="495057"/>
+                </a:solidFill>
+                <a:latin typeface="Open Sans Light" pitchFamily="34" charset="0"/>
+                <a:ea typeface="Open Sans Light" pitchFamily="34" charset="-122"/>
+                <a:cs typeface="Open Sans Light" pitchFamily="34" charset="-120"/>
+              </a:rPr>
+              <a:t>카드 도용 직후 사용 가능 여부를 확인하기 </a:t>
+            </a:r>
+            <a:r>
+              <a:rPr lang="en-US" sz="850" dirty="0">
+                <a:solidFill>
+                  <a:srgbClr val="495057"/>
+                </a:solidFill>
+                <a:latin typeface="Open Sans Light" pitchFamily="34" charset="0"/>
+                <a:ea typeface="Open Sans Light" pitchFamily="34" charset="-122"/>
+                <a:cs typeface="Open Sans Light" pitchFamily="34" charset="-120"/>
+              </a:rPr>
+              <a:t>위해 </a:t>
+            </a:r>
+            <a:r>
+              <a:rPr lang="en-US" sz="800" b="1" dirty="0">
+                <a:solidFill>
+                  <a:srgbClr val="087F5B"/>
+                </a:solidFill>
+                <a:latin typeface="Open Sans Bold" pitchFamily="34" charset="0"/>
+                <a:ea typeface="Open Sans Bold" pitchFamily="34" charset="-122"/>
+                <a:cs typeface="Open Sans Bold" pitchFamily="34" charset="-120"/>
+              </a:rPr>
+              <a:t>$1~$100 사이의 소액</a:t>
+            </a:r>
+            <a:r>
+              <a:rPr lang="en-US" sz="850" dirty="0">
+                <a:solidFill>
+                  <a:srgbClr val="495057"/>
+                </a:solidFill>
+                <a:latin typeface="Open Sans Light" pitchFamily="34" charset="0"/>
+                <a:ea typeface="Open Sans Light" pitchFamily="34" charset="-122"/>
+                <a:cs typeface="Open Sans Light" pitchFamily="34" charset="-120"/>
+              </a:rPr>
+              <a:t>을 먼저 결제한 </a:t>
+            </a:r>
+            <a:r>
+              <a:rPr lang="en-US" sz="850" dirty="0">
+                <a:solidFill>
+                  <a:srgbClr val="495057"/>
+                </a:solidFill>
+                <a:latin typeface="Open Sans Light" pitchFamily="34" charset="0"/>
+                <a:ea typeface="Open Sans Light" pitchFamily="34" charset="-122"/>
+                <a:cs typeface="Open Sans Light" pitchFamily="34" charset="-120"/>
+              </a:rPr>
+              <a:t>뒤, 성공 시 짧은 시간 내에 고액 결제를 반</a:t>
+            </a:r>
+            <a:r>
+              <a:rPr lang="en-US" sz="850" dirty="0">
+                <a:solidFill>
+                  <a:srgbClr val="495057"/>
+                </a:solidFill>
+                <a:latin typeface="Open Sans Light" pitchFamily="34" charset="0"/>
+                <a:ea typeface="Open Sans Light" pitchFamily="34" charset="-122"/>
+                <a:cs typeface="Open Sans Light" pitchFamily="34" charset="-120"/>
+              </a:rPr>
+              <a:t>복하는 경향을 보입니다.</a:t>
+            </a:r>
+            <a:endParaRPr lang="en-US" sz="850" dirty="0"/>
+          </a:p>
+        </p:txBody>
+      </p:sp>
+      <p:sp>
+        <p:nvSpPr>
+          <p:cNvPr id="14" name="Shape 11"/>
+          <p:cNvSpPr/>
+          <p:nvPr/>
+        </p:nvSpPr>
+        <p:spPr>
+          <a:xfrm>
+            <a:off x="6104334" y="1803295"/>
+            <a:ext cx="2525316" cy="3071813"/>
+          </a:xfrm>
+          <a:prstGeom prst="rect">
+            <a:avLst/>
+          </a:prstGeom>
+          <a:solidFill>
+            <a:srgbClr val="FFFFFF"/>
+          </a:solidFill>
+          <a:ln/>
+        </p:spPr>
+      </p:sp>
+      <p:sp>
+        <p:nvSpPr>
+          <p:cNvPr id="15" name="Shape 12"/>
+          <p:cNvSpPr/>
+          <p:nvPr/>
+        </p:nvSpPr>
+        <p:spPr>
+          <a:xfrm>
+            <a:off x="6104334" y="1803295"/>
+            <a:ext cx="14288" cy="3071813"/>
+          </a:xfrm>
+          <a:prstGeom prst="rect">
+            <a:avLst/>
+          </a:prstGeom>
+          <a:solidFill>
+            <a:srgbClr val="087F5B"/>
+          </a:solidFill>
+          <a:ln/>
+        </p:spPr>
+      </p:sp>
+      <p:sp>
+        <p:nvSpPr>
+          <p:cNvPr id="16" name="Text 13"/>
+          <p:cNvSpPr/>
+          <p:nvPr/>
+        </p:nvSpPr>
+        <p:spPr>
+          <a:xfrm>
+            <a:off x="6284100" y="2017607"/>
+            <a:ext cx="2166956" cy="121444"/>
+          </a:xfrm>
+          <a:prstGeom prst="rect">
+            <a:avLst/>
+          </a:prstGeom>
+          <a:noFill/>
+          <a:ln/>
+        </p:spPr>
+        <p:txBody>
+          <a:bodyPr wrap="square" lIns="0" tIns="0" rIns="0" bIns="0" rtlCol="0" anchor="t">
+            <a:spAutoFit/>
+          </a:bodyPr>
+          <a:lstStyle/>
+          <a:p>
+            <a:pPr algn="l" indent="0" marL="0">
+              <a:buNone/>
+            </a:pPr>
+            <a:r>
+              <a:rPr lang="en-US" sz="700" b="1" dirty="0">
+                <a:solidFill>
+                  <a:srgbClr val="087F5B"/>
+                </a:solidFill>
+                <a:latin typeface="Montserrat Bold" pitchFamily="34" charset="0"/>
+                <a:ea typeface="Montserrat Bold" pitchFamily="34" charset="-122"/>
+                <a:cs typeface="Montserrat Bold" pitchFamily="34" charset="-120"/>
+              </a:rPr>
+              <a:t>STATISTICAL PATTERN</a:t>
+            </a:r>
+            <a:endParaRPr lang="en-US" sz="700" dirty="0"/>
+          </a:p>
+        </p:txBody>
+      </p:sp>
+      <p:sp>
+        <p:nvSpPr>
+          <p:cNvPr id="17" name="Text 14"/>
+          <p:cNvSpPr/>
+          <p:nvPr/>
+        </p:nvSpPr>
+        <p:spPr>
+          <a:xfrm>
+            <a:off x="6284100" y="2246207"/>
+            <a:ext cx="2166956" cy="408589"/>
+          </a:xfrm>
+          <a:prstGeom prst="rect">
+            <a:avLst/>
+          </a:prstGeom>
+          <a:noFill/>
+          <a:ln/>
+        </p:spPr>
+        <p:txBody>
+          <a:bodyPr wrap="square" lIns="0" tIns="0" rIns="0" bIns="0" rtlCol="0" anchor="t">
+            <a:spAutoFit/>
+          </a:bodyPr>
+          <a:lstStyle/>
+          <a:p>
+            <a:pPr algn="l" indent="0" marL="0">
+              <a:lnSpc>
+                <a:spcPct val="104000"/>
+              </a:lnSpc>
+              <a:buNone/>
+            </a:pPr>
+            <a:r>
+              <a:rPr lang="en-US" sz="1100" b="1" dirty="0">
+                <a:solidFill>
+                  <a:srgbClr val="212529"/>
+                </a:solidFill>
+                <a:latin typeface="Montserrat Bold" pitchFamily="34" charset="0"/>
+                <a:ea typeface="Montserrat Bold" pitchFamily="34" charset="-122"/>
+                <a:cs typeface="Montserrat Bold" pitchFamily="34" charset="-120"/>
+              </a:rPr>
+              <a:t>핵심 피처 V14의</a:t>
+            </a:r>
+            <a:r>
+              <a:rPr lang="en-US" sz="1100" b="1" dirty="0">
+                <a:solidFill>
+                  <a:srgbClr val="212529"/>
+                </a:solidFill>
+                <a:latin typeface="Montserrat Bold" pitchFamily="34" charset="0"/>
+                <a:ea typeface="Montserrat Bold" pitchFamily="34" charset="-122"/>
+                <a:cs typeface="Montserrat Bold" pitchFamily="34" charset="-120"/>
+              </a:rPr>
+              <a:t>
+</a:t>
+            </a:r>
+            <a:r>
+              <a:rPr lang="en-US" sz="1100" b="1" dirty="0">
+                <a:solidFill>
+                  <a:srgbClr val="212529"/>
+                </a:solidFill>
+                <a:latin typeface="Montserrat Bold" pitchFamily="34" charset="0"/>
+                <a:ea typeface="Montserrat Bold" pitchFamily="34" charset="-122"/>
+                <a:cs typeface="Montserrat Bold" pitchFamily="34" charset="-120"/>
+              </a:rPr>
+              <a:t>극단적 분포</a:t>
+            </a:r>
+            <a:endParaRPr lang="en-US" sz="1100" dirty="0"/>
+          </a:p>
+        </p:txBody>
+      </p:sp>
+      <p:sp>
+        <p:nvSpPr>
+          <p:cNvPr id="18" name="Text 15"/>
+          <p:cNvSpPr/>
+          <p:nvPr/>
+        </p:nvSpPr>
+        <p:spPr>
+          <a:xfrm>
+            <a:off x="6284100" y="2797671"/>
+            <a:ext cx="2166956" cy="548590"/>
+          </a:xfrm>
+          <a:prstGeom prst="rect">
+            <a:avLst/>
+          </a:prstGeom>
+          <a:noFill/>
+          <a:ln/>
+        </p:spPr>
+        <p:txBody>
+          <a:bodyPr wrap="square" lIns="0" tIns="0" rIns="0" bIns="0" rtlCol="0" anchor="t">
+            <a:spAutoFit/>
+          </a:bodyPr>
+          <a:lstStyle/>
+          <a:p>
+            <a:pPr algn="l" indent="0" marL="0">
+              <a:lnSpc>
+                <a:spcPct val="128000"/>
+              </a:lnSpc>
+              <a:buNone/>
+            </a:pPr>
+            <a:r>
+              <a:rPr lang="en-US" sz="850" dirty="0">
+                <a:solidFill>
+                  <a:srgbClr val="495057"/>
+                </a:solidFill>
+                <a:latin typeface="Open Sans Light" pitchFamily="34" charset="0"/>
+                <a:ea typeface="Open Sans Light" pitchFamily="34" charset="-122"/>
+                <a:cs typeface="Open Sans Light" pitchFamily="34" charset="-120"/>
+              </a:rPr>
+              <a:t>통계적으로 사기 거래는 </a:t>
+            </a:r>
+            <a:r>
+              <a:rPr lang="en-US" sz="800" b="1" dirty="0">
+                <a:solidFill>
+                  <a:srgbClr val="087F5B"/>
+                </a:solidFill>
+                <a:latin typeface="Open Sans Bold" pitchFamily="34" charset="0"/>
+                <a:ea typeface="Open Sans Bold" pitchFamily="34" charset="-122"/>
+                <a:cs typeface="Open Sans Bold" pitchFamily="34" charset="-120"/>
+              </a:rPr>
+              <a:t>V14 값이 -10 이</a:t>
+            </a:r>
+            <a:r>
+              <a:rPr lang="en-US" sz="800" b="1" dirty="0">
+                <a:solidFill>
+                  <a:srgbClr val="087F5B"/>
+                </a:solidFill>
+                <a:latin typeface="Open Sans Bold" pitchFamily="34" charset="0"/>
+                <a:ea typeface="Open Sans Bold" pitchFamily="34" charset="-122"/>
+                <a:cs typeface="Open Sans Bold" pitchFamily="34" charset="-120"/>
+              </a:rPr>
+              <a:t>하</a:t>
+            </a:r>
+            <a:r>
+              <a:rPr lang="en-US" sz="850" dirty="0">
+                <a:solidFill>
+                  <a:srgbClr val="495057"/>
+                </a:solidFill>
+                <a:latin typeface="Open Sans Light" pitchFamily="34" charset="0"/>
+                <a:ea typeface="Open Sans Light" pitchFamily="34" charset="-122"/>
+                <a:cs typeface="Open Sans Light" pitchFamily="34" charset="-120"/>
+              </a:rPr>
+              <a:t>로 떨어지는 특징이 있으며, 이는 정상 범</a:t>
+            </a:r>
+            <a:r>
+              <a:rPr lang="en-US" sz="850" dirty="0">
+                <a:solidFill>
+                  <a:srgbClr val="495057"/>
+                </a:solidFill>
+                <a:latin typeface="Open Sans Light" pitchFamily="34" charset="0"/>
+                <a:ea typeface="Open Sans Light" pitchFamily="34" charset="-122"/>
+                <a:cs typeface="Open Sans Light" pitchFamily="34" charset="-120"/>
+              </a:rPr>
+              <a:t>위(-3~3)를 크게 벗어난 수치입니다.</a:t>
+            </a:r>
+            <a:endParaRPr lang="en-US" sz="850" dirty="0"/>
+          </a:p>
+        </p:txBody>
+      </p:sp>
       <p:pic>
         <p:nvPicPr>
-          <p:cNvPr id="3" name="Image 1" descr="preencoded.png">    </p:cNvPr>
+          <p:cNvPr id="19" name="Image 1" descr="preencoded.png">    </p:cNvPr>
           <p:cNvPicPr>
             <a:picLocks noChangeAspect="1"/>
           </p:cNvPicPr>
@@ -2163,8 +4691,8 @@
         </p:blipFill>
         <p:spPr>
           <a:xfrm>
-            <a:off x="0" y="0"/>
-            <a:ext cx="9144000" cy="5143500"/>
+            <a:off x="6284100" y="3489136"/>
+            <a:ext cx="2153841" cy="1285875"/>
           </a:xfrm>
           <a:prstGeom prst="rect">
             <a:avLst/>
@@ -2212,17 +4740,139 @@
         </p:blipFill>
         <p:spPr>
           <a:xfrm>
-            <a:off x="0" y="0"/>
-            <a:ext cx="9144000" cy="5143500"/>
+            <a:off x="57150" y="57150"/>
+            <a:ext cx="9029700" cy="5143500"/>
           </a:xfrm>
           <a:prstGeom prst="rect">
             <a:avLst/>
           </a:prstGeom>
         </p:spPr>
       </p:pic>
+      <p:sp>
+        <p:nvSpPr>
+          <p:cNvPr id="3" name="Text 0"/>
+          <p:cNvSpPr/>
+          <p:nvPr/>
+        </p:nvSpPr>
+        <p:spPr>
+          <a:xfrm>
+            <a:off x="628650" y="770381"/>
+            <a:ext cx="8572500" cy="462558"/>
+          </a:xfrm>
+          <a:prstGeom prst="rect">
+            <a:avLst/>
+          </a:prstGeom>
+          <a:noFill/>
+          <a:ln/>
+        </p:spPr>
+        <p:txBody>
+          <a:bodyPr wrap="square" lIns="170053" tIns="0" rIns="0" bIns="0" rtlCol="0" anchor="t">
+            <a:spAutoFit/>
+          </a:bodyPr>
+          <a:lstStyle/>
+          <a:p>
+            <a:pPr algn="l" indent="0" marL="0">
+              <a:buNone/>
+            </a:pPr>
+            <a:r>
+              <a:rPr lang="en-US" sz="2450" b="1" dirty="0">
+                <a:solidFill>
+                  <a:srgbClr val="212529"/>
+                </a:solidFill>
+                <a:latin typeface="Montserrat Bold" pitchFamily="34" charset="0"/>
+                <a:ea typeface="Montserrat Bold" pitchFamily="34" charset="-122"/>
+                <a:cs typeface="Montserrat Bold" pitchFamily="34" charset="-120"/>
+              </a:rPr>
+              <a:t>데이터 전처리 파이프라인: 모델 학습의 기초 다지기</a:t>
+            </a:r>
+            <a:endParaRPr lang="en-US" sz="2450" dirty="0"/>
+          </a:p>
+        </p:txBody>
+      </p:sp>
+      <p:sp>
+        <p:nvSpPr>
+          <p:cNvPr id="4" name="Shape 1"/>
+          <p:cNvSpPr/>
+          <p:nvPr/>
+        </p:nvSpPr>
+        <p:spPr>
+          <a:xfrm>
+            <a:off x="628650" y="1603270"/>
+            <a:ext cx="2590781" cy="2828925"/>
+          </a:xfrm>
+          <a:prstGeom prst="rect">
+            <a:avLst/>
+          </a:prstGeom>
+          <a:solidFill>
+            <a:srgbClr val="FFFFFF"/>
+          </a:solidFill>
+          <a:ln/>
+        </p:spPr>
+      </p:sp>
+      <p:sp>
+        <p:nvSpPr>
+          <p:cNvPr id="5" name="Shape 2"/>
+          <p:cNvSpPr/>
+          <p:nvPr/>
+        </p:nvSpPr>
+        <p:spPr>
+          <a:xfrm>
+            <a:off x="628650" y="1603270"/>
+            <a:ext cx="14288" cy="2828925"/>
+          </a:xfrm>
+          <a:prstGeom prst="rect">
+            <a:avLst/>
+          </a:prstGeom>
+          <a:solidFill>
+            <a:srgbClr val="087F5B"/>
+          </a:solidFill>
+          <a:ln/>
+        </p:spPr>
+      </p:sp>
+      <p:sp>
+        <p:nvSpPr>
+          <p:cNvPr id="6" name="Text 3"/>
+          <p:cNvSpPr/>
+          <p:nvPr/>
+        </p:nvSpPr>
+        <p:spPr>
+          <a:xfrm>
+            <a:off x="2603283" y="1646132"/>
+            <a:ext cx="487561" cy="557213"/>
+          </a:xfrm>
+          <a:prstGeom prst="rect">
+            <a:avLst/>
+          </a:prstGeom>
+          <a:noFill/>
+          <a:ln/>
+        </p:spPr>
+        <p:txBody>
+          <a:bodyPr wrap="none" lIns="0" tIns="0" rIns="0" bIns="0" rtlCol="0" anchor="t">
+            <a:spAutoFit/>
+          </a:bodyPr>
+          <a:lstStyle/>
+          <a:p>
+            <a:pPr algn="l" indent="0" marL="0">
+              <a:buNone/>
+            </a:pPr>
+            <a:r>
+              <a:rPr lang="en-US" sz="3300" b="1" dirty="0">
+                <a:solidFill>
+                  <a:srgbClr val="E9ECEF"/>
+                </a:solidFill>
+                <a:latin typeface="Montserrat Bold" pitchFamily="34" charset="0"/>
+                <a:ea typeface="Montserrat Bold" pitchFamily="34" charset="-122"/>
+                <a:cs typeface="Montserrat Bold" pitchFamily="34" charset="-120"/>
+              </a:rPr>
+              <a:t>01</a:t>
+            </a:r>
+            <a:endParaRPr lang="en-US" sz="3300" dirty="0"/>
+          </a:p>
+        </p:txBody>
+      </p:sp>
       <p:pic>
         <p:nvPicPr>
-          <p:cNvPr id="3" name="Image 1" descr="preencoded.png">    </p:cNvPr>
+          <p:cNvPr id="7" name="Image 1" descr="preencoded.png">    </p:cNvPr>
           <p:cNvPicPr>
             <a:picLocks noChangeAspect="1"/>
           </p:cNvPicPr>
@@ -2236,14 +4886,896 @@
         </p:blipFill>
         <p:spPr>
           <a:xfrm>
-            <a:off x="0" y="0"/>
-            <a:ext cx="9144000" cy="5143500"/>
+            <a:off x="742950" y="1762218"/>
+            <a:ext cx="114300" cy="228600"/>
           </a:xfrm>
           <a:prstGeom prst="rect">
             <a:avLst/>
           </a:prstGeom>
         </p:spPr>
       </p:pic>
+      <p:sp>
+        <p:nvSpPr>
+          <p:cNvPr id="8" name="Text 4"/>
+          <p:cNvSpPr/>
+          <p:nvPr/>
+        </p:nvSpPr>
+        <p:spPr>
+          <a:xfrm>
+            <a:off x="742950" y="2115834"/>
+            <a:ext cx="2362181" cy="212527"/>
+          </a:xfrm>
+          <a:prstGeom prst="rect">
+            <a:avLst/>
+          </a:prstGeom>
+          <a:noFill/>
+          <a:ln/>
+        </p:spPr>
+        <p:txBody>
+          <a:bodyPr wrap="square" lIns="0" tIns="0" rIns="0" bIns="0" rtlCol="0" anchor="t">
+            <a:spAutoFit/>
+          </a:bodyPr>
+          <a:lstStyle/>
+          <a:p>
+            <a:pPr algn="l" indent="0" marL="0">
+              <a:buNone/>
+            </a:pPr>
+            <a:r>
+              <a:rPr lang="en-US" sz="1100" b="1" dirty="0">
+                <a:solidFill>
+                  <a:srgbClr val="212529"/>
+                </a:solidFill>
+                <a:latin typeface="Montserrat Bold" pitchFamily="34" charset="0"/>
+                <a:ea typeface="Montserrat Bold" pitchFamily="34" charset="-122"/>
+                <a:cs typeface="Montserrat Bold" pitchFamily="34" charset="-120"/>
+              </a:rPr>
+              <a:t>정규화 (Scaling)</a:t>
+            </a:r>
+            <a:endParaRPr lang="en-US" sz="1100" dirty="0"/>
+          </a:p>
+        </p:txBody>
+      </p:sp>
+      <p:sp>
+        <p:nvSpPr>
+          <p:cNvPr id="9" name="Text 5"/>
+          <p:cNvSpPr/>
+          <p:nvPr/>
+        </p:nvSpPr>
+        <p:spPr>
+          <a:xfrm>
+            <a:off x="742950" y="2385510"/>
+            <a:ext cx="2362181" cy="662918"/>
+          </a:xfrm>
+          <a:prstGeom prst="rect">
+            <a:avLst/>
+          </a:prstGeom>
+          <a:noFill/>
+          <a:ln/>
+        </p:spPr>
+        <p:txBody>
+          <a:bodyPr wrap="square" lIns="0" tIns="0" rIns="0" bIns="0" rtlCol="0" anchor="t">
+            <a:spAutoFit/>
+          </a:bodyPr>
+          <a:lstStyle/>
+          <a:p>
+            <a:pPr algn="l" indent="0" marL="0">
+              <a:lnSpc>
+                <a:spcPct val="116000"/>
+              </a:lnSpc>
+              <a:buNone/>
+            </a:pPr>
+            <a:r>
+              <a:rPr lang="en-US" sz="850" dirty="0">
+                <a:solidFill>
+                  <a:srgbClr val="495057"/>
+                </a:solidFill>
+                <a:latin typeface="Open Sans Light" pitchFamily="34" charset="0"/>
+                <a:ea typeface="Open Sans Light" pitchFamily="34" charset="-122"/>
+                <a:cs typeface="Open Sans Light" pitchFamily="34" charset="-120"/>
+              </a:rPr>
+              <a:t>StandardScaler를 사용하여 Amount와 Time의 스케일을 V1~V28과 맞춥니다. 평균 0, 표준편차 1로 변환하여 특정 피처에 대한 모델의 편향을 방지합니다.</a:t>
+            </a:r>
+            <a:endParaRPr lang="en-US" sz="850" dirty="0"/>
+          </a:p>
+        </p:txBody>
+      </p:sp>
+      <p:sp>
+        <p:nvSpPr>
+          <p:cNvPr id="10" name="Shape 6"/>
+          <p:cNvSpPr/>
+          <p:nvPr/>
+        </p:nvSpPr>
+        <p:spPr>
+          <a:xfrm>
+            <a:off x="742950" y="3134153"/>
+            <a:ext cx="2362181" cy="614363"/>
+          </a:xfrm>
+          <a:prstGeom prst="rect">
+            <a:avLst/>
+          </a:prstGeom>
+          <a:solidFill>
+            <a:srgbClr val="C92A2A">
+              <a:alpha val="5000"/>
+            </a:srgbClr>
+          </a:solidFill>
+          <a:ln/>
+        </p:spPr>
+      </p:sp>
+      <p:sp>
+        <p:nvSpPr>
+          <p:cNvPr id="11" name="Shape 7"/>
+          <p:cNvSpPr/>
+          <p:nvPr/>
+        </p:nvSpPr>
+        <p:spPr>
+          <a:xfrm>
+            <a:off x="742950" y="3134153"/>
+            <a:ext cx="14288" cy="614363"/>
+          </a:xfrm>
+          <a:prstGeom prst="rect">
+            <a:avLst/>
+          </a:prstGeom>
+          <a:solidFill>
+            <a:srgbClr val="C92A2A"/>
+          </a:solidFill>
+          <a:ln/>
+        </p:spPr>
+      </p:sp>
+      <p:sp>
+        <p:nvSpPr>
+          <p:cNvPr id="12" name="Text 8"/>
+          <p:cNvSpPr/>
+          <p:nvPr/>
+        </p:nvSpPr>
+        <p:spPr>
+          <a:xfrm>
+            <a:off x="742950" y="3134153"/>
+            <a:ext cx="2362181" cy="614363"/>
+          </a:xfrm>
+          <a:prstGeom prst="rect">
+            <a:avLst/>
+          </a:prstGeom>
+          <a:noFill/>
+          <a:ln/>
+        </p:spPr>
+        <p:txBody>
+          <a:bodyPr wrap="square" lIns="68072" tIns="51054" rIns="0" bIns="0" rtlCol="0" anchor="t">
+            <a:spAutoFit/>
+          </a:bodyPr>
+          <a:lstStyle/>
+          <a:p>
+            <a:pPr algn="l" indent="0" marL="0">
+              <a:buNone/>
+            </a:pPr>
+            <a:r>
+              <a:rPr lang="en-US" sz="700" b="1" dirty="0">
+                <a:solidFill>
+                  <a:srgbClr val="C92A2A"/>
+                </a:solidFill>
+                <a:latin typeface="Open Sans Bold" pitchFamily="34" charset="0"/>
+                <a:ea typeface="Open Sans Bold" pitchFamily="34" charset="-122"/>
+                <a:cs typeface="Open Sans Bold" pitchFamily="34" charset="-120"/>
+              </a:rPr>
+              <a:t>⚠️ 주의</a:t>
+            </a:r>
+            <a:r>
+              <a:rPr lang="en-US" sz="750" dirty="0">
+                <a:solidFill>
+                  <a:srgbClr val="C92A2A"/>
+                </a:solidFill>
+                <a:latin typeface="Open Sans" pitchFamily="34" charset="0"/>
+                <a:ea typeface="Open Sans" pitchFamily="34" charset="-122"/>
+                <a:cs typeface="Open Sans" pitchFamily="34" charset="-120"/>
+              </a:rPr>
+              <a:t>
+</a:t>
+            </a:r>
+            <a:r>
+              <a:rPr lang="en-US" sz="750" dirty="0">
+                <a:solidFill>
+                  <a:srgbClr val="C92A2A"/>
+                </a:solidFill>
+                <a:latin typeface="Open Sans" pitchFamily="34" charset="0"/>
+                <a:ea typeface="Open Sans" pitchFamily="34" charset="-122"/>
+                <a:cs typeface="Open Sans" pitchFamily="34" charset="-120"/>
+              </a:rPr>
+              <a:t>컬럼마다 독립된 Scaler를 적용해야 합니다. 하나의 </a:t>
+            </a:r>
+            <a:r>
+              <a:rPr lang="en-US" sz="750" dirty="0">
+                <a:solidFill>
+                  <a:srgbClr val="C92A2A"/>
+                </a:solidFill>
+                <a:latin typeface="Open Sans" pitchFamily="34" charset="0"/>
+                <a:ea typeface="Open Sans" pitchFamily="34" charset="-122"/>
+                <a:cs typeface="Open Sans" pitchFamily="34" charset="-120"/>
+              </a:rPr>
+              <a:t>Scaler로 순차 처리 시 기준이 덮어씌워지는 버그가 </a:t>
+            </a:r>
+            <a:r>
+              <a:rPr lang="en-US" sz="750" dirty="0">
+                <a:solidFill>
+                  <a:srgbClr val="C92A2A"/>
+                </a:solidFill>
+                <a:latin typeface="Open Sans" pitchFamily="34" charset="0"/>
+                <a:ea typeface="Open Sans" pitchFamily="34" charset="-122"/>
+                <a:cs typeface="Open Sans" pitchFamily="34" charset="-120"/>
+              </a:rPr>
+              <a:t>발생할 수 있습니다.</a:t>
+            </a:r>
+            <a:endParaRPr lang="en-US" sz="700" dirty="0"/>
+          </a:p>
+        </p:txBody>
+      </p:sp>
+      <p:sp>
+        <p:nvSpPr>
+          <p:cNvPr id="13" name="Shape 9"/>
+          <p:cNvSpPr/>
+          <p:nvPr/>
+        </p:nvSpPr>
+        <p:spPr>
+          <a:xfrm>
+            <a:off x="3333731" y="1603270"/>
+            <a:ext cx="2590809" cy="2828925"/>
+          </a:xfrm>
+          <a:prstGeom prst="rect">
+            <a:avLst/>
+          </a:prstGeom>
+          <a:solidFill>
+            <a:srgbClr val="FFFFFF"/>
+          </a:solidFill>
+          <a:ln/>
+        </p:spPr>
+      </p:sp>
+      <p:sp>
+        <p:nvSpPr>
+          <p:cNvPr id="14" name="Shape 10"/>
+          <p:cNvSpPr/>
+          <p:nvPr/>
+        </p:nvSpPr>
+        <p:spPr>
+          <a:xfrm>
+            <a:off x="3333731" y="1603270"/>
+            <a:ext cx="14288" cy="2828925"/>
+          </a:xfrm>
+          <a:prstGeom prst="rect">
+            <a:avLst/>
+          </a:prstGeom>
+          <a:solidFill>
+            <a:srgbClr val="087F5B"/>
+          </a:solidFill>
+          <a:ln/>
+        </p:spPr>
+      </p:sp>
+      <p:sp>
+        <p:nvSpPr>
+          <p:cNvPr id="15" name="Text 11"/>
+          <p:cNvSpPr/>
+          <p:nvPr/>
+        </p:nvSpPr>
+        <p:spPr>
+          <a:xfrm>
+            <a:off x="5217309" y="1646132"/>
+            <a:ext cx="578644" cy="557213"/>
+          </a:xfrm>
+          <a:prstGeom prst="rect">
+            <a:avLst/>
+          </a:prstGeom>
+          <a:noFill/>
+          <a:ln/>
+        </p:spPr>
+        <p:txBody>
+          <a:bodyPr wrap="none" lIns="0" tIns="0" rIns="0" bIns="0" rtlCol="0" anchor="t">
+            <a:spAutoFit/>
+          </a:bodyPr>
+          <a:lstStyle/>
+          <a:p>
+            <a:pPr algn="l" indent="0" marL="0">
+              <a:buNone/>
+            </a:pPr>
+            <a:r>
+              <a:rPr lang="en-US" sz="3300" b="1" dirty="0">
+                <a:solidFill>
+                  <a:srgbClr val="E9ECEF"/>
+                </a:solidFill>
+                <a:latin typeface="Montserrat Bold" pitchFamily="34" charset="0"/>
+                <a:ea typeface="Montserrat Bold" pitchFamily="34" charset="-122"/>
+                <a:cs typeface="Montserrat Bold" pitchFamily="34" charset="-120"/>
+              </a:rPr>
+              <a:t>02</a:t>
+            </a:r>
+            <a:endParaRPr lang="en-US" sz="3300" dirty="0"/>
+          </a:p>
+        </p:txBody>
+      </p:sp>
+      <p:pic>
+        <p:nvPicPr>
+          <p:cNvPr id="16" name="Image 2" descr="preencoded.png">    </p:cNvPr>
+          <p:cNvPicPr>
+            <a:picLocks noChangeAspect="1"/>
+          </p:cNvPicPr>
+          <p:nvPr/>
+        </p:nvPicPr>
+        <p:blipFill>
+          <a:blip r:embed="rId3"/>
+          <a:stretch>
+            <a:fillRect/>
+          </a:stretch>
+        </p:blipFill>
+        <p:spPr>
+          <a:xfrm>
+            <a:off x="3448031" y="1762218"/>
+            <a:ext cx="228600" cy="228600"/>
+          </a:xfrm>
+          <a:prstGeom prst="rect">
+            <a:avLst/>
+          </a:prstGeom>
+        </p:spPr>
+      </p:pic>
+      <p:sp>
+        <p:nvSpPr>
+          <p:cNvPr id="17" name="Text 12"/>
+          <p:cNvSpPr/>
+          <p:nvPr/>
+        </p:nvSpPr>
+        <p:spPr>
+          <a:xfrm>
+            <a:off x="3448031" y="2115834"/>
+            <a:ext cx="2362209" cy="212527"/>
+          </a:xfrm>
+          <a:prstGeom prst="rect">
+            <a:avLst/>
+          </a:prstGeom>
+          <a:noFill/>
+          <a:ln/>
+        </p:spPr>
+        <p:txBody>
+          <a:bodyPr wrap="square" lIns="0" tIns="0" rIns="0" bIns="0" rtlCol="0" anchor="t">
+            <a:spAutoFit/>
+          </a:bodyPr>
+          <a:lstStyle/>
+          <a:p>
+            <a:pPr algn="l" indent="0" marL="0">
+              <a:buNone/>
+            </a:pPr>
+            <a:r>
+              <a:rPr lang="en-US" sz="1100" b="1" dirty="0">
+                <a:solidFill>
+                  <a:srgbClr val="212529"/>
+                </a:solidFill>
+                <a:latin typeface="Montserrat Bold" pitchFamily="34" charset="0"/>
+                <a:ea typeface="Montserrat Bold" pitchFamily="34" charset="-122"/>
+                <a:cs typeface="Montserrat Bold" pitchFamily="34" charset="-120"/>
+              </a:rPr>
+              <a:t>훈련/테스트 분리</a:t>
+            </a:r>
+            <a:endParaRPr lang="en-US" sz="1100" dirty="0"/>
+          </a:p>
+        </p:txBody>
+      </p:sp>
+      <p:sp>
+        <p:nvSpPr>
+          <p:cNvPr id="18" name="Text 13"/>
+          <p:cNvSpPr/>
+          <p:nvPr/>
+        </p:nvSpPr>
+        <p:spPr>
+          <a:xfrm>
+            <a:off x="3448031" y="2385510"/>
+            <a:ext cx="2362209" cy="662918"/>
+          </a:xfrm>
+          <a:prstGeom prst="rect">
+            <a:avLst/>
+          </a:prstGeom>
+          <a:noFill/>
+          <a:ln/>
+        </p:spPr>
+        <p:txBody>
+          <a:bodyPr wrap="square" lIns="0" tIns="0" rIns="0" bIns="0" rtlCol="0" anchor="t">
+            <a:spAutoFit/>
+          </a:bodyPr>
+          <a:lstStyle/>
+          <a:p>
+            <a:pPr algn="l" indent="0" marL="0">
+              <a:lnSpc>
+                <a:spcPct val="116000"/>
+              </a:lnSpc>
+              <a:buNone/>
+            </a:pPr>
+            <a:r>
+              <a:rPr lang="en-US" sz="850" dirty="0">
+                <a:solidFill>
+                  <a:srgbClr val="495057"/>
+                </a:solidFill>
+                <a:latin typeface="Open Sans Light" pitchFamily="34" charset="0"/>
+                <a:ea typeface="Open Sans Light" pitchFamily="34" charset="-122"/>
+                <a:cs typeface="Open Sans Light" pitchFamily="34" charset="-120"/>
+              </a:rPr>
+              <a:t>전체 데이터를 8:2 비율로 분리합니다. </a:t>
+            </a:r>
+            <a:r>
+              <a:rPr lang="en-US" sz="850" dirty="0">
+                <a:solidFill>
+                  <a:srgbClr val="495057"/>
+                </a:solidFill>
+                <a:latin typeface="Open Sans" pitchFamily="34" charset="0"/>
+                <a:ea typeface="Open Sans" pitchFamily="34" charset="-122"/>
+                <a:cs typeface="Open Sans" pitchFamily="34" charset="-120"/>
+              </a:rPr>
+              <a:t>stratify=y</a:t>
+            </a:r>
+            <a:r>
+              <a:rPr lang="en-US" sz="850" dirty="0">
+                <a:solidFill>
+                  <a:srgbClr val="495057"/>
+                </a:solidFill>
+                <a:latin typeface="Open Sans Light" pitchFamily="34" charset="0"/>
+                <a:ea typeface="Open Sans Light" pitchFamily="34" charset="-122"/>
+                <a:cs typeface="Open Sans Light" pitchFamily="34" charset="-120"/>
+              </a:rPr>
+              <a:t> 옵션을 사용하여 분리 후에도 사기 </a:t>
+            </a:r>
+            <a:r>
+              <a:rPr lang="en-US" sz="850" dirty="0">
+                <a:solidFill>
+                  <a:srgbClr val="495057"/>
+                </a:solidFill>
+                <a:latin typeface="Open Sans Light" pitchFamily="34" charset="0"/>
+                <a:ea typeface="Open Sans Light" pitchFamily="34" charset="-122"/>
+                <a:cs typeface="Open Sans Light" pitchFamily="34" charset="-120"/>
+              </a:rPr>
+              <a:t>거래 비율(0.17%)이 동일하게 유지되도록 보장</a:t>
+            </a:r>
+            <a:r>
+              <a:rPr lang="en-US" sz="850" dirty="0">
+                <a:solidFill>
+                  <a:srgbClr val="495057"/>
+                </a:solidFill>
+                <a:latin typeface="Open Sans Light" pitchFamily="34" charset="0"/>
+                <a:ea typeface="Open Sans Light" pitchFamily="34" charset="-122"/>
+                <a:cs typeface="Open Sans Light" pitchFamily="34" charset="-120"/>
+              </a:rPr>
+              <a:t>합니다.</a:t>
+            </a:r>
+            <a:endParaRPr lang="en-US" sz="850" dirty="0"/>
+          </a:p>
+        </p:txBody>
+      </p:sp>
+      <p:sp>
+        <p:nvSpPr>
+          <p:cNvPr id="19" name="Shape 14"/>
+          <p:cNvSpPr/>
+          <p:nvPr/>
+        </p:nvSpPr>
+        <p:spPr>
+          <a:xfrm>
+            <a:off x="3448031" y="3134153"/>
+            <a:ext cx="2362209" cy="471488"/>
+          </a:xfrm>
+          <a:prstGeom prst="rect">
+            <a:avLst/>
+          </a:prstGeom>
+          <a:solidFill>
+            <a:srgbClr val="087F5B">
+              <a:alpha val="5000"/>
+            </a:srgbClr>
+          </a:solidFill>
+          <a:ln/>
+        </p:spPr>
+      </p:sp>
+      <p:sp>
+        <p:nvSpPr>
+          <p:cNvPr id="20" name="Shape 15"/>
+          <p:cNvSpPr/>
+          <p:nvPr/>
+        </p:nvSpPr>
+        <p:spPr>
+          <a:xfrm>
+            <a:off x="3448031" y="3134153"/>
+            <a:ext cx="14288" cy="471488"/>
+          </a:xfrm>
+          <a:prstGeom prst="rect">
+            <a:avLst/>
+          </a:prstGeom>
+          <a:solidFill>
+            <a:srgbClr val="087F5B"/>
+          </a:solidFill>
+          <a:ln/>
+        </p:spPr>
+      </p:sp>
+      <p:sp>
+        <p:nvSpPr>
+          <p:cNvPr id="21" name="Text 16"/>
+          <p:cNvSpPr/>
+          <p:nvPr/>
+        </p:nvSpPr>
+        <p:spPr>
+          <a:xfrm>
+            <a:off x="3448031" y="3134153"/>
+            <a:ext cx="2362209" cy="471488"/>
+          </a:xfrm>
+          <a:prstGeom prst="rect">
+            <a:avLst/>
+          </a:prstGeom>
+          <a:noFill/>
+          <a:ln/>
+        </p:spPr>
+        <p:txBody>
+          <a:bodyPr wrap="square" lIns="68072" tIns="51054" rIns="0" bIns="0" rtlCol="0" anchor="t">
+            <a:spAutoFit/>
+          </a:bodyPr>
+          <a:lstStyle/>
+          <a:p>
+            <a:pPr algn="l" indent="0" marL="0">
+              <a:buNone/>
+            </a:pPr>
+            <a:r>
+              <a:rPr lang="en-US" sz="700" b="1" dirty="0">
+                <a:solidFill>
+                  <a:srgbClr val="087F5B"/>
+                </a:solidFill>
+                <a:latin typeface="Open Sans Bold" pitchFamily="34" charset="0"/>
+                <a:ea typeface="Open Sans Bold" pitchFamily="34" charset="-122"/>
+                <a:cs typeface="Open Sans Bold" pitchFamily="34" charset="-120"/>
+              </a:rPr>
+              <a:t>💡 핵심</a:t>
+            </a:r>
+            <a:r>
+              <a:rPr lang="en-US" sz="750" dirty="0">
+                <a:solidFill>
+                  <a:srgbClr val="087F5B"/>
+                </a:solidFill>
+                <a:latin typeface="Open Sans" pitchFamily="34" charset="0"/>
+                <a:ea typeface="Open Sans" pitchFamily="34" charset="-122"/>
+                <a:cs typeface="Open Sans" pitchFamily="34" charset="-120"/>
+              </a:rPr>
+              <a:t>
+</a:t>
+            </a:r>
+            <a:r>
+              <a:rPr lang="en-US" sz="750" dirty="0">
+                <a:solidFill>
+                  <a:srgbClr val="087F5B"/>
+                </a:solidFill>
+                <a:latin typeface="Open Sans" pitchFamily="34" charset="0"/>
+                <a:ea typeface="Open Sans" pitchFamily="34" charset="-122"/>
+                <a:cs typeface="Open Sans" pitchFamily="34" charset="-120"/>
+              </a:rPr>
+              <a:t>테스트 데이터는 학습에 절대 사용하지 않으며, 오</a:t>
+            </a:r>
+            <a:r>
+              <a:rPr lang="en-US" sz="750" dirty="0">
+                <a:solidFill>
+                  <a:srgbClr val="087F5B"/>
+                </a:solidFill>
+                <a:latin typeface="Open Sans" pitchFamily="34" charset="0"/>
+                <a:ea typeface="Open Sans" pitchFamily="34" charset="-122"/>
+                <a:cs typeface="Open Sans" pitchFamily="34" charset="-120"/>
+              </a:rPr>
+              <a:t>직 최종 성능 측정용으로만 격리합니다.</a:t>
+            </a:r>
+            <a:endParaRPr lang="en-US" sz="700" dirty="0"/>
+          </a:p>
+        </p:txBody>
+      </p:sp>
+      <p:sp>
+        <p:nvSpPr>
+          <p:cNvPr id="22" name="Shape 17"/>
+          <p:cNvSpPr/>
+          <p:nvPr/>
+        </p:nvSpPr>
+        <p:spPr>
+          <a:xfrm>
+            <a:off x="6038841" y="1603270"/>
+            <a:ext cx="2590781" cy="2828925"/>
+          </a:xfrm>
+          <a:prstGeom prst="rect">
+            <a:avLst/>
+          </a:prstGeom>
+          <a:solidFill>
+            <a:srgbClr val="FFFFFF"/>
+          </a:solidFill>
+          <a:ln/>
+        </p:spPr>
+      </p:sp>
+      <p:sp>
+        <p:nvSpPr>
+          <p:cNvPr id="23" name="Shape 18"/>
+          <p:cNvSpPr/>
+          <p:nvPr/>
+        </p:nvSpPr>
+        <p:spPr>
+          <a:xfrm>
+            <a:off x="6038841" y="1603270"/>
+            <a:ext cx="14288" cy="2828925"/>
+          </a:xfrm>
+          <a:prstGeom prst="rect">
+            <a:avLst/>
+          </a:prstGeom>
+          <a:solidFill>
+            <a:srgbClr val="087F5B"/>
+          </a:solidFill>
+          <a:ln/>
+        </p:spPr>
+      </p:sp>
+      <p:sp>
+        <p:nvSpPr>
+          <p:cNvPr id="24" name="Text 19"/>
+          <p:cNvSpPr/>
+          <p:nvPr/>
+        </p:nvSpPr>
+        <p:spPr>
+          <a:xfrm>
+            <a:off x="7924177" y="1646132"/>
+            <a:ext cx="576858" cy="557213"/>
+          </a:xfrm>
+          <a:prstGeom prst="rect">
+            <a:avLst/>
+          </a:prstGeom>
+          <a:noFill/>
+          <a:ln/>
+        </p:spPr>
+        <p:txBody>
+          <a:bodyPr wrap="none" lIns="0" tIns="0" rIns="0" bIns="0" rtlCol="0" anchor="t">
+            <a:spAutoFit/>
+          </a:bodyPr>
+          <a:lstStyle/>
+          <a:p>
+            <a:pPr algn="l" indent="0" marL="0">
+              <a:buNone/>
+            </a:pPr>
+            <a:r>
+              <a:rPr lang="en-US" sz="3300" b="1" dirty="0">
+                <a:solidFill>
+                  <a:srgbClr val="E9ECEF"/>
+                </a:solidFill>
+                <a:latin typeface="Montserrat Bold" pitchFamily="34" charset="0"/>
+                <a:ea typeface="Montserrat Bold" pitchFamily="34" charset="-122"/>
+                <a:cs typeface="Montserrat Bold" pitchFamily="34" charset="-120"/>
+              </a:rPr>
+              <a:t>03</a:t>
+            </a:r>
+            <a:endParaRPr lang="en-US" sz="3300" dirty="0"/>
+          </a:p>
+        </p:txBody>
+      </p:sp>
+      <p:pic>
+        <p:nvPicPr>
+          <p:cNvPr id="25" name="Image 3" descr="preencoded.png">    </p:cNvPr>
+          <p:cNvPicPr>
+            <a:picLocks noChangeAspect="1"/>
+          </p:cNvPicPr>
+          <p:nvPr/>
+        </p:nvPicPr>
+        <p:blipFill>
+          <a:blip r:embed="rId4"/>
+          <a:stretch>
+            <a:fillRect/>
+          </a:stretch>
+        </p:blipFill>
+        <p:spPr>
+          <a:xfrm>
+            <a:off x="6153141" y="1762218"/>
+            <a:ext cx="200025" cy="228600"/>
+          </a:xfrm>
+          <a:prstGeom prst="rect">
+            <a:avLst/>
+          </a:prstGeom>
+        </p:spPr>
+      </p:pic>
+      <p:sp>
+        <p:nvSpPr>
+          <p:cNvPr id="26" name="Text 20"/>
+          <p:cNvSpPr/>
+          <p:nvPr/>
+        </p:nvSpPr>
+        <p:spPr>
+          <a:xfrm>
+            <a:off x="6153141" y="2115834"/>
+            <a:ext cx="2362181" cy="212527"/>
+          </a:xfrm>
+          <a:prstGeom prst="rect">
+            <a:avLst/>
+          </a:prstGeom>
+          <a:noFill/>
+          <a:ln/>
+        </p:spPr>
+        <p:txBody>
+          <a:bodyPr wrap="square" lIns="0" tIns="0" rIns="0" bIns="0" rtlCol="0" anchor="t">
+            <a:spAutoFit/>
+          </a:bodyPr>
+          <a:lstStyle/>
+          <a:p>
+            <a:pPr algn="l" indent="0" marL="0">
+              <a:buNone/>
+            </a:pPr>
+            <a:r>
+              <a:rPr lang="en-US" sz="1100" b="1" dirty="0">
+                <a:solidFill>
+                  <a:srgbClr val="212529"/>
+                </a:solidFill>
+                <a:latin typeface="Montserrat Bold" pitchFamily="34" charset="0"/>
+                <a:ea typeface="Montserrat Bold" pitchFamily="34" charset="-122"/>
+                <a:cs typeface="Montserrat Bold" pitchFamily="34" charset="-120"/>
+              </a:rPr>
+              <a:t>불균형 해소 (SMOTE)</a:t>
+            </a:r>
+            <a:endParaRPr lang="en-US" sz="1100" dirty="0"/>
+          </a:p>
+        </p:txBody>
+      </p:sp>
+      <p:sp>
+        <p:nvSpPr>
+          <p:cNvPr id="27" name="Text 21"/>
+          <p:cNvSpPr/>
+          <p:nvPr/>
+        </p:nvSpPr>
+        <p:spPr>
+          <a:xfrm>
+            <a:off x="6153141" y="2385510"/>
+            <a:ext cx="2362181" cy="497188"/>
+          </a:xfrm>
+          <a:prstGeom prst="rect">
+            <a:avLst/>
+          </a:prstGeom>
+          <a:noFill/>
+          <a:ln/>
+        </p:spPr>
+        <p:txBody>
+          <a:bodyPr wrap="square" lIns="0" tIns="0" rIns="0" bIns="0" rtlCol="0" anchor="t">
+            <a:spAutoFit/>
+          </a:bodyPr>
+          <a:lstStyle/>
+          <a:p>
+            <a:pPr algn="l" indent="0" marL="0">
+              <a:lnSpc>
+                <a:spcPct val="116000"/>
+              </a:lnSpc>
+              <a:buNone/>
+            </a:pPr>
+            <a:r>
+              <a:rPr lang="en-US" sz="850" dirty="0">
+                <a:solidFill>
+                  <a:srgbClr val="495057"/>
+                </a:solidFill>
+                <a:latin typeface="Open Sans Light" pitchFamily="34" charset="0"/>
+                <a:ea typeface="Open Sans Light" pitchFamily="34" charset="-122"/>
+                <a:cs typeface="Open Sans Light" pitchFamily="34" charset="-120"/>
+              </a:rPr>
+              <a:t>학습 데이터의 사기 건수를 정상 거래 건수와 동일하게 증강합니다. 이를 통해 모델이 희소한 사기 패턴을 충분히 학습할 수 있게 합니다.</a:t>
+            </a:r>
+            <a:endParaRPr lang="en-US" sz="850" dirty="0"/>
+          </a:p>
+        </p:txBody>
+      </p:sp>
+      <p:sp>
+        <p:nvSpPr>
+          <p:cNvPr id="28" name="Shape 22"/>
+          <p:cNvSpPr/>
+          <p:nvPr/>
+        </p:nvSpPr>
+        <p:spPr>
+          <a:xfrm>
+            <a:off x="6153141" y="2968423"/>
+            <a:ext cx="2362181" cy="614363"/>
+          </a:xfrm>
+          <a:prstGeom prst="rect">
+            <a:avLst/>
+          </a:prstGeom>
+          <a:solidFill>
+            <a:srgbClr val="C92A2A">
+              <a:alpha val="5000"/>
+            </a:srgbClr>
+          </a:solidFill>
+          <a:ln/>
+        </p:spPr>
+      </p:sp>
+      <p:sp>
+        <p:nvSpPr>
+          <p:cNvPr id="29" name="Shape 23"/>
+          <p:cNvSpPr/>
+          <p:nvPr/>
+        </p:nvSpPr>
+        <p:spPr>
+          <a:xfrm>
+            <a:off x="6153141" y="2968423"/>
+            <a:ext cx="14288" cy="614363"/>
+          </a:xfrm>
+          <a:prstGeom prst="rect">
+            <a:avLst/>
+          </a:prstGeom>
+          <a:solidFill>
+            <a:srgbClr val="C92A2A"/>
+          </a:solidFill>
+          <a:ln/>
+        </p:spPr>
+      </p:sp>
+      <p:sp>
+        <p:nvSpPr>
+          <p:cNvPr id="30" name="Text 24"/>
+          <p:cNvSpPr/>
+          <p:nvPr/>
+        </p:nvSpPr>
+        <p:spPr>
+          <a:xfrm>
+            <a:off x="6153141" y="2968423"/>
+            <a:ext cx="2362181" cy="614363"/>
+          </a:xfrm>
+          <a:prstGeom prst="rect">
+            <a:avLst/>
+          </a:prstGeom>
+          <a:noFill/>
+          <a:ln/>
+        </p:spPr>
+        <p:txBody>
+          <a:bodyPr wrap="square" lIns="68072" tIns="51054" rIns="0" bIns="0" rtlCol="0" anchor="t">
+            <a:spAutoFit/>
+          </a:bodyPr>
+          <a:lstStyle/>
+          <a:p>
+            <a:pPr algn="l" indent="0" marL="0">
+              <a:buNone/>
+            </a:pPr>
+            <a:r>
+              <a:rPr lang="en-US" sz="700" b="1" dirty="0">
+                <a:solidFill>
+                  <a:srgbClr val="C92A2A"/>
+                </a:solidFill>
+                <a:latin typeface="Open Sans Bold" pitchFamily="34" charset="0"/>
+                <a:ea typeface="Open Sans Bold" pitchFamily="34" charset="-122"/>
+                <a:cs typeface="Open Sans Bold" pitchFamily="34" charset="-120"/>
+              </a:rPr>
+              <a:t>🚫 절대 금지</a:t>
+            </a:r>
+            <a:r>
+              <a:rPr lang="en-US" sz="750" dirty="0">
+                <a:solidFill>
+                  <a:srgbClr val="C92A2A"/>
+                </a:solidFill>
+                <a:latin typeface="Open Sans" pitchFamily="34" charset="0"/>
+                <a:ea typeface="Open Sans" pitchFamily="34" charset="-122"/>
+                <a:cs typeface="Open Sans" pitchFamily="34" charset="-120"/>
+              </a:rPr>
+              <a:t>
+</a:t>
+            </a:r>
+            <a:r>
+              <a:rPr lang="en-US" sz="750" dirty="0">
+                <a:solidFill>
+                  <a:srgbClr val="C92A2A"/>
+                </a:solidFill>
+                <a:latin typeface="Open Sans" pitchFamily="34" charset="0"/>
+                <a:ea typeface="Open Sans" pitchFamily="34" charset="-122"/>
+                <a:cs typeface="Open Sans" pitchFamily="34" charset="-120"/>
+              </a:rPr>
+              <a:t>테스트 데이터에는 SMOTE를 적용하지 않습니다. </a:t>
+            </a:r>
+            <a:r>
+              <a:rPr lang="en-US" sz="750" dirty="0">
+                <a:solidFill>
+                  <a:srgbClr val="C92A2A"/>
+                </a:solidFill>
+                <a:latin typeface="Open Sans" pitchFamily="34" charset="0"/>
+                <a:ea typeface="Open Sans" pitchFamily="34" charset="-122"/>
+                <a:cs typeface="Open Sans" pitchFamily="34" charset="-120"/>
+              </a:rPr>
+              <a:t>현실에 없는 가상 데이터로 평가하면 성능이 왜곡됩</a:t>
+            </a:r>
+            <a:r>
+              <a:rPr lang="en-US" sz="750" dirty="0">
+                <a:solidFill>
+                  <a:srgbClr val="C92A2A"/>
+                </a:solidFill>
+                <a:latin typeface="Open Sans" pitchFamily="34" charset="0"/>
+                <a:ea typeface="Open Sans" pitchFamily="34" charset="-122"/>
+                <a:cs typeface="Open Sans" pitchFamily="34" charset="-120"/>
+              </a:rPr>
+              <a:t>니다.</a:t>
+            </a:r>
+            <a:endParaRPr lang="en-US" sz="700" dirty="0"/>
+          </a:p>
+        </p:txBody>
+      </p:sp>
     </p:spTree>
   </p:cSld>
   <p:clrMapOvr>
@@ -2293,9 +5825,50 @@
           </a:prstGeom>
         </p:spPr>
       </p:pic>
+      <p:sp>
+        <p:nvSpPr>
+          <p:cNvPr id="3" name="Text 0"/>
+          <p:cNvSpPr/>
+          <p:nvPr/>
+        </p:nvSpPr>
+        <p:spPr>
+          <a:xfrm>
+            <a:off x="428625" y="713231"/>
+            <a:ext cx="8715375" cy="462558"/>
+          </a:xfrm>
+          <a:prstGeom prst="rect">
+            <a:avLst/>
+          </a:prstGeom>
+          <a:noFill/>
+          <a:ln/>
+        </p:spPr>
+        <p:txBody>
+          <a:bodyPr wrap="square" lIns="170053" tIns="0" rIns="0" bIns="0" rtlCol="0" anchor="t">
+            <a:spAutoFit/>
+          </a:bodyPr>
+          <a:lstStyle/>
+          <a:p>
+            <a:pPr algn="l" indent="0" marL="0">
+              <a:buNone/>
+            </a:pPr>
+            <a:r>
+              <a:rPr lang="en-US" sz="2450" b="1" dirty="0">
+                <a:solidFill>
+                  <a:srgbClr val="212529"/>
+                </a:solidFill>
+                <a:latin typeface="Montserrat Bold" pitchFamily="34" charset="0"/>
+                <a:ea typeface="Montserrat Bold" pitchFamily="34" charset="-122"/>
+                <a:cs typeface="Montserrat Bold" pitchFamily="34" charset="-120"/>
+              </a:rPr>
+              <a:t>모델링 전략: 기초 알고리즘부터 딥러닝까지</a:t>
+            </a:r>
+            <a:endParaRPr lang="en-US" sz="2450" dirty="0"/>
+          </a:p>
+        </p:txBody>
+      </p:sp>
       <p:pic>
         <p:nvPicPr>
-          <p:cNvPr id="3" name="Image 1" descr="preencoded.png">    </p:cNvPr>
+          <p:cNvPr id="4" name="Image 1" descr="preencoded.png">    </p:cNvPr>
           <p:cNvPicPr>
             <a:picLocks noChangeAspect="1"/>
           </p:cNvPicPr>
@@ -2309,14 +5882,902 @@
         </p:blipFill>
         <p:spPr>
           <a:xfrm>
-            <a:off x="0" y="0"/>
-            <a:ext cx="9144000" cy="5143500"/>
+            <a:off x="557213" y="1690781"/>
+            <a:ext cx="171450" cy="171450"/>
           </a:xfrm>
           <a:prstGeom prst="rect">
             <a:avLst/>
           </a:prstGeom>
         </p:spPr>
       </p:pic>
+      <p:sp>
+        <p:nvSpPr>
+          <p:cNvPr id="5" name="Text 1"/>
+          <p:cNvSpPr/>
+          <p:nvPr/>
+        </p:nvSpPr>
+        <p:spPr>
+          <a:xfrm>
+            <a:off x="814388" y="1660420"/>
+            <a:ext cx="734020" cy="232172"/>
+          </a:xfrm>
+          <a:prstGeom prst="rect">
+            <a:avLst/>
+          </a:prstGeom>
+          <a:noFill/>
+          <a:ln/>
+        </p:spPr>
+        <p:txBody>
+          <a:bodyPr wrap="none" lIns="0" tIns="0" rIns="0" bIns="0" rtlCol="0" anchor="t">
+            <a:spAutoFit/>
+          </a:bodyPr>
+          <a:lstStyle/>
+          <a:p>
+            <a:pPr algn="l" indent="0" marL="0">
+              <a:buNone/>
+            </a:pPr>
+            <a:r>
+              <a:rPr lang="en-US" sz="1200" b="1" dirty="0">
+                <a:solidFill>
+                  <a:srgbClr val="212529"/>
+                </a:solidFill>
+                <a:latin typeface="Montserrat Bold" pitchFamily="34" charset="0"/>
+                <a:ea typeface="Montserrat Bold" pitchFamily="34" charset="-122"/>
+                <a:cs typeface="Montserrat Bold" pitchFamily="34" charset="-120"/>
+              </a:rPr>
+              <a:t>기초 모델</a:t>
+            </a:r>
+            <a:endParaRPr lang="en-US" sz="1200" dirty="0"/>
+          </a:p>
+        </p:txBody>
+      </p:sp>
+      <p:sp>
+        <p:nvSpPr>
+          <p:cNvPr id="6" name="Text 2"/>
+          <p:cNvSpPr/>
+          <p:nvPr/>
+        </p:nvSpPr>
+        <p:spPr>
+          <a:xfrm>
+            <a:off x="557213" y="1992604"/>
+            <a:ext cx="2538403" cy="180380"/>
+          </a:xfrm>
+          <a:prstGeom prst="rect">
+            <a:avLst/>
+          </a:prstGeom>
+          <a:noFill/>
+          <a:ln/>
+        </p:spPr>
+        <p:txBody>
+          <a:bodyPr wrap="square" lIns="0" tIns="0" rIns="0" bIns="0" rtlCol="0" anchor="t">
+            <a:spAutoFit/>
+          </a:bodyPr>
+          <a:lstStyle/>
+          <a:p>
+            <a:pPr algn="l" indent="0" marL="0">
+              <a:buNone/>
+            </a:pPr>
+            <a:r>
+              <a:rPr lang="en-US" sz="900" b="1" dirty="0">
+                <a:solidFill>
+                  <a:srgbClr val="212529"/>
+                </a:solidFill>
+                <a:latin typeface="Open Sans Bold" pitchFamily="34" charset="0"/>
+                <a:ea typeface="Open Sans Bold" pitchFamily="34" charset="-122"/>
+                <a:cs typeface="Open Sans Bold" pitchFamily="34" charset="-120"/>
+              </a:rPr>
+              <a:t>로지스틱 회귀 &amp; 결정 트리</a:t>
+            </a:r>
+            <a:endParaRPr lang="en-US" sz="900" dirty="0"/>
+          </a:p>
+        </p:txBody>
+      </p:sp>
+      <p:sp>
+        <p:nvSpPr>
+          <p:cNvPr id="7" name="Text 3"/>
+          <p:cNvSpPr/>
+          <p:nvPr/>
+        </p:nvSpPr>
+        <p:spPr>
+          <a:xfrm>
+            <a:off x="557213" y="2201559"/>
+            <a:ext cx="2538403" cy="321469"/>
+          </a:xfrm>
+          <a:prstGeom prst="rect">
+            <a:avLst/>
+          </a:prstGeom>
+          <a:noFill/>
+          <a:ln/>
+        </p:spPr>
+        <p:txBody>
+          <a:bodyPr wrap="square" lIns="0" tIns="0" rIns="0" bIns="0" rtlCol="0" anchor="t">
+            <a:spAutoFit/>
+          </a:bodyPr>
+          <a:lstStyle/>
+          <a:p>
+            <a:pPr algn="l" indent="0" marL="0">
+              <a:lnSpc>
+                <a:spcPct val="120000"/>
+              </a:lnSpc>
+              <a:buNone/>
+            </a:pPr>
+            <a:r>
+              <a:rPr lang="en-US" sz="800" dirty="0">
+                <a:solidFill>
+                  <a:srgbClr val="495057"/>
+                </a:solidFill>
+                <a:latin typeface="Open Sans Light" pitchFamily="34" charset="0"/>
+                <a:ea typeface="Open Sans Light" pitchFamily="34" charset="-122"/>
+                <a:cs typeface="Open Sans Light" pitchFamily="34" charset="-120"/>
+              </a:rPr>
+              <a:t>데이터의 선형 경계와 직관적인 규칙 기반 분류를 통해 베이스라인 성능을 측정합니다.</a:t>
+            </a:r>
+            <a:endParaRPr lang="en-US" sz="800" dirty="0"/>
+          </a:p>
+        </p:txBody>
+      </p:sp>
+      <p:sp>
+        <p:nvSpPr>
+          <p:cNvPr id="8" name="Text 4"/>
+          <p:cNvSpPr/>
+          <p:nvPr/>
+        </p:nvSpPr>
+        <p:spPr>
+          <a:xfrm>
+            <a:off x="557213" y="2608752"/>
+            <a:ext cx="2538403" cy="180380"/>
+          </a:xfrm>
+          <a:prstGeom prst="rect">
+            <a:avLst/>
+          </a:prstGeom>
+          <a:noFill/>
+          <a:ln/>
+        </p:spPr>
+        <p:txBody>
+          <a:bodyPr wrap="square" lIns="0" tIns="0" rIns="0" bIns="0" rtlCol="0" anchor="t">
+            <a:spAutoFit/>
+          </a:bodyPr>
+          <a:lstStyle/>
+          <a:p>
+            <a:pPr algn="l" indent="0" marL="0">
+              <a:buNone/>
+            </a:pPr>
+            <a:r>
+              <a:rPr lang="en-US" sz="900" b="1" dirty="0">
+                <a:solidFill>
+                  <a:srgbClr val="212529"/>
+                </a:solidFill>
+                <a:latin typeface="Open Sans Bold" pitchFamily="34" charset="0"/>
+                <a:ea typeface="Open Sans Bold" pitchFamily="34" charset="-122"/>
+                <a:cs typeface="Open Sans Bold" pitchFamily="34" charset="-120"/>
+              </a:rPr>
+              <a:t>KNN &amp; 나이브 베이즈</a:t>
+            </a:r>
+            <a:endParaRPr lang="en-US" sz="900" dirty="0"/>
+          </a:p>
+        </p:txBody>
+      </p:sp>
+      <p:sp>
+        <p:nvSpPr>
+          <p:cNvPr id="9" name="Text 5"/>
+          <p:cNvSpPr/>
+          <p:nvPr/>
+        </p:nvSpPr>
+        <p:spPr>
+          <a:xfrm>
+            <a:off x="557213" y="2817707"/>
+            <a:ext cx="2538403" cy="321469"/>
+          </a:xfrm>
+          <a:prstGeom prst="rect">
+            <a:avLst/>
+          </a:prstGeom>
+          <a:noFill/>
+          <a:ln/>
+        </p:spPr>
+        <p:txBody>
+          <a:bodyPr wrap="square" lIns="0" tIns="0" rIns="0" bIns="0" rtlCol="0" anchor="t">
+            <a:spAutoFit/>
+          </a:bodyPr>
+          <a:lstStyle/>
+          <a:p>
+            <a:pPr algn="l" indent="0" marL="0">
+              <a:lnSpc>
+                <a:spcPct val="120000"/>
+              </a:lnSpc>
+              <a:buNone/>
+            </a:pPr>
+            <a:r>
+              <a:rPr lang="en-US" sz="800" dirty="0">
+                <a:solidFill>
+                  <a:srgbClr val="495057"/>
+                </a:solidFill>
+                <a:latin typeface="Open Sans Light" pitchFamily="34" charset="0"/>
+                <a:ea typeface="Open Sans Light" pitchFamily="34" charset="-122"/>
+                <a:cs typeface="Open Sans Light" pitchFamily="34" charset="-120"/>
+              </a:rPr>
+              <a:t>이웃 기반 유사도와 확률적 접근을 통해 사기 거래의 특이 패턴을 탐색합니다.</a:t>
+            </a:r>
+            <a:endParaRPr lang="en-US" sz="800" dirty="0"/>
+          </a:p>
+        </p:txBody>
+      </p:sp>
+      <p:sp>
+        <p:nvSpPr>
+          <p:cNvPr id="10" name="Text 6"/>
+          <p:cNvSpPr/>
+          <p:nvPr/>
+        </p:nvSpPr>
+        <p:spPr>
+          <a:xfrm>
+            <a:off x="557213" y="3224901"/>
+            <a:ext cx="2538403" cy="175022"/>
+          </a:xfrm>
+          <a:prstGeom prst="rect">
+            <a:avLst/>
+          </a:prstGeom>
+          <a:noFill/>
+          <a:ln/>
+        </p:spPr>
+        <p:txBody>
+          <a:bodyPr wrap="square" lIns="0" tIns="0" rIns="0" bIns="0" rtlCol="0" anchor="t">
+            <a:spAutoFit/>
+          </a:bodyPr>
+          <a:lstStyle/>
+          <a:p>
+            <a:pPr algn="l" indent="0" marL="0">
+              <a:buNone/>
+            </a:pPr>
+            <a:r>
+              <a:rPr lang="en-US" sz="900" b="1" dirty="0">
+                <a:solidFill>
+                  <a:srgbClr val="212529"/>
+                </a:solidFill>
+                <a:latin typeface="Open Sans Bold" pitchFamily="34" charset="0"/>
+                <a:ea typeface="Open Sans Bold" pitchFamily="34" charset="-122"/>
+                <a:cs typeface="Open Sans Bold" pitchFamily="34" charset="-120"/>
+              </a:rPr>
+              <a:t>SVM (Support Vector Machine)</a:t>
+            </a:r>
+            <a:endParaRPr lang="en-US" sz="900" dirty="0"/>
+          </a:p>
+        </p:txBody>
+      </p:sp>
+      <p:sp>
+        <p:nvSpPr>
+          <p:cNvPr id="11" name="Text 7"/>
+          <p:cNvSpPr/>
+          <p:nvPr/>
+        </p:nvSpPr>
+        <p:spPr>
+          <a:xfrm>
+            <a:off x="557213" y="3428498"/>
+            <a:ext cx="2538403" cy="321469"/>
+          </a:xfrm>
+          <a:prstGeom prst="rect">
+            <a:avLst/>
+          </a:prstGeom>
+          <a:noFill/>
+          <a:ln/>
+        </p:spPr>
+        <p:txBody>
+          <a:bodyPr wrap="square" lIns="0" tIns="0" rIns="0" bIns="0" rtlCol="0" anchor="t">
+            <a:spAutoFit/>
+          </a:bodyPr>
+          <a:lstStyle/>
+          <a:p>
+            <a:pPr algn="l" indent="0" marL="0">
+              <a:lnSpc>
+                <a:spcPct val="120000"/>
+              </a:lnSpc>
+              <a:buNone/>
+            </a:pPr>
+            <a:r>
+              <a:rPr lang="en-US" sz="800" dirty="0">
+                <a:solidFill>
+                  <a:srgbClr val="495057"/>
+                </a:solidFill>
+                <a:latin typeface="Open Sans Light" pitchFamily="34" charset="0"/>
+                <a:ea typeface="Open Sans Light" pitchFamily="34" charset="-122"/>
+                <a:cs typeface="Open Sans Light" pitchFamily="34" charset="-120"/>
+              </a:rPr>
+              <a:t>고차원 공간에서 클래스 간 마진을 최대화하여 정밀한 분류 경계를 형성합니다.</a:t>
+            </a:r>
+            <a:endParaRPr lang="en-US" sz="800" dirty="0"/>
+          </a:p>
+        </p:txBody>
+      </p:sp>
+      <p:pic>
+        <p:nvPicPr>
+          <p:cNvPr id="12" name="Image 2" descr="preencoded.png">    </p:cNvPr>
+          <p:cNvPicPr>
+            <a:picLocks noChangeAspect="1"/>
+          </p:cNvPicPr>
+          <p:nvPr/>
+        </p:nvPicPr>
+        <p:blipFill>
+          <a:blip r:embed="rId3"/>
+          <a:stretch>
+            <a:fillRect/>
+          </a:stretch>
+        </p:blipFill>
+        <p:spPr>
+          <a:xfrm>
+            <a:off x="3367078" y="1690781"/>
+            <a:ext cx="171450" cy="171450"/>
+          </a:xfrm>
+          <a:prstGeom prst="rect">
+            <a:avLst/>
+          </a:prstGeom>
+        </p:spPr>
+      </p:pic>
+      <p:sp>
+        <p:nvSpPr>
+          <p:cNvPr id="13" name="Text 8"/>
+          <p:cNvSpPr/>
+          <p:nvPr/>
+        </p:nvSpPr>
+        <p:spPr>
+          <a:xfrm>
+            <a:off x="3624253" y="1660420"/>
+            <a:ext cx="905470" cy="232172"/>
+          </a:xfrm>
+          <a:prstGeom prst="rect">
+            <a:avLst/>
+          </a:prstGeom>
+          <a:noFill/>
+          <a:ln/>
+        </p:spPr>
+        <p:txBody>
+          <a:bodyPr wrap="none" lIns="0" tIns="0" rIns="0" bIns="0" rtlCol="0" anchor="t">
+            <a:spAutoFit/>
+          </a:bodyPr>
+          <a:lstStyle/>
+          <a:p>
+            <a:pPr algn="l" indent="0" marL="0">
+              <a:buNone/>
+            </a:pPr>
+            <a:r>
+              <a:rPr lang="en-US" sz="1200" b="1" dirty="0">
+                <a:solidFill>
+                  <a:srgbClr val="212529"/>
+                </a:solidFill>
+                <a:latin typeface="Montserrat Bold" pitchFamily="34" charset="0"/>
+                <a:ea typeface="Montserrat Bold" pitchFamily="34" charset="-122"/>
+                <a:cs typeface="Montserrat Bold" pitchFamily="34" charset="-120"/>
+              </a:rPr>
+              <a:t>앙상블 모델</a:t>
+            </a:r>
+            <a:endParaRPr lang="en-US" sz="1200" dirty="0"/>
+          </a:p>
+        </p:txBody>
+      </p:sp>
+      <p:sp>
+        <p:nvSpPr>
+          <p:cNvPr id="14" name="Text 9"/>
+          <p:cNvSpPr/>
+          <p:nvPr/>
+        </p:nvSpPr>
+        <p:spPr>
+          <a:xfrm>
+            <a:off x="3367078" y="1992604"/>
+            <a:ext cx="2538403" cy="180380"/>
+          </a:xfrm>
+          <a:prstGeom prst="rect">
+            <a:avLst/>
+          </a:prstGeom>
+          <a:noFill/>
+          <a:ln/>
+        </p:spPr>
+        <p:txBody>
+          <a:bodyPr wrap="square" lIns="0" tIns="0" rIns="0" bIns="0" rtlCol="0" anchor="t">
+            <a:spAutoFit/>
+          </a:bodyPr>
+          <a:lstStyle/>
+          <a:p>
+            <a:pPr algn="l" indent="0" marL="0">
+              <a:buNone/>
+            </a:pPr>
+            <a:r>
+              <a:rPr lang="en-US" sz="900" b="1" dirty="0">
+                <a:solidFill>
+                  <a:srgbClr val="212529"/>
+                </a:solidFill>
+                <a:latin typeface="Open Sans Bold" pitchFamily="34" charset="0"/>
+                <a:ea typeface="Open Sans Bold" pitchFamily="34" charset="-122"/>
+                <a:cs typeface="Open Sans Bold" pitchFamily="34" charset="-120"/>
+              </a:rPr>
+              <a:t>랜덤 포레스트 (Random Forest)</a:t>
+            </a:r>
+            <a:endParaRPr lang="en-US" sz="900" dirty="0"/>
+          </a:p>
+        </p:txBody>
+      </p:sp>
+      <p:sp>
+        <p:nvSpPr>
+          <p:cNvPr id="15" name="Text 10"/>
+          <p:cNvSpPr/>
+          <p:nvPr/>
+        </p:nvSpPr>
+        <p:spPr>
+          <a:xfrm>
+            <a:off x="3367078" y="2201559"/>
+            <a:ext cx="2538403" cy="321469"/>
+          </a:xfrm>
+          <a:prstGeom prst="rect">
+            <a:avLst/>
+          </a:prstGeom>
+          <a:noFill/>
+          <a:ln/>
+        </p:spPr>
+        <p:txBody>
+          <a:bodyPr wrap="square" lIns="0" tIns="0" rIns="0" bIns="0" rtlCol="0" anchor="t">
+            <a:spAutoFit/>
+          </a:bodyPr>
+          <a:lstStyle/>
+          <a:p>
+            <a:pPr algn="l" indent="0" marL="0">
+              <a:lnSpc>
+                <a:spcPct val="120000"/>
+              </a:lnSpc>
+              <a:buNone/>
+            </a:pPr>
+            <a:r>
+              <a:rPr lang="en-US" sz="800" dirty="0">
+                <a:solidFill>
+                  <a:srgbClr val="495057"/>
+                </a:solidFill>
+                <a:latin typeface="Open Sans Light" pitchFamily="34" charset="0"/>
+                <a:ea typeface="Open Sans Light" pitchFamily="34" charset="-122"/>
+                <a:cs typeface="Open Sans Light" pitchFamily="34" charset="-120"/>
+              </a:rPr>
+              <a:t>다수의 결정 트리를 결합하여 과적합을 방지하고 예측의 안정성을 확보합니다.</a:t>
+            </a:r>
+            <a:endParaRPr lang="en-US" sz="800" dirty="0"/>
+          </a:p>
+        </p:txBody>
+      </p:sp>
+      <p:sp>
+        <p:nvSpPr>
+          <p:cNvPr id="16" name="Shape 11"/>
+          <p:cNvSpPr/>
+          <p:nvPr/>
+        </p:nvSpPr>
+        <p:spPr>
+          <a:xfrm>
+            <a:off x="3367078" y="2551602"/>
+            <a:ext cx="516136" cy="144661"/>
+          </a:xfrm>
+          <a:prstGeom prst="rect">
+            <a:avLst/>
+          </a:prstGeom>
+          <a:solidFill>
+            <a:srgbClr val="212529"/>
+          </a:solidFill>
+          <a:ln/>
+        </p:spPr>
+      </p:sp>
+      <p:sp>
+        <p:nvSpPr>
+          <p:cNvPr id="17" name="Text 12"/>
+          <p:cNvSpPr/>
+          <p:nvPr/>
+        </p:nvSpPr>
+        <p:spPr>
+          <a:xfrm>
+            <a:off x="3367078" y="2551602"/>
+            <a:ext cx="516136" cy="144661"/>
+          </a:xfrm>
+          <a:prstGeom prst="rect">
+            <a:avLst/>
+          </a:prstGeom>
+          <a:noFill/>
+          <a:ln/>
+        </p:spPr>
+        <p:txBody>
+          <a:bodyPr wrap="none" lIns="68072" tIns="17018" rIns="68072" bIns="17018" rtlCol="0" anchor="t">
+            <a:spAutoFit/>
+          </a:bodyPr>
+          <a:lstStyle/>
+          <a:p>
+            <a:pPr algn="l" indent="0" marL="0">
+              <a:buNone/>
+            </a:pPr>
+            <a:r>
+              <a:rPr lang="en-US" sz="600" b="1" dirty="0">
+                <a:solidFill>
+                  <a:srgbClr val="F8F9FA"/>
+                </a:solidFill>
+                <a:latin typeface="Open Sans Bold" pitchFamily="34" charset="0"/>
+                <a:ea typeface="Open Sans Bold" pitchFamily="34" charset="-122"/>
+                <a:cs typeface="Open Sans Bold" pitchFamily="34" charset="-120"/>
+              </a:rPr>
+              <a:t>BAGGING</a:t>
+            </a:r>
+            <a:endParaRPr lang="en-US" sz="600" dirty="0"/>
+          </a:p>
+        </p:txBody>
+      </p:sp>
+      <p:sp>
+        <p:nvSpPr>
+          <p:cNvPr id="18" name="Text 13"/>
+          <p:cNvSpPr/>
+          <p:nvPr/>
+        </p:nvSpPr>
+        <p:spPr>
+          <a:xfrm>
+            <a:off x="3367078" y="2781988"/>
+            <a:ext cx="2538403" cy="175022"/>
+          </a:xfrm>
+          <a:prstGeom prst="rect">
+            <a:avLst/>
+          </a:prstGeom>
+          <a:noFill/>
+          <a:ln/>
+        </p:spPr>
+        <p:txBody>
+          <a:bodyPr wrap="square" lIns="0" tIns="0" rIns="0" bIns="0" rtlCol="0" anchor="t">
+            <a:spAutoFit/>
+          </a:bodyPr>
+          <a:lstStyle/>
+          <a:p>
+            <a:pPr algn="l" indent="0" marL="0">
+              <a:buNone/>
+            </a:pPr>
+            <a:r>
+              <a:rPr lang="en-US" sz="900" b="1" dirty="0">
+                <a:solidFill>
+                  <a:srgbClr val="212529"/>
+                </a:solidFill>
+                <a:latin typeface="Open Sans Bold" pitchFamily="34" charset="0"/>
+                <a:ea typeface="Open Sans Bold" pitchFamily="34" charset="-122"/>
+                <a:cs typeface="Open Sans Bold" pitchFamily="34" charset="-120"/>
+              </a:rPr>
+              <a:t>XGBoost &amp; LightGBM</a:t>
+            </a:r>
+            <a:endParaRPr lang="en-US" sz="900" dirty="0"/>
+          </a:p>
+        </p:txBody>
+      </p:sp>
+      <p:sp>
+        <p:nvSpPr>
+          <p:cNvPr id="19" name="Text 14"/>
+          <p:cNvSpPr/>
+          <p:nvPr/>
+        </p:nvSpPr>
+        <p:spPr>
+          <a:xfrm>
+            <a:off x="3367078" y="2985585"/>
+            <a:ext cx="2538403" cy="321469"/>
+          </a:xfrm>
+          <a:prstGeom prst="rect">
+            <a:avLst/>
+          </a:prstGeom>
+          <a:noFill/>
+          <a:ln/>
+        </p:spPr>
+        <p:txBody>
+          <a:bodyPr wrap="square" lIns="0" tIns="0" rIns="0" bIns="0" rtlCol="0" anchor="t">
+            <a:spAutoFit/>
+          </a:bodyPr>
+          <a:lstStyle/>
+          <a:p>
+            <a:pPr algn="l" indent="0" marL="0">
+              <a:lnSpc>
+                <a:spcPct val="120000"/>
+              </a:lnSpc>
+              <a:buNone/>
+            </a:pPr>
+            <a:r>
+              <a:rPr lang="en-US" sz="800" dirty="0">
+                <a:solidFill>
+                  <a:srgbClr val="495057"/>
+                </a:solidFill>
+                <a:latin typeface="Open Sans Light" pitchFamily="34" charset="0"/>
+                <a:ea typeface="Open Sans Light" pitchFamily="34" charset="-122"/>
+                <a:cs typeface="Open Sans Light" pitchFamily="34" charset="-120"/>
+              </a:rPr>
+              <a:t>이전 모델의 오차를 보완하며 학습하는 부스팅 기법으로 최상의 성능을 도출합니다.</a:t>
+            </a:r>
+            <a:endParaRPr lang="en-US" sz="800" dirty="0"/>
+          </a:p>
+        </p:txBody>
+      </p:sp>
+      <p:sp>
+        <p:nvSpPr>
+          <p:cNvPr id="20" name="Shape 15"/>
+          <p:cNvSpPr/>
+          <p:nvPr/>
+        </p:nvSpPr>
+        <p:spPr>
+          <a:xfrm>
+            <a:off x="3367078" y="3335629"/>
+            <a:ext cx="564356" cy="144661"/>
+          </a:xfrm>
+          <a:prstGeom prst="rect">
+            <a:avLst/>
+          </a:prstGeom>
+          <a:solidFill>
+            <a:srgbClr val="212529"/>
+          </a:solidFill>
+          <a:ln/>
+        </p:spPr>
+      </p:sp>
+      <p:sp>
+        <p:nvSpPr>
+          <p:cNvPr id="21" name="Text 16"/>
+          <p:cNvSpPr/>
+          <p:nvPr/>
+        </p:nvSpPr>
+        <p:spPr>
+          <a:xfrm>
+            <a:off x="3367078" y="3335629"/>
+            <a:ext cx="564356" cy="144661"/>
+          </a:xfrm>
+          <a:prstGeom prst="rect">
+            <a:avLst/>
+          </a:prstGeom>
+          <a:noFill/>
+          <a:ln/>
+        </p:spPr>
+        <p:txBody>
+          <a:bodyPr wrap="none" lIns="68072" tIns="17018" rIns="68072" bIns="17018" rtlCol="0" anchor="t">
+            <a:spAutoFit/>
+          </a:bodyPr>
+          <a:lstStyle/>
+          <a:p>
+            <a:pPr algn="l" indent="0" marL="0">
+              <a:buNone/>
+            </a:pPr>
+            <a:r>
+              <a:rPr lang="en-US" sz="600" b="1" dirty="0">
+                <a:solidFill>
+                  <a:srgbClr val="F8F9FA"/>
+                </a:solidFill>
+                <a:latin typeface="Open Sans Bold" pitchFamily="34" charset="0"/>
+                <a:ea typeface="Open Sans Bold" pitchFamily="34" charset="-122"/>
+                <a:cs typeface="Open Sans Bold" pitchFamily="34" charset="-120"/>
+              </a:rPr>
+              <a:t>BOOSTING</a:t>
+            </a:r>
+            <a:endParaRPr lang="en-US" sz="600" dirty="0"/>
+          </a:p>
+        </p:txBody>
+      </p:sp>
+      <p:pic>
+        <p:nvPicPr>
+          <p:cNvPr id="22" name="Image 3" descr="preencoded.png">    </p:cNvPr>
+          <p:cNvPicPr>
+            <a:picLocks noChangeAspect="1"/>
+          </p:cNvPicPr>
+          <p:nvPr/>
+        </p:nvPicPr>
+        <p:blipFill>
+          <a:blip r:embed="rId4"/>
+          <a:stretch>
+            <a:fillRect/>
+          </a:stretch>
+        </p:blipFill>
+        <p:spPr>
+          <a:xfrm>
+            <a:off x="6176944" y="1690781"/>
+            <a:ext cx="171450" cy="171450"/>
+          </a:xfrm>
+          <a:prstGeom prst="rect">
+            <a:avLst/>
+          </a:prstGeom>
+        </p:spPr>
+      </p:pic>
+      <p:sp>
+        <p:nvSpPr>
+          <p:cNvPr id="23" name="Text 17"/>
+          <p:cNvSpPr/>
+          <p:nvPr/>
+        </p:nvSpPr>
+        <p:spPr>
+          <a:xfrm>
+            <a:off x="6434119" y="1660420"/>
+            <a:ext cx="905470" cy="232172"/>
+          </a:xfrm>
+          <a:prstGeom prst="rect">
+            <a:avLst/>
+          </a:prstGeom>
+          <a:noFill/>
+          <a:ln/>
+        </p:spPr>
+        <p:txBody>
+          <a:bodyPr wrap="none" lIns="0" tIns="0" rIns="0" bIns="0" rtlCol="0" anchor="t">
+            <a:spAutoFit/>
+          </a:bodyPr>
+          <a:lstStyle/>
+          <a:p>
+            <a:pPr algn="l" indent="0" marL="0">
+              <a:buNone/>
+            </a:pPr>
+            <a:r>
+              <a:rPr lang="en-US" sz="1200" b="1" dirty="0">
+                <a:solidFill>
+                  <a:srgbClr val="212529"/>
+                </a:solidFill>
+                <a:latin typeface="Montserrat Bold" pitchFamily="34" charset="0"/>
+                <a:ea typeface="Montserrat Bold" pitchFamily="34" charset="-122"/>
+                <a:cs typeface="Montserrat Bold" pitchFamily="34" charset="-120"/>
+              </a:rPr>
+              <a:t>딥러닝 모델</a:t>
+            </a:r>
+            <a:endParaRPr lang="en-US" sz="1200" dirty="0"/>
+          </a:p>
+        </p:txBody>
+      </p:sp>
+      <p:sp>
+        <p:nvSpPr>
+          <p:cNvPr id="24" name="Text 18"/>
+          <p:cNvSpPr/>
+          <p:nvPr/>
+        </p:nvSpPr>
+        <p:spPr>
+          <a:xfrm>
+            <a:off x="6176944" y="1992604"/>
+            <a:ext cx="2538431" cy="180380"/>
+          </a:xfrm>
+          <a:prstGeom prst="rect">
+            <a:avLst/>
+          </a:prstGeom>
+          <a:noFill/>
+          <a:ln/>
+        </p:spPr>
+        <p:txBody>
+          <a:bodyPr wrap="square" lIns="0" tIns="0" rIns="0" bIns="0" rtlCol="0" anchor="t">
+            <a:spAutoFit/>
+          </a:bodyPr>
+          <a:lstStyle/>
+          <a:p>
+            <a:pPr algn="l" indent="0" marL="0">
+              <a:buNone/>
+            </a:pPr>
+            <a:r>
+              <a:rPr lang="en-US" sz="900" b="1" dirty="0">
+                <a:solidFill>
+                  <a:srgbClr val="212529"/>
+                </a:solidFill>
+                <a:latin typeface="Open Sans Bold" pitchFamily="34" charset="0"/>
+                <a:ea typeface="Open Sans Bold" pitchFamily="34" charset="-122"/>
+                <a:cs typeface="Open Sans Bold" pitchFamily="34" charset="-120"/>
+              </a:rPr>
+              <a:t>다층 퍼셉트론 (MLP)</a:t>
+            </a:r>
+            <a:endParaRPr lang="en-US" sz="900" dirty="0"/>
+          </a:p>
+        </p:txBody>
+      </p:sp>
+      <p:sp>
+        <p:nvSpPr>
+          <p:cNvPr id="25" name="Text 19"/>
+          <p:cNvSpPr/>
+          <p:nvPr/>
+        </p:nvSpPr>
+        <p:spPr>
+          <a:xfrm>
+            <a:off x="6176944" y="2201559"/>
+            <a:ext cx="2538431" cy="321469"/>
+          </a:xfrm>
+          <a:prstGeom prst="rect">
+            <a:avLst/>
+          </a:prstGeom>
+          <a:noFill/>
+          <a:ln/>
+        </p:spPr>
+        <p:txBody>
+          <a:bodyPr wrap="square" lIns="0" tIns="0" rIns="0" bIns="0" rtlCol="0" anchor="t">
+            <a:spAutoFit/>
+          </a:bodyPr>
+          <a:lstStyle/>
+          <a:p>
+            <a:pPr algn="l" indent="0" marL="0">
+              <a:lnSpc>
+                <a:spcPct val="120000"/>
+              </a:lnSpc>
+              <a:buNone/>
+            </a:pPr>
+            <a:r>
+              <a:rPr lang="en-US" sz="800" dirty="0">
+                <a:solidFill>
+                  <a:srgbClr val="495057"/>
+                </a:solidFill>
+                <a:latin typeface="Open Sans Light" pitchFamily="34" charset="0"/>
+                <a:ea typeface="Open Sans Light" pitchFamily="34" charset="-122"/>
+                <a:cs typeface="Open Sans Light" pitchFamily="34" charset="-120"/>
+              </a:rPr>
+              <a:t>30개의 피처를 입력받아 복잡한 비선형 관계를 학습하는 신경망 구조를 설계합니다.</a:t>
+            </a:r>
+            <a:endParaRPr lang="en-US" sz="800" dirty="0"/>
+          </a:p>
+        </p:txBody>
+      </p:sp>
+      <p:sp>
+        <p:nvSpPr>
+          <p:cNvPr id="26" name="Text 20"/>
+          <p:cNvSpPr/>
+          <p:nvPr/>
+        </p:nvSpPr>
+        <p:spPr>
+          <a:xfrm>
+            <a:off x="6176944" y="2608752"/>
+            <a:ext cx="2538431" cy="180380"/>
+          </a:xfrm>
+          <a:prstGeom prst="rect">
+            <a:avLst/>
+          </a:prstGeom>
+          <a:noFill/>
+          <a:ln/>
+        </p:spPr>
+        <p:txBody>
+          <a:bodyPr wrap="square" lIns="0" tIns="0" rIns="0" bIns="0" rtlCol="0" anchor="t">
+            <a:spAutoFit/>
+          </a:bodyPr>
+          <a:lstStyle/>
+          <a:p>
+            <a:pPr algn="l" indent="0" marL="0">
+              <a:buNone/>
+            </a:pPr>
+            <a:r>
+              <a:rPr lang="en-US" sz="900" b="1" dirty="0">
+                <a:solidFill>
+                  <a:srgbClr val="212529"/>
+                </a:solidFill>
+                <a:latin typeface="Open Sans Bold" pitchFamily="34" charset="0"/>
+                <a:ea typeface="Open Sans Bold" pitchFamily="34" charset="-122"/>
+                <a:cs typeface="Open Sans Bold" pitchFamily="34" charset="-120"/>
+              </a:rPr>
+              <a:t>학습 최적화 전략</a:t>
+            </a:r>
+            <a:endParaRPr lang="en-US" sz="900" dirty="0"/>
+          </a:p>
+        </p:txBody>
+      </p:sp>
+      <p:sp>
+        <p:nvSpPr>
+          <p:cNvPr id="27" name="Text 21"/>
+          <p:cNvSpPr/>
+          <p:nvPr/>
+        </p:nvSpPr>
+        <p:spPr>
+          <a:xfrm>
+            <a:off x="6176944" y="2817707"/>
+            <a:ext cx="2538431" cy="321469"/>
+          </a:xfrm>
+          <a:prstGeom prst="rect">
+            <a:avLst/>
+          </a:prstGeom>
+          <a:noFill/>
+          <a:ln/>
+        </p:spPr>
+        <p:txBody>
+          <a:bodyPr wrap="square" lIns="0" tIns="0" rIns="0" bIns="0" rtlCol="0" anchor="t">
+            <a:spAutoFit/>
+          </a:bodyPr>
+          <a:lstStyle/>
+          <a:p>
+            <a:pPr algn="l" indent="0" marL="0">
+              <a:lnSpc>
+                <a:spcPct val="120000"/>
+              </a:lnSpc>
+              <a:buNone/>
+            </a:pPr>
+            <a:r>
+              <a:rPr lang="en-US" sz="800" dirty="0">
+                <a:solidFill>
+                  <a:srgbClr val="495057"/>
+                </a:solidFill>
+                <a:latin typeface="Open Sans Light" pitchFamily="34" charset="0"/>
+                <a:ea typeface="Open Sans Light" pitchFamily="34" charset="-122"/>
+                <a:cs typeface="Open Sans Light" pitchFamily="34" charset="-120"/>
+              </a:rPr>
+              <a:t>Early Stopping 기법을 적용하여 검증 성능이 정체될 때 학습을 조기 종료, 과적합을 방지합니다.</a:t>
+            </a:r>
+            <a:endParaRPr lang="en-US" sz="800" dirty="0"/>
+          </a:p>
+        </p:txBody>
+      </p:sp>
     </p:spTree>
   </p:cSld>
   <p:clrMapOvr>
@@ -2366,30 +6827,615 @@
           </a:prstGeom>
         </p:spPr>
       </p:pic>
-      <p:pic>
-        <p:nvPicPr>
-          <p:cNvPr id="3" name="Image 1" descr="preencoded.png">    </p:cNvPr>
-          <p:cNvPicPr>
-            <a:picLocks noChangeAspect="1"/>
-          </p:cNvPicPr>
-          <p:nvPr/>
-        </p:nvPicPr>
-        <p:blipFill>
-          <a:blip r:embed="rId2"/>
-          <a:stretch>
-            <a:fillRect/>
-          </a:stretch>
-        </p:blipFill>
-        <p:spPr>
-          <a:xfrm>
-            <a:off x="0" y="0"/>
-            <a:ext cx="9144000" cy="5143500"/>
-          </a:xfrm>
-          <a:prstGeom prst="rect">
-            <a:avLst/>
-          </a:prstGeom>
-        </p:spPr>
-      </p:pic>
+      <p:sp>
+        <p:nvSpPr>
+          <p:cNvPr id="3" name="Text 0"/>
+          <p:cNvSpPr/>
+          <p:nvPr/>
+        </p:nvSpPr>
+        <p:spPr>
+          <a:xfrm>
+            <a:off x="571500" y="713231"/>
+            <a:ext cx="8572500" cy="462558"/>
+          </a:xfrm>
+          <a:prstGeom prst="rect">
+            <a:avLst/>
+          </a:prstGeom>
+          <a:noFill/>
+          <a:ln/>
+        </p:spPr>
+        <p:txBody>
+          <a:bodyPr wrap="square" lIns="170053" tIns="0" rIns="0" bIns="0" rtlCol="0" anchor="t">
+            <a:spAutoFit/>
+          </a:bodyPr>
+          <a:lstStyle/>
+          <a:p>
+            <a:pPr algn="l" indent="0" marL="0">
+              <a:buNone/>
+            </a:pPr>
+            <a:r>
+              <a:rPr lang="en-US" sz="2450" b="1" dirty="0">
+                <a:solidFill>
+                  <a:srgbClr val="212529"/>
+                </a:solidFill>
+                <a:latin typeface="Montserrat Bold" pitchFamily="34" charset="0"/>
+                <a:ea typeface="Montserrat Bold" pitchFamily="34" charset="-122"/>
+                <a:cs typeface="Montserrat Bold" pitchFamily="34" charset="-120"/>
+              </a:rPr>
+              <a:t>모델별 맞춤형 학습 전략의 필요성</a:t>
+            </a:r>
+            <a:endParaRPr lang="en-US" sz="2450" dirty="0"/>
+          </a:p>
+        </p:txBody>
+      </p:sp>
+      <p:sp>
+        <p:nvSpPr>
+          <p:cNvPr id="4" name="Shape 1"/>
+          <p:cNvSpPr/>
+          <p:nvPr/>
+        </p:nvSpPr>
+        <p:spPr>
+          <a:xfrm>
+            <a:off x="571500" y="1688995"/>
+            <a:ext cx="3886200" cy="2286000"/>
+          </a:xfrm>
+          <a:prstGeom prst="rect">
+            <a:avLst/>
+          </a:prstGeom>
+          <a:solidFill>
+            <a:srgbClr val="FFFFFF"/>
+          </a:solidFill>
+          <a:ln/>
+        </p:spPr>
+      </p:sp>
+      <p:sp>
+        <p:nvSpPr>
+          <p:cNvPr id="5" name="Shape 2"/>
+          <p:cNvSpPr/>
+          <p:nvPr/>
+        </p:nvSpPr>
+        <p:spPr>
+          <a:xfrm>
+            <a:off x="571500" y="1688995"/>
+            <a:ext cx="14288" cy="2286000"/>
+          </a:xfrm>
+          <a:prstGeom prst="rect">
+            <a:avLst/>
+          </a:prstGeom>
+          <a:solidFill>
+            <a:srgbClr val="087F5B"/>
+          </a:solidFill>
+          <a:ln/>
+        </p:spPr>
+      </p:sp>
+      <p:sp>
+        <p:nvSpPr>
+          <p:cNvPr id="6" name="Text 3"/>
+          <p:cNvSpPr/>
+          <p:nvPr/>
+        </p:nvSpPr>
+        <p:spPr>
+          <a:xfrm>
+            <a:off x="750094" y="1831870"/>
+            <a:ext cx="3529013" cy="121444"/>
+          </a:xfrm>
+          <a:prstGeom prst="rect">
+            <a:avLst/>
+          </a:prstGeom>
+          <a:noFill/>
+          <a:ln/>
+        </p:spPr>
+        <p:txBody>
+          <a:bodyPr wrap="square" lIns="0" tIns="0" rIns="0" bIns="0" rtlCol="0" anchor="t">
+            <a:spAutoFit/>
+          </a:bodyPr>
+          <a:lstStyle/>
+          <a:p>
+            <a:pPr algn="l" indent="0" marL="0">
+              <a:buNone/>
+            </a:pPr>
+            <a:r>
+              <a:rPr lang="en-US" sz="700" b="1" dirty="0">
+                <a:solidFill>
+                  <a:srgbClr val="087F5B">
+                    <a:alpha val="80000"/>
+                  </a:srgbClr>
+                </a:solidFill>
+                <a:latin typeface="Montserrat Bold" pitchFamily="34" charset="0"/>
+                <a:ea typeface="Montserrat Bold" pitchFamily="34" charset="-122"/>
+                <a:cs typeface="Montserrat Bold" pitchFamily="34" charset="-120"/>
+              </a:rPr>
+              <a:t>GROUP A</a:t>
+            </a:r>
+            <a:endParaRPr lang="en-US" sz="700" dirty="0"/>
+          </a:p>
+        </p:txBody>
+      </p:sp>
+      <p:sp>
+        <p:nvSpPr>
+          <p:cNvPr id="7" name="Text 4"/>
+          <p:cNvSpPr/>
+          <p:nvPr/>
+        </p:nvSpPr>
+        <p:spPr>
+          <a:xfrm>
+            <a:off x="750094" y="2060470"/>
+            <a:ext cx="3529013" cy="232172"/>
+          </a:xfrm>
+          <a:prstGeom prst="rect">
+            <a:avLst/>
+          </a:prstGeom>
+          <a:noFill/>
+          <a:ln/>
+        </p:spPr>
+        <p:txBody>
+          <a:bodyPr wrap="square" lIns="0" tIns="0" rIns="0" bIns="0" rtlCol="0" anchor="t">
+            <a:spAutoFit/>
+          </a:bodyPr>
+          <a:lstStyle/>
+          <a:p>
+            <a:pPr algn="l" indent="0" marL="0">
+              <a:buNone/>
+            </a:pPr>
+            <a:r>
+              <a:rPr lang="en-US" sz="1200" b="1" dirty="0">
+                <a:solidFill>
+                  <a:srgbClr val="212529"/>
+                </a:solidFill>
+                <a:latin typeface="Montserrat Bold" pitchFamily="34" charset="0"/>
+                <a:ea typeface="Montserrat Bold" pitchFamily="34" charset="-122"/>
+                <a:cs typeface="Montserrat Bold" pitchFamily="34" charset="-120"/>
+              </a:rPr>
+              <a:t>SMOTE 증강 데이터 활용</a:t>
+            </a:r>
+            <a:endParaRPr lang="en-US" sz="1200" dirty="0"/>
+          </a:p>
+        </p:txBody>
+      </p:sp>
+      <p:sp>
+        <p:nvSpPr>
+          <p:cNvPr id="8" name="Text 5"/>
+          <p:cNvSpPr/>
+          <p:nvPr/>
+        </p:nvSpPr>
+        <p:spPr>
+          <a:xfrm>
+            <a:off x="750094" y="2435516"/>
+            <a:ext cx="3529013" cy="365727"/>
+          </a:xfrm>
+          <a:prstGeom prst="rect">
+            <a:avLst/>
+          </a:prstGeom>
+          <a:noFill/>
+          <a:ln/>
+        </p:spPr>
+        <p:txBody>
+          <a:bodyPr wrap="square" lIns="0" tIns="0" rIns="0" bIns="0" rtlCol="0" anchor="t">
+            <a:spAutoFit/>
+          </a:bodyPr>
+          <a:lstStyle/>
+          <a:p>
+            <a:pPr algn="l" indent="0" marL="0">
+              <a:lnSpc>
+                <a:spcPct val="128000"/>
+              </a:lnSpc>
+              <a:buNone/>
+            </a:pPr>
+            <a:r>
+              <a:rPr lang="en-US" sz="850" dirty="0">
+                <a:solidFill>
+                  <a:srgbClr val="495057"/>
+                </a:solidFill>
+                <a:latin typeface="Open Sans Light" pitchFamily="34" charset="0"/>
+                <a:ea typeface="Open Sans Light" pitchFamily="34" charset="-122"/>
+                <a:cs typeface="Open Sans Light" pitchFamily="34" charset="-120"/>
+              </a:rPr>
+              <a:t>대용량 데이터 처리에 효율적인 모델들은 SMOTE로 증강된 45만 건의 데이터를 학습하여 희소한 사기 패턴을 더 정밀하게 학습합니다.</a:t>
+            </a:r>
+            <a:endParaRPr lang="en-US" sz="850" dirty="0"/>
+          </a:p>
+        </p:txBody>
+      </p:sp>
+      <p:sp>
+        <p:nvSpPr>
+          <p:cNvPr id="9" name="Text 6"/>
+          <p:cNvSpPr/>
+          <p:nvPr/>
+        </p:nvSpPr>
+        <p:spPr>
+          <a:xfrm>
+            <a:off x="750094" y="2908399"/>
+            <a:ext cx="3529013" cy="303609"/>
+          </a:xfrm>
+          <a:prstGeom prst="rect">
+            <a:avLst/>
+          </a:prstGeom>
+          <a:noFill/>
+          <a:ln/>
+        </p:spPr>
+        <p:txBody>
+          <a:bodyPr wrap="square" lIns="0" tIns="0" rIns="0" bIns="0" rtlCol="0" anchor="t">
+            <a:spAutoFit/>
+          </a:bodyPr>
+          <a:lstStyle/>
+          <a:p>
+            <a:pPr algn="l" indent="0" marL="0">
+              <a:buNone/>
+            </a:pPr>
+            <a:r>
+              <a:rPr lang="en-US" sz="750" b="1" dirty="0">
+                <a:solidFill>
+                  <a:srgbClr val="087F5B"/>
+                </a:solidFill>
+                <a:latin typeface="Open Sans Bold" pitchFamily="34" charset="0"/>
+                <a:ea typeface="Open Sans Bold" pitchFamily="34" charset="-122"/>
+                <a:cs typeface="Open Sans Bold" pitchFamily="34" charset="-120"/>
+              </a:rPr>
+              <a:t>로지스틱 회귀, 결정 트리, 랜덤 포레스트,</a:t>
+            </a:r>
+            <a:r>
+              <a:rPr lang="en-US" sz="750" b="1" dirty="0">
+                <a:solidFill>
+                  <a:srgbClr val="087F5B"/>
+                </a:solidFill>
+                <a:latin typeface="Open Sans Bold" pitchFamily="34" charset="0"/>
+                <a:ea typeface="Open Sans Bold" pitchFamily="34" charset="-122"/>
+                <a:cs typeface="Open Sans Bold" pitchFamily="34" charset="-120"/>
+              </a:rPr>
+              <a:t>
+</a:t>
+            </a:r>
+            <a:r>
+              <a:rPr lang="en-US" sz="750" b="1" dirty="0">
+                <a:solidFill>
+                  <a:srgbClr val="087F5B"/>
+                </a:solidFill>
+                <a:latin typeface="Open Sans Bold" pitchFamily="34" charset="0"/>
+                <a:ea typeface="Open Sans Bold" pitchFamily="34" charset="-122"/>
+                <a:cs typeface="Open Sans Bold" pitchFamily="34" charset="-120"/>
+              </a:rPr>
+              <a:t>XGBoost, LightGBM, 신경망(MLP)</a:t>
+            </a:r>
+            <a:endParaRPr lang="en-US" sz="750" dirty="0"/>
+          </a:p>
+        </p:txBody>
+      </p:sp>
+      <p:sp>
+        <p:nvSpPr>
+          <p:cNvPr id="10" name="Shape 7"/>
+          <p:cNvSpPr/>
+          <p:nvPr/>
+        </p:nvSpPr>
+        <p:spPr>
+          <a:xfrm>
+            <a:off x="4686300" y="1688995"/>
+            <a:ext cx="3886200" cy="2286000"/>
+          </a:xfrm>
+          <a:prstGeom prst="rect">
+            <a:avLst/>
+          </a:prstGeom>
+          <a:solidFill>
+            <a:srgbClr val="212529"/>
+          </a:solidFill>
+          <a:ln/>
+        </p:spPr>
+      </p:sp>
+      <p:sp>
+        <p:nvSpPr>
+          <p:cNvPr id="11" name="Shape 8"/>
+          <p:cNvSpPr/>
+          <p:nvPr/>
+        </p:nvSpPr>
+        <p:spPr>
+          <a:xfrm>
+            <a:off x="4686300" y="1688995"/>
+            <a:ext cx="14288" cy="2286000"/>
+          </a:xfrm>
+          <a:prstGeom prst="rect">
+            <a:avLst/>
+          </a:prstGeom>
+          <a:solidFill>
+            <a:srgbClr val="495057"/>
+          </a:solidFill>
+          <a:ln/>
+        </p:spPr>
+      </p:sp>
+      <p:sp>
+        <p:nvSpPr>
+          <p:cNvPr id="12" name="Text 9"/>
+          <p:cNvSpPr/>
+          <p:nvPr/>
+        </p:nvSpPr>
+        <p:spPr>
+          <a:xfrm>
+            <a:off x="4864894" y="1831870"/>
+            <a:ext cx="3529013" cy="121444"/>
+          </a:xfrm>
+          <a:prstGeom prst="rect">
+            <a:avLst/>
+          </a:prstGeom>
+          <a:noFill/>
+          <a:ln/>
+        </p:spPr>
+        <p:txBody>
+          <a:bodyPr wrap="square" lIns="0" tIns="0" rIns="0" bIns="0" rtlCol="0" anchor="t">
+            <a:spAutoFit/>
+          </a:bodyPr>
+          <a:lstStyle/>
+          <a:p>
+            <a:pPr algn="l" indent="0" marL="0">
+              <a:buNone/>
+            </a:pPr>
+            <a:r>
+              <a:rPr lang="en-US" sz="700" b="1" dirty="0">
+                <a:solidFill>
+                  <a:srgbClr val="F8F9FA">
+                    <a:alpha val="80000"/>
+                  </a:srgbClr>
+                </a:solidFill>
+                <a:latin typeface="Montserrat Bold" pitchFamily="34" charset="0"/>
+                <a:ea typeface="Montserrat Bold" pitchFamily="34" charset="-122"/>
+                <a:cs typeface="Montserrat Bold" pitchFamily="34" charset="-120"/>
+              </a:rPr>
+              <a:t>GROUP B</a:t>
+            </a:r>
+            <a:endParaRPr lang="en-US" sz="700" dirty="0"/>
+          </a:p>
+        </p:txBody>
+      </p:sp>
+      <p:sp>
+        <p:nvSpPr>
+          <p:cNvPr id="13" name="Text 10"/>
+          <p:cNvSpPr/>
+          <p:nvPr/>
+        </p:nvSpPr>
+        <p:spPr>
+          <a:xfrm>
+            <a:off x="4864894" y="2060470"/>
+            <a:ext cx="3529013" cy="232172"/>
+          </a:xfrm>
+          <a:prstGeom prst="rect">
+            <a:avLst/>
+          </a:prstGeom>
+          <a:noFill/>
+          <a:ln/>
+        </p:spPr>
+        <p:txBody>
+          <a:bodyPr wrap="square" lIns="0" tIns="0" rIns="0" bIns="0" rtlCol="0" anchor="t">
+            <a:spAutoFit/>
+          </a:bodyPr>
+          <a:lstStyle/>
+          <a:p>
+            <a:pPr algn="l" indent="0" marL="0">
+              <a:buNone/>
+            </a:pPr>
+            <a:r>
+              <a:rPr lang="en-US" sz="1200" b="1" dirty="0">
+                <a:solidFill>
+                  <a:srgbClr val="F8F9FA"/>
+                </a:solidFill>
+                <a:latin typeface="Montserrat Bold" pitchFamily="34" charset="0"/>
+                <a:ea typeface="Montserrat Bold" pitchFamily="34" charset="-122"/>
+                <a:cs typeface="Montserrat Bold" pitchFamily="34" charset="-120"/>
+              </a:rPr>
+              <a:t>원본 데이터 및 샘플링 활용</a:t>
+            </a:r>
+            <a:endParaRPr lang="en-US" sz="1200" dirty="0"/>
+          </a:p>
+        </p:txBody>
+      </p:sp>
+      <p:sp>
+        <p:nvSpPr>
+          <p:cNvPr id="14" name="Text 11"/>
+          <p:cNvSpPr/>
+          <p:nvPr/>
+        </p:nvSpPr>
+        <p:spPr>
+          <a:xfrm>
+            <a:off x="4864894" y="2435516"/>
+            <a:ext cx="3529013" cy="365727"/>
+          </a:xfrm>
+          <a:prstGeom prst="rect">
+            <a:avLst/>
+          </a:prstGeom>
+          <a:noFill/>
+          <a:ln/>
+        </p:spPr>
+        <p:txBody>
+          <a:bodyPr wrap="square" lIns="0" tIns="0" rIns="0" bIns="0" rtlCol="0" anchor="t">
+            <a:spAutoFit/>
+          </a:bodyPr>
+          <a:lstStyle/>
+          <a:p>
+            <a:pPr algn="l" indent="0" marL="0">
+              <a:lnSpc>
+                <a:spcPct val="128000"/>
+              </a:lnSpc>
+              <a:buNone/>
+            </a:pPr>
+            <a:r>
+              <a:rPr lang="en-US" sz="850" dirty="0">
+                <a:solidFill>
+                  <a:srgbClr val="F8F9FA"/>
+                </a:solidFill>
+                <a:latin typeface="Open Sans Light" pitchFamily="34" charset="0"/>
+                <a:ea typeface="Open Sans Light" pitchFamily="34" charset="-122"/>
+                <a:cs typeface="Open Sans Light" pitchFamily="34" charset="-120"/>
+              </a:rPr>
+              <a:t>연산 복잡도가 높거나 데이터 증강 시 성능 왜곡이 우려되는 모델들은 원본 비율을 유지하거나 적절한 샘플링 전략을 병행합니다.</a:t>
+            </a:r>
+            <a:endParaRPr lang="en-US" sz="850" dirty="0"/>
+          </a:p>
+        </p:txBody>
+      </p:sp>
+      <p:sp>
+        <p:nvSpPr>
+          <p:cNvPr id="15" name="Text 12"/>
+          <p:cNvSpPr/>
+          <p:nvPr/>
+        </p:nvSpPr>
+        <p:spPr>
+          <a:xfrm>
+            <a:off x="4864894" y="2908399"/>
+            <a:ext cx="3529013" cy="303609"/>
+          </a:xfrm>
+          <a:prstGeom prst="rect">
+            <a:avLst/>
+          </a:prstGeom>
+          <a:noFill/>
+          <a:ln/>
+        </p:spPr>
+        <p:txBody>
+          <a:bodyPr wrap="square" lIns="0" tIns="0" rIns="0" bIns="0" rtlCol="0" anchor="t">
+            <a:spAutoFit/>
+          </a:bodyPr>
+          <a:lstStyle/>
+          <a:p>
+            <a:pPr algn="l" indent="0" marL="0">
+              <a:buNone/>
+            </a:pPr>
+            <a:r>
+              <a:rPr lang="en-US" sz="750" b="1" dirty="0">
+                <a:solidFill>
+                  <a:srgbClr val="F8F9FA"/>
+                </a:solidFill>
+                <a:latin typeface="Open Sans Bold" pitchFamily="34" charset="0"/>
+                <a:ea typeface="Open Sans Bold" pitchFamily="34" charset="-122"/>
+                <a:cs typeface="Open Sans Bold" pitchFamily="34" charset="-120"/>
+              </a:rPr>
+              <a:t>KNN (속도 저하 방지), SVM (연산 복잡도 고려),</a:t>
+            </a:r>
+            <a:r>
+              <a:rPr lang="en-US" sz="750" b="1" dirty="0">
+                <a:solidFill>
+                  <a:srgbClr val="F8F9FA"/>
+                </a:solidFill>
+                <a:latin typeface="Open Sans Bold" pitchFamily="34" charset="0"/>
+                <a:ea typeface="Open Sans Bold" pitchFamily="34" charset="-122"/>
+                <a:cs typeface="Open Sans Bold" pitchFamily="34" charset="-120"/>
+              </a:rPr>
+              <a:t>
+</a:t>
+            </a:r>
+            <a:r>
+              <a:rPr lang="en-US" sz="750" b="1" dirty="0">
+                <a:solidFill>
+                  <a:srgbClr val="F8F9FA"/>
+                </a:solidFill>
+                <a:latin typeface="Open Sans Bold" pitchFamily="34" charset="0"/>
+                <a:ea typeface="Open Sans Bold" pitchFamily="34" charset="-122"/>
+                <a:cs typeface="Open Sans Bold" pitchFamily="34" charset="-120"/>
+              </a:rPr>
+              <a:t>나이브 베이즈 (독립 가정 유지)</a:t>
+            </a:r>
+            <a:endParaRPr lang="en-US" sz="750" dirty="0"/>
+          </a:p>
+        </p:txBody>
+      </p:sp>
+      <p:sp>
+        <p:nvSpPr>
+          <p:cNvPr id="16" name="Text 13"/>
+          <p:cNvSpPr/>
+          <p:nvPr/>
+        </p:nvSpPr>
+        <p:spPr>
+          <a:xfrm>
+            <a:off x="571500" y="4496488"/>
+            <a:ext cx="1837730" cy="171450"/>
+          </a:xfrm>
+          <a:prstGeom prst="rect">
+            <a:avLst/>
+          </a:prstGeom>
+          <a:noFill/>
+          <a:ln/>
+        </p:spPr>
+        <p:txBody>
+          <a:bodyPr wrap="square" lIns="0" tIns="0" rIns="0" bIns="0" rtlCol="0" anchor="t">
+            <a:spAutoFit/>
+          </a:bodyPr>
+          <a:lstStyle/>
+          <a:p>
+            <a:pPr algn="l" indent="0" marL="0">
+              <a:buNone/>
+            </a:pPr>
+            <a:r>
+              <a:rPr lang="en-US" sz="900" b="1" dirty="0">
+                <a:solidFill>
+                  <a:srgbClr val="212529"/>
+                </a:solidFill>
+                <a:latin typeface="Montserrat Bold" pitchFamily="34" charset="0"/>
+                <a:ea typeface="Montserrat Bold" pitchFamily="34" charset="-122"/>
+                <a:cs typeface="Montserrat Bold" pitchFamily="34" charset="-120"/>
+              </a:rPr>
+              <a:t>재현성 확보 (Reproducibility)</a:t>
+            </a:r>
+            <a:endParaRPr lang="en-US" sz="900" dirty="0"/>
+          </a:p>
+        </p:txBody>
+      </p:sp>
+      <p:sp>
+        <p:nvSpPr>
+          <p:cNvPr id="17" name="Text 14"/>
+          <p:cNvSpPr/>
+          <p:nvPr/>
+        </p:nvSpPr>
+        <p:spPr>
+          <a:xfrm>
+            <a:off x="2623542" y="4501846"/>
+            <a:ext cx="5790009" cy="160734"/>
+          </a:xfrm>
+          <a:prstGeom prst="rect">
+            <a:avLst/>
+          </a:prstGeom>
+          <a:noFill/>
+          <a:ln/>
+        </p:spPr>
+        <p:txBody>
+          <a:bodyPr wrap="square" lIns="0" tIns="0" rIns="0" bIns="0" rtlCol="0" anchor="t">
+            <a:spAutoFit/>
+          </a:bodyPr>
+          <a:lstStyle/>
+          <a:p>
+            <a:pPr algn="l" indent="0" marL="0">
+              <a:buNone/>
+            </a:pPr>
+            <a:r>
+              <a:rPr lang="en-US" sz="850" dirty="0">
+                <a:solidFill>
+                  <a:srgbClr val="495057"/>
+                </a:solidFill>
+                <a:latin typeface="Open Sans Light" pitchFamily="34" charset="0"/>
+                <a:ea typeface="Open Sans Light" pitchFamily="34" charset="-122"/>
+                <a:cs typeface="Open Sans Light" pitchFamily="34" charset="-120"/>
+              </a:rPr>
+              <a:t>모든 실험에서 </a:t>
+            </a:r>
+            <a:r>
+              <a:rPr lang="en-US" sz="850" dirty="0">
+                <a:solidFill>
+                  <a:srgbClr val="495057"/>
+                </a:solidFill>
+                <a:latin typeface="Open Sans" pitchFamily="34" charset="0"/>
+                <a:ea typeface="Open Sans" pitchFamily="34" charset="-122"/>
+                <a:cs typeface="Open Sans" pitchFamily="34" charset="-120"/>
+              </a:rPr>
+              <a:t>RANDOM_STATE = 111</a:t>
+            </a:r>
+            <a:r>
+              <a:rPr lang="en-US" sz="850" dirty="0">
+                <a:solidFill>
+                  <a:srgbClr val="495057"/>
+                </a:solidFill>
+                <a:latin typeface="Open Sans Light" pitchFamily="34" charset="0"/>
+                <a:ea typeface="Open Sans Light" pitchFamily="34" charset="-122"/>
+                <a:cs typeface="Open Sans Light" pitchFamily="34" charset="-120"/>
+              </a:rPr>
+              <a:t>로 고정하여, 어떤 환경에서도 동일한 분석 결과가 도출되도록 신뢰성을 확보</a:t>
+            </a:r>
+            <a:endParaRPr lang="en-US" sz="850" dirty="0"/>
+          </a:p>
+        </p:txBody>
+      </p:sp>
     </p:spTree>
   </p:cSld>
   <p:clrMapOvr>
@@ -2431,17 +7477,1456 @@
         </p:blipFill>
         <p:spPr>
           <a:xfrm>
-            <a:off x="0" y="0"/>
-            <a:ext cx="9144000" cy="5143500"/>
+            <a:off x="57150" y="57150"/>
+            <a:ext cx="9029700" cy="5143500"/>
           </a:xfrm>
           <a:prstGeom prst="rect">
             <a:avLst/>
           </a:prstGeom>
         </p:spPr>
       </p:pic>
+      <p:sp>
+        <p:nvSpPr>
+          <p:cNvPr id="3" name="Text 0"/>
+          <p:cNvSpPr/>
+          <p:nvPr/>
+        </p:nvSpPr>
+        <p:spPr>
+          <a:xfrm>
+            <a:off x="628650" y="770381"/>
+            <a:ext cx="8572500" cy="462558"/>
+          </a:xfrm>
+          <a:prstGeom prst="rect">
+            <a:avLst/>
+          </a:prstGeom>
+          <a:noFill/>
+          <a:ln/>
+        </p:spPr>
+        <p:txBody>
+          <a:bodyPr wrap="square" lIns="170053" tIns="0" rIns="0" bIns="0" rtlCol="0" anchor="t">
+            <a:spAutoFit/>
+          </a:bodyPr>
+          <a:lstStyle/>
+          <a:p>
+            <a:pPr algn="l" indent="0" marL="0">
+              <a:buNone/>
+            </a:pPr>
+            <a:r>
+              <a:rPr lang="en-US" sz="2450" b="1" dirty="0">
+                <a:solidFill>
+                  <a:srgbClr val="212529"/>
+                </a:solidFill>
+                <a:latin typeface="Montserrat Bold" pitchFamily="34" charset="0"/>
+                <a:ea typeface="Montserrat Bold" pitchFamily="34" charset="-122"/>
+                <a:cs typeface="Montserrat Bold" pitchFamily="34" charset="-120"/>
+              </a:rPr>
+              <a:t>성능 분석 결과: KNN과 랜덤 포레스트의 우세</a:t>
+            </a:r>
+            <a:endParaRPr lang="en-US" sz="2450" dirty="0"/>
+          </a:p>
+        </p:txBody>
+      </p:sp>
+      <p:sp>
+        <p:nvSpPr>
+          <p:cNvPr id="4" name="Shape 1"/>
+          <p:cNvSpPr/>
+          <p:nvPr/>
+        </p:nvSpPr>
+        <p:spPr>
+          <a:xfrm>
+            <a:off x="628650" y="1731857"/>
+            <a:ext cx="4531342" cy="3000375"/>
+          </a:xfrm>
+          <a:prstGeom prst="rect">
+            <a:avLst/>
+          </a:prstGeom>
+          <a:solidFill>
+            <a:srgbClr val="FFFFFF"/>
+          </a:solidFill>
+          <a:ln/>
+        </p:spPr>
+      </p:sp>
+      <p:sp>
+        <p:nvSpPr>
+          <p:cNvPr id="5" name="Shape 2"/>
+          <p:cNvSpPr/>
+          <p:nvPr/>
+        </p:nvSpPr>
+        <p:spPr>
+          <a:xfrm>
+            <a:off x="628650" y="1731857"/>
+            <a:ext cx="14288" cy="3000375"/>
+          </a:xfrm>
+          <a:prstGeom prst="rect">
+            <a:avLst/>
+          </a:prstGeom>
+          <a:solidFill>
+            <a:srgbClr val="087F5B"/>
+          </a:solidFill>
+          <a:ln/>
+        </p:spPr>
+      </p:sp>
+      <p:sp>
+        <p:nvSpPr>
+          <p:cNvPr id="6" name="Text 3"/>
+          <p:cNvSpPr/>
+          <p:nvPr/>
+        </p:nvSpPr>
+        <p:spPr>
+          <a:xfrm>
+            <a:off x="771525" y="1874732"/>
+            <a:ext cx="537456" cy="314325"/>
+          </a:xfrm>
+          <a:prstGeom prst="rect">
+            <a:avLst/>
+          </a:prstGeom>
+          <a:noFill/>
+          <a:ln/>
+        </p:spPr>
+        <p:txBody>
+          <a:bodyPr wrap="none" lIns="102108" tIns="102108" rIns="102108" bIns="102108" rtlCol="0" anchor="ctr">
+            <a:spAutoFit/>
+          </a:bodyPr>
+          <a:lstStyle/>
+          <a:p>
+            <a:pPr algn="l" indent="0" marL="0">
+              <a:buNone/>
+            </a:pPr>
+            <a:r>
+              <a:rPr lang="en-US" sz="700" b="1" dirty="0">
+                <a:solidFill>
+                  <a:srgbClr val="212529"/>
+                </a:solidFill>
+                <a:latin typeface="Montserrat Bold" pitchFamily="34" charset="0"/>
+                <a:ea typeface="Montserrat Bold" pitchFamily="34" charset="-122"/>
+                <a:cs typeface="Montserrat Bold" pitchFamily="34" charset="-120"/>
+              </a:rPr>
+              <a:t>순위</a:t>
+            </a:r>
+            <a:endParaRPr lang="en-US" sz="700" dirty="0"/>
+          </a:p>
+        </p:txBody>
+      </p:sp>
+      <p:sp>
+        <p:nvSpPr>
+          <p:cNvPr id="7" name="Text 4"/>
+          <p:cNvSpPr/>
+          <p:nvPr/>
+        </p:nvSpPr>
+        <p:spPr>
+          <a:xfrm>
+            <a:off x="1308981" y="1874732"/>
+            <a:ext cx="1155055" cy="314325"/>
+          </a:xfrm>
+          <a:prstGeom prst="rect">
+            <a:avLst/>
+          </a:prstGeom>
+          <a:noFill/>
+          <a:ln/>
+        </p:spPr>
+        <p:txBody>
+          <a:bodyPr wrap="none" lIns="102108" tIns="102108" rIns="102108" bIns="102108" rtlCol="0" anchor="ctr">
+            <a:spAutoFit/>
+          </a:bodyPr>
+          <a:lstStyle/>
+          <a:p>
+            <a:pPr algn="l" indent="0" marL="0">
+              <a:buNone/>
+            </a:pPr>
+            <a:r>
+              <a:rPr lang="en-US" sz="700" b="1" dirty="0">
+                <a:solidFill>
+                  <a:srgbClr val="212529"/>
+                </a:solidFill>
+                <a:latin typeface="Montserrat Bold" pitchFamily="34" charset="0"/>
+                <a:ea typeface="Montserrat Bold" pitchFamily="34" charset="-122"/>
+                <a:cs typeface="Montserrat Bold" pitchFamily="34" charset="-120"/>
+              </a:rPr>
+              <a:t>모델명</a:t>
+            </a:r>
+            <a:endParaRPr lang="en-US" sz="700" dirty="0"/>
+          </a:p>
+        </p:txBody>
+      </p:sp>
+      <p:sp>
+        <p:nvSpPr>
+          <p:cNvPr id="8" name="Text 5"/>
+          <p:cNvSpPr/>
+          <p:nvPr/>
+        </p:nvSpPr>
+        <p:spPr>
+          <a:xfrm>
+            <a:off x="2464036" y="1874732"/>
+            <a:ext cx="878570" cy="314325"/>
+          </a:xfrm>
+          <a:prstGeom prst="rect">
+            <a:avLst/>
+          </a:prstGeom>
+          <a:noFill/>
+          <a:ln/>
+        </p:spPr>
+        <p:txBody>
+          <a:bodyPr wrap="none" lIns="102108" tIns="102108" rIns="102108" bIns="102108" rtlCol="0" anchor="ctr">
+            <a:spAutoFit/>
+          </a:bodyPr>
+          <a:lstStyle/>
+          <a:p>
+            <a:pPr algn="l" indent="0" marL="0">
+              <a:buNone/>
+            </a:pPr>
+            <a:r>
+              <a:rPr lang="en-US" sz="700" b="1" dirty="0">
+                <a:solidFill>
+                  <a:srgbClr val="212529"/>
+                </a:solidFill>
+                <a:latin typeface="Montserrat Bold" pitchFamily="34" charset="0"/>
+                <a:ea typeface="Montserrat Bold" pitchFamily="34" charset="-122"/>
+                <a:cs typeface="Montserrat Bold" pitchFamily="34" charset="-120"/>
+              </a:rPr>
+              <a:t>F1-Score</a:t>
+            </a:r>
+            <a:endParaRPr lang="en-US" sz="700" dirty="0"/>
+          </a:p>
+        </p:txBody>
+      </p:sp>
+      <p:sp>
+        <p:nvSpPr>
+          <p:cNvPr id="9" name="Text 6"/>
+          <p:cNvSpPr/>
+          <p:nvPr/>
+        </p:nvSpPr>
+        <p:spPr>
+          <a:xfrm>
+            <a:off x="3342605" y="1874732"/>
+            <a:ext cx="966415" cy="314325"/>
+          </a:xfrm>
+          <a:prstGeom prst="rect">
+            <a:avLst/>
+          </a:prstGeom>
+          <a:noFill/>
+          <a:ln/>
+        </p:spPr>
+        <p:txBody>
+          <a:bodyPr wrap="none" lIns="102108" tIns="102108" rIns="102108" bIns="102108" rtlCol="0" anchor="ctr">
+            <a:spAutoFit/>
+          </a:bodyPr>
+          <a:lstStyle/>
+          <a:p>
+            <a:pPr algn="l" indent="0" marL="0">
+              <a:buNone/>
+            </a:pPr>
+            <a:r>
+              <a:rPr lang="en-US" sz="700" b="1" dirty="0">
+                <a:solidFill>
+                  <a:srgbClr val="212529"/>
+                </a:solidFill>
+                <a:latin typeface="Montserrat Bold" pitchFamily="34" charset="0"/>
+                <a:ea typeface="Montserrat Bold" pitchFamily="34" charset="-122"/>
+                <a:cs typeface="Montserrat Bold" pitchFamily="34" charset="-120"/>
+              </a:rPr>
+              <a:t>AUC-ROC</a:t>
+            </a:r>
+            <a:endParaRPr lang="en-US" sz="700" dirty="0"/>
+          </a:p>
+        </p:txBody>
+      </p:sp>
+      <p:sp>
+        <p:nvSpPr>
+          <p:cNvPr id="10" name="Text 7"/>
+          <p:cNvSpPr/>
+          <p:nvPr/>
+        </p:nvSpPr>
+        <p:spPr>
+          <a:xfrm>
+            <a:off x="4309021" y="1874732"/>
+            <a:ext cx="708096" cy="314325"/>
+          </a:xfrm>
+          <a:prstGeom prst="rect">
+            <a:avLst/>
+          </a:prstGeom>
+          <a:noFill/>
+          <a:ln/>
+        </p:spPr>
+        <p:txBody>
+          <a:bodyPr wrap="none" lIns="102108" tIns="102108" rIns="102108" bIns="102108" rtlCol="0" anchor="ctr">
+            <a:spAutoFit/>
+          </a:bodyPr>
+          <a:lstStyle/>
+          <a:p>
+            <a:pPr algn="l" indent="0" marL="0">
+              <a:buNone/>
+            </a:pPr>
+            <a:r>
+              <a:rPr lang="en-US" sz="700" b="1" dirty="0">
+                <a:solidFill>
+                  <a:srgbClr val="212529"/>
+                </a:solidFill>
+                <a:latin typeface="Montserrat Bold" pitchFamily="34" charset="0"/>
+                <a:ea typeface="Montserrat Bold" pitchFamily="34" charset="-122"/>
+                <a:cs typeface="Montserrat Bold" pitchFamily="34" charset="-120"/>
+              </a:rPr>
+              <a:t>Recall</a:t>
+            </a:r>
+            <a:endParaRPr lang="en-US" sz="700" dirty="0"/>
+          </a:p>
+        </p:txBody>
+      </p:sp>
+      <p:sp>
+        <p:nvSpPr>
+          <p:cNvPr id="11" name="Shape 8"/>
+          <p:cNvSpPr/>
+          <p:nvPr/>
+        </p:nvSpPr>
+        <p:spPr>
+          <a:xfrm>
+            <a:off x="771525" y="2189057"/>
+            <a:ext cx="4245592" cy="317897"/>
+          </a:xfrm>
+          <a:prstGeom prst="rect">
+            <a:avLst/>
+          </a:prstGeom>
+          <a:solidFill>
+            <a:srgbClr val="087F5B">
+              <a:alpha val="5000"/>
+            </a:srgbClr>
+          </a:solidFill>
+          <a:ln/>
+        </p:spPr>
+      </p:sp>
+      <p:sp>
+        <p:nvSpPr>
+          <p:cNvPr id="12" name="Text 9"/>
+          <p:cNvSpPr/>
+          <p:nvPr/>
+        </p:nvSpPr>
+        <p:spPr>
+          <a:xfrm>
+            <a:off x="771525" y="2189057"/>
+            <a:ext cx="537456" cy="317897"/>
+          </a:xfrm>
+          <a:prstGeom prst="rect">
+            <a:avLst/>
+          </a:prstGeom>
+          <a:noFill/>
+          <a:ln/>
+        </p:spPr>
+        <p:txBody>
+          <a:bodyPr wrap="none" lIns="102108" tIns="102108" rIns="102108" bIns="102108" rtlCol="0" anchor="ctr">
+            <a:spAutoFit/>
+          </a:bodyPr>
+          <a:lstStyle/>
+          <a:p>
+            <a:pPr algn="l" indent="0" marL="0">
+              <a:buNone/>
+            </a:pPr>
+            <a:r>
+              <a:rPr lang="en-US" sz="700" b="1" dirty="0">
+                <a:solidFill>
+                  <a:srgbClr val="495057"/>
+                </a:solidFill>
+                <a:latin typeface="Open Sans Bold" pitchFamily="34" charset="0"/>
+                <a:ea typeface="Open Sans Bold" pitchFamily="34" charset="-122"/>
+                <a:cs typeface="Open Sans Bold" pitchFamily="34" charset="-120"/>
+              </a:rPr>
+              <a:t>🥇</a:t>
+            </a:r>
+            <a:endParaRPr lang="en-US" sz="700" dirty="0"/>
+          </a:p>
+        </p:txBody>
+      </p:sp>
+      <p:sp>
+        <p:nvSpPr>
+          <p:cNvPr id="13" name="Text 10"/>
+          <p:cNvSpPr/>
+          <p:nvPr/>
+        </p:nvSpPr>
+        <p:spPr>
+          <a:xfrm>
+            <a:off x="1308981" y="2189057"/>
+            <a:ext cx="1155055" cy="317897"/>
+          </a:xfrm>
+          <a:prstGeom prst="rect">
+            <a:avLst/>
+          </a:prstGeom>
+          <a:noFill/>
+          <a:ln/>
+        </p:spPr>
+        <p:txBody>
+          <a:bodyPr wrap="none" lIns="102108" tIns="102108" rIns="102108" bIns="102108" rtlCol="0" anchor="ctr">
+            <a:spAutoFit/>
+          </a:bodyPr>
+          <a:lstStyle/>
+          <a:p>
+            <a:pPr algn="l" indent="0" marL="0">
+              <a:buNone/>
+            </a:pPr>
+            <a:r>
+              <a:rPr lang="en-US" sz="700" b="1" dirty="0">
+                <a:solidFill>
+                  <a:srgbClr val="495057"/>
+                </a:solidFill>
+                <a:latin typeface="Open Sans Bold" pitchFamily="34" charset="0"/>
+                <a:ea typeface="Open Sans Bold" pitchFamily="34" charset="-122"/>
+                <a:cs typeface="Open Sans Bold" pitchFamily="34" charset="-120"/>
+              </a:rPr>
+              <a:t>KNN</a:t>
+            </a:r>
+            <a:endParaRPr lang="en-US" sz="700" dirty="0"/>
+          </a:p>
+        </p:txBody>
+      </p:sp>
+      <p:sp>
+        <p:nvSpPr>
+          <p:cNvPr id="14" name="Text 11"/>
+          <p:cNvSpPr/>
+          <p:nvPr/>
+        </p:nvSpPr>
+        <p:spPr>
+          <a:xfrm>
+            <a:off x="2464036" y="2189057"/>
+            <a:ext cx="878570" cy="317897"/>
+          </a:xfrm>
+          <a:prstGeom prst="rect">
+            <a:avLst/>
+          </a:prstGeom>
+          <a:noFill/>
+          <a:ln/>
+        </p:spPr>
+        <p:txBody>
+          <a:bodyPr wrap="none" lIns="102108" tIns="102108" rIns="102108" bIns="102108" rtlCol="0" anchor="ctr">
+            <a:spAutoFit/>
+          </a:bodyPr>
+          <a:lstStyle/>
+          <a:p>
+            <a:pPr algn="l" indent="0" marL="0">
+              <a:buNone/>
+            </a:pPr>
+            <a:r>
+              <a:rPr lang="en-US" sz="700" b="1" dirty="0">
+                <a:solidFill>
+                  <a:srgbClr val="495057"/>
+                </a:solidFill>
+                <a:latin typeface="Open Sans Bold" pitchFamily="34" charset="0"/>
+                <a:ea typeface="Open Sans Bold" pitchFamily="34" charset="-122"/>
+                <a:cs typeface="Open Sans Bold" pitchFamily="34" charset="-120"/>
+              </a:rPr>
+              <a:t>0.859</a:t>
+            </a:r>
+            <a:endParaRPr lang="en-US" sz="700" dirty="0"/>
+          </a:p>
+        </p:txBody>
+      </p:sp>
+      <p:sp>
+        <p:nvSpPr>
+          <p:cNvPr id="15" name="Text 12"/>
+          <p:cNvSpPr/>
+          <p:nvPr/>
+        </p:nvSpPr>
+        <p:spPr>
+          <a:xfrm>
+            <a:off x="3342605" y="2189057"/>
+            <a:ext cx="966415" cy="317897"/>
+          </a:xfrm>
+          <a:prstGeom prst="rect">
+            <a:avLst/>
+          </a:prstGeom>
+          <a:noFill/>
+          <a:ln/>
+        </p:spPr>
+        <p:txBody>
+          <a:bodyPr wrap="none" lIns="102108" tIns="102108" rIns="102108" bIns="102108" rtlCol="0" anchor="ctr">
+            <a:spAutoFit/>
+          </a:bodyPr>
+          <a:lstStyle/>
+          <a:p>
+            <a:pPr algn="l" indent="0" marL="0">
+              <a:buNone/>
+            </a:pPr>
+            <a:r>
+              <a:rPr lang="en-US" sz="700" b="1" dirty="0">
+                <a:solidFill>
+                  <a:srgbClr val="495057"/>
+                </a:solidFill>
+                <a:latin typeface="Open Sans Bold" pitchFamily="34" charset="0"/>
+                <a:ea typeface="Open Sans Bold" pitchFamily="34" charset="-122"/>
+                <a:cs typeface="Open Sans Bold" pitchFamily="34" charset="-120"/>
+              </a:rPr>
+              <a:t>0.944</a:t>
+            </a:r>
+            <a:endParaRPr lang="en-US" sz="700" dirty="0"/>
+          </a:p>
+        </p:txBody>
+      </p:sp>
+      <p:sp>
+        <p:nvSpPr>
+          <p:cNvPr id="16" name="Text 13"/>
+          <p:cNvSpPr/>
+          <p:nvPr/>
+        </p:nvSpPr>
+        <p:spPr>
+          <a:xfrm>
+            <a:off x="4309021" y="2189057"/>
+            <a:ext cx="708096" cy="317897"/>
+          </a:xfrm>
+          <a:prstGeom prst="rect">
+            <a:avLst/>
+          </a:prstGeom>
+          <a:noFill/>
+          <a:ln/>
+        </p:spPr>
+        <p:txBody>
+          <a:bodyPr wrap="none" lIns="102108" tIns="102108" rIns="102108" bIns="102108" rtlCol="0" anchor="ctr">
+            <a:spAutoFit/>
+          </a:bodyPr>
+          <a:lstStyle/>
+          <a:p>
+            <a:pPr algn="l" indent="0" marL="0">
+              <a:buNone/>
+            </a:pPr>
+            <a:r>
+              <a:rPr lang="en-US" sz="700" b="1" dirty="0">
+                <a:solidFill>
+                  <a:srgbClr val="495057"/>
+                </a:solidFill>
+                <a:latin typeface="Open Sans Bold" pitchFamily="34" charset="0"/>
+                <a:ea typeface="Open Sans Bold" pitchFamily="34" charset="-122"/>
+                <a:cs typeface="Open Sans Bold" pitchFamily="34" charset="-120"/>
+              </a:rPr>
+              <a:t>0.806</a:t>
+            </a:r>
+            <a:endParaRPr lang="en-US" sz="700" dirty="0"/>
+          </a:p>
+        </p:txBody>
+      </p:sp>
+      <p:sp>
+        <p:nvSpPr>
+          <p:cNvPr id="17" name="Text 14"/>
+          <p:cNvSpPr/>
+          <p:nvPr/>
+        </p:nvSpPr>
+        <p:spPr>
+          <a:xfrm>
+            <a:off x="771525" y="2506954"/>
+            <a:ext cx="537456" cy="321469"/>
+          </a:xfrm>
+          <a:prstGeom prst="rect">
+            <a:avLst/>
+          </a:prstGeom>
+          <a:noFill/>
+          <a:ln/>
+        </p:spPr>
+        <p:txBody>
+          <a:bodyPr wrap="none" lIns="102108" tIns="102108" rIns="102108" bIns="102108" rtlCol="0" anchor="ctr">
+            <a:spAutoFit/>
+          </a:bodyPr>
+          <a:lstStyle/>
+          <a:p>
+            <a:pPr algn="l" indent="0" marL="0">
+              <a:buNone/>
+            </a:pPr>
+            <a:r>
+              <a:rPr lang="en-US" sz="750" dirty="0">
+                <a:solidFill>
+                  <a:srgbClr val="495057"/>
+                </a:solidFill>
+                <a:latin typeface="Open Sans" pitchFamily="34" charset="0"/>
+                <a:ea typeface="Open Sans" pitchFamily="34" charset="-122"/>
+                <a:cs typeface="Open Sans" pitchFamily="34" charset="-120"/>
+              </a:rPr>
+              <a:t>🥈</a:t>
+            </a:r>
+            <a:endParaRPr lang="en-US" sz="750" dirty="0"/>
+          </a:p>
+        </p:txBody>
+      </p:sp>
+      <p:sp>
+        <p:nvSpPr>
+          <p:cNvPr id="18" name="Text 15"/>
+          <p:cNvSpPr/>
+          <p:nvPr/>
+        </p:nvSpPr>
+        <p:spPr>
+          <a:xfrm>
+            <a:off x="1308981" y="2506954"/>
+            <a:ext cx="1155055" cy="321469"/>
+          </a:xfrm>
+          <a:prstGeom prst="rect">
+            <a:avLst/>
+          </a:prstGeom>
+          <a:noFill/>
+          <a:ln/>
+        </p:spPr>
+        <p:txBody>
+          <a:bodyPr wrap="none" lIns="102108" tIns="102108" rIns="102108" bIns="102108" rtlCol="0" anchor="ctr">
+            <a:spAutoFit/>
+          </a:bodyPr>
+          <a:lstStyle/>
+          <a:p>
+            <a:pPr algn="l" indent="0" marL="0">
+              <a:buNone/>
+            </a:pPr>
+            <a:r>
+              <a:rPr lang="en-US" sz="750" dirty="0">
+                <a:solidFill>
+                  <a:srgbClr val="495057"/>
+                </a:solidFill>
+                <a:latin typeface="Open Sans" pitchFamily="34" charset="0"/>
+                <a:ea typeface="Open Sans" pitchFamily="34" charset="-122"/>
+                <a:cs typeface="Open Sans" pitchFamily="34" charset="-120"/>
+              </a:rPr>
+              <a:t>랜덤 포레스트</a:t>
+            </a:r>
+            <a:endParaRPr lang="en-US" sz="750" dirty="0"/>
+          </a:p>
+        </p:txBody>
+      </p:sp>
+      <p:sp>
+        <p:nvSpPr>
+          <p:cNvPr id="19" name="Text 16"/>
+          <p:cNvSpPr/>
+          <p:nvPr/>
+        </p:nvSpPr>
+        <p:spPr>
+          <a:xfrm>
+            <a:off x="2464036" y="2506954"/>
+            <a:ext cx="878570" cy="321469"/>
+          </a:xfrm>
+          <a:prstGeom prst="rect">
+            <a:avLst/>
+          </a:prstGeom>
+          <a:noFill/>
+          <a:ln/>
+        </p:spPr>
+        <p:txBody>
+          <a:bodyPr wrap="none" lIns="102108" tIns="102108" rIns="102108" bIns="102108" rtlCol="0" anchor="ctr">
+            <a:spAutoFit/>
+          </a:bodyPr>
+          <a:lstStyle/>
+          <a:p>
+            <a:pPr algn="l" indent="0" marL="0">
+              <a:buNone/>
+            </a:pPr>
+            <a:r>
+              <a:rPr lang="en-US" sz="750" dirty="0">
+                <a:solidFill>
+                  <a:srgbClr val="495057"/>
+                </a:solidFill>
+                <a:latin typeface="Open Sans" pitchFamily="34" charset="0"/>
+                <a:ea typeface="Open Sans" pitchFamily="34" charset="-122"/>
+                <a:cs typeface="Open Sans" pitchFamily="34" charset="-120"/>
+              </a:rPr>
+              <a:t>0.821</a:t>
+            </a:r>
+            <a:endParaRPr lang="en-US" sz="750" dirty="0"/>
+          </a:p>
+        </p:txBody>
+      </p:sp>
+      <p:sp>
+        <p:nvSpPr>
+          <p:cNvPr id="20" name="Text 17"/>
+          <p:cNvSpPr/>
+          <p:nvPr/>
+        </p:nvSpPr>
+        <p:spPr>
+          <a:xfrm>
+            <a:off x="3342605" y="2506954"/>
+            <a:ext cx="966415" cy="321469"/>
+          </a:xfrm>
+          <a:prstGeom prst="rect">
+            <a:avLst/>
+          </a:prstGeom>
+          <a:noFill/>
+          <a:ln/>
+        </p:spPr>
+        <p:txBody>
+          <a:bodyPr wrap="none" lIns="102108" tIns="102108" rIns="102108" bIns="102108" rtlCol="0" anchor="ctr">
+            <a:spAutoFit/>
+          </a:bodyPr>
+          <a:lstStyle/>
+          <a:p>
+            <a:pPr algn="l" indent="0" marL="0">
+              <a:buNone/>
+            </a:pPr>
+            <a:r>
+              <a:rPr lang="en-US" sz="750" dirty="0">
+                <a:solidFill>
+                  <a:srgbClr val="495057"/>
+                </a:solidFill>
+                <a:latin typeface="Open Sans" pitchFamily="34" charset="0"/>
+                <a:ea typeface="Open Sans" pitchFamily="34" charset="-122"/>
+                <a:cs typeface="Open Sans" pitchFamily="34" charset="-120"/>
+              </a:rPr>
+              <a:t>0.969</a:t>
+            </a:r>
+            <a:endParaRPr lang="en-US" sz="750" dirty="0"/>
+          </a:p>
+        </p:txBody>
+      </p:sp>
+      <p:sp>
+        <p:nvSpPr>
+          <p:cNvPr id="21" name="Text 18"/>
+          <p:cNvSpPr/>
+          <p:nvPr/>
+        </p:nvSpPr>
+        <p:spPr>
+          <a:xfrm>
+            <a:off x="4309021" y="2506954"/>
+            <a:ext cx="708096" cy="321469"/>
+          </a:xfrm>
+          <a:prstGeom prst="rect">
+            <a:avLst/>
+          </a:prstGeom>
+          <a:noFill/>
+          <a:ln/>
+        </p:spPr>
+        <p:txBody>
+          <a:bodyPr wrap="none" lIns="102108" tIns="102108" rIns="102108" bIns="102108" rtlCol="0" anchor="ctr">
+            <a:spAutoFit/>
+          </a:bodyPr>
+          <a:lstStyle/>
+          <a:p>
+            <a:pPr algn="l" indent="0" marL="0">
+              <a:buNone/>
+            </a:pPr>
+            <a:r>
+              <a:rPr lang="en-US" sz="750" dirty="0">
+                <a:solidFill>
+                  <a:srgbClr val="495057"/>
+                </a:solidFill>
+                <a:latin typeface="Open Sans" pitchFamily="34" charset="0"/>
+                <a:ea typeface="Open Sans" pitchFamily="34" charset="-122"/>
+                <a:cs typeface="Open Sans" pitchFamily="34" charset="-120"/>
+              </a:rPr>
+              <a:t>0.816</a:t>
+            </a:r>
+            <a:endParaRPr lang="en-US" sz="750" dirty="0"/>
+          </a:p>
+        </p:txBody>
+      </p:sp>
+      <p:sp>
+        <p:nvSpPr>
+          <p:cNvPr id="22" name="Text 19"/>
+          <p:cNvSpPr/>
+          <p:nvPr/>
+        </p:nvSpPr>
+        <p:spPr>
+          <a:xfrm>
+            <a:off x="771525" y="2828423"/>
+            <a:ext cx="537456" cy="321469"/>
+          </a:xfrm>
+          <a:prstGeom prst="rect">
+            <a:avLst/>
+          </a:prstGeom>
+          <a:noFill/>
+          <a:ln/>
+        </p:spPr>
+        <p:txBody>
+          <a:bodyPr wrap="none" lIns="102108" tIns="102108" rIns="102108" bIns="102108" rtlCol="0" anchor="ctr">
+            <a:spAutoFit/>
+          </a:bodyPr>
+          <a:lstStyle/>
+          <a:p>
+            <a:pPr algn="l" indent="0" marL="0">
+              <a:buNone/>
+            </a:pPr>
+            <a:r>
+              <a:rPr lang="en-US" sz="750" dirty="0">
+                <a:solidFill>
+                  <a:srgbClr val="495057"/>
+                </a:solidFill>
+                <a:latin typeface="Open Sans" pitchFamily="34" charset="0"/>
+                <a:ea typeface="Open Sans" pitchFamily="34" charset="-122"/>
+                <a:cs typeface="Open Sans" pitchFamily="34" charset="-120"/>
+              </a:rPr>
+              <a:t>🥉</a:t>
+            </a:r>
+            <a:endParaRPr lang="en-US" sz="750" dirty="0"/>
+          </a:p>
+        </p:txBody>
+      </p:sp>
+      <p:sp>
+        <p:nvSpPr>
+          <p:cNvPr id="23" name="Text 20"/>
+          <p:cNvSpPr/>
+          <p:nvPr/>
+        </p:nvSpPr>
+        <p:spPr>
+          <a:xfrm>
+            <a:off x="1308981" y="2828423"/>
+            <a:ext cx="1155055" cy="321469"/>
+          </a:xfrm>
+          <a:prstGeom prst="rect">
+            <a:avLst/>
+          </a:prstGeom>
+          <a:noFill/>
+          <a:ln/>
+        </p:spPr>
+        <p:txBody>
+          <a:bodyPr wrap="none" lIns="102108" tIns="102108" rIns="102108" bIns="102108" rtlCol="0" anchor="ctr">
+            <a:spAutoFit/>
+          </a:bodyPr>
+          <a:lstStyle/>
+          <a:p>
+            <a:pPr algn="l" indent="0" marL="0">
+              <a:buNone/>
+            </a:pPr>
+            <a:r>
+              <a:rPr lang="en-US" sz="750" dirty="0">
+                <a:solidFill>
+                  <a:srgbClr val="495057"/>
+                </a:solidFill>
+                <a:latin typeface="Open Sans" pitchFamily="34" charset="0"/>
+                <a:ea typeface="Open Sans" pitchFamily="34" charset="-122"/>
+                <a:cs typeface="Open Sans" pitchFamily="34" charset="-120"/>
+              </a:rPr>
+              <a:t>신경망 (MLP)</a:t>
+            </a:r>
+            <a:endParaRPr lang="en-US" sz="750" dirty="0"/>
+          </a:p>
+        </p:txBody>
+      </p:sp>
+      <p:sp>
+        <p:nvSpPr>
+          <p:cNvPr id="24" name="Text 21"/>
+          <p:cNvSpPr/>
+          <p:nvPr/>
+        </p:nvSpPr>
+        <p:spPr>
+          <a:xfrm>
+            <a:off x="2464036" y="2828423"/>
+            <a:ext cx="878570" cy="321469"/>
+          </a:xfrm>
+          <a:prstGeom prst="rect">
+            <a:avLst/>
+          </a:prstGeom>
+          <a:noFill/>
+          <a:ln/>
+        </p:spPr>
+        <p:txBody>
+          <a:bodyPr wrap="none" lIns="102108" tIns="102108" rIns="102108" bIns="102108" rtlCol="0" anchor="ctr">
+            <a:spAutoFit/>
+          </a:bodyPr>
+          <a:lstStyle/>
+          <a:p>
+            <a:pPr algn="l" indent="0" marL="0">
+              <a:buNone/>
+            </a:pPr>
+            <a:r>
+              <a:rPr lang="en-US" sz="750" dirty="0">
+                <a:solidFill>
+                  <a:srgbClr val="495057"/>
+                </a:solidFill>
+                <a:latin typeface="Open Sans" pitchFamily="34" charset="0"/>
+                <a:ea typeface="Open Sans" pitchFamily="34" charset="-122"/>
+                <a:cs typeface="Open Sans" pitchFamily="34" charset="-120"/>
+              </a:rPr>
+              <a:t>0.760</a:t>
+            </a:r>
+            <a:endParaRPr lang="en-US" sz="750" dirty="0"/>
+          </a:p>
+        </p:txBody>
+      </p:sp>
+      <p:sp>
+        <p:nvSpPr>
+          <p:cNvPr id="25" name="Text 22"/>
+          <p:cNvSpPr/>
+          <p:nvPr/>
+        </p:nvSpPr>
+        <p:spPr>
+          <a:xfrm>
+            <a:off x="3342605" y="2828423"/>
+            <a:ext cx="966415" cy="321469"/>
+          </a:xfrm>
+          <a:prstGeom prst="rect">
+            <a:avLst/>
+          </a:prstGeom>
+          <a:noFill/>
+          <a:ln/>
+        </p:spPr>
+        <p:txBody>
+          <a:bodyPr wrap="none" lIns="102108" tIns="102108" rIns="102108" bIns="102108" rtlCol="0" anchor="ctr">
+            <a:spAutoFit/>
+          </a:bodyPr>
+          <a:lstStyle/>
+          <a:p>
+            <a:pPr algn="l" indent="0" marL="0">
+              <a:buNone/>
+            </a:pPr>
+            <a:r>
+              <a:rPr lang="en-US" sz="750" dirty="0">
+                <a:solidFill>
+                  <a:srgbClr val="495057"/>
+                </a:solidFill>
+                <a:latin typeface="Open Sans" pitchFamily="34" charset="0"/>
+                <a:ea typeface="Open Sans" pitchFamily="34" charset="-122"/>
+                <a:cs typeface="Open Sans" pitchFamily="34" charset="-120"/>
+              </a:rPr>
+              <a:t>0.970</a:t>
+            </a:r>
+            <a:endParaRPr lang="en-US" sz="750" dirty="0"/>
+          </a:p>
+        </p:txBody>
+      </p:sp>
+      <p:sp>
+        <p:nvSpPr>
+          <p:cNvPr id="26" name="Text 23"/>
+          <p:cNvSpPr/>
+          <p:nvPr/>
+        </p:nvSpPr>
+        <p:spPr>
+          <a:xfrm>
+            <a:off x="4309021" y="2828423"/>
+            <a:ext cx="708096" cy="321469"/>
+          </a:xfrm>
+          <a:prstGeom prst="rect">
+            <a:avLst/>
+          </a:prstGeom>
+          <a:noFill/>
+          <a:ln/>
+        </p:spPr>
+        <p:txBody>
+          <a:bodyPr wrap="none" lIns="102108" tIns="102108" rIns="102108" bIns="102108" rtlCol="0" anchor="ctr">
+            <a:spAutoFit/>
+          </a:bodyPr>
+          <a:lstStyle/>
+          <a:p>
+            <a:pPr algn="l" indent="0" marL="0">
+              <a:buNone/>
+            </a:pPr>
+            <a:r>
+              <a:rPr lang="en-US" sz="750" dirty="0">
+                <a:solidFill>
+                  <a:srgbClr val="495057"/>
+                </a:solidFill>
+                <a:latin typeface="Open Sans" pitchFamily="34" charset="0"/>
+                <a:ea typeface="Open Sans" pitchFamily="34" charset="-122"/>
+                <a:cs typeface="Open Sans" pitchFamily="34" charset="-120"/>
+              </a:rPr>
+              <a:t>0.806</a:t>
+            </a:r>
+            <a:endParaRPr lang="en-US" sz="750" dirty="0"/>
+          </a:p>
+        </p:txBody>
+      </p:sp>
+      <p:sp>
+        <p:nvSpPr>
+          <p:cNvPr id="27" name="Text 24"/>
+          <p:cNvSpPr/>
+          <p:nvPr/>
+        </p:nvSpPr>
+        <p:spPr>
+          <a:xfrm>
+            <a:off x="771525" y="3149891"/>
+            <a:ext cx="537456" cy="314325"/>
+          </a:xfrm>
+          <a:prstGeom prst="rect">
+            <a:avLst/>
+          </a:prstGeom>
+          <a:noFill/>
+          <a:ln/>
+        </p:spPr>
+        <p:txBody>
+          <a:bodyPr wrap="none" lIns="102108" tIns="102108" rIns="102108" bIns="102108" rtlCol="0" anchor="ctr">
+            <a:spAutoFit/>
+          </a:bodyPr>
+          <a:lstStyle/>
+          <a:p>
+            <a:pPr algn="l" indent="0" marL="0">
+              <a:buNone/>
+            </a:pPr>
+            <a:r>
+              <a:rPr lang="en-US" sz="750" dirty="0">
+                <a:solidFill>
+                  <a:srgbClr val="495057"/>
+                </a:solidFill>
+                <a:latin typeface="Open Sans" pitchFamily="34" charset="0"/>
+                <a:ea typeface="Open Sans" pitchFamily="34" charset="-122"/>
+                <a:cs typeface="Open Sans" pitchFamily="34" charset="-120"/>
+              </a:rPr>
+              <a:t>4</a:t>
+            </a:r>
+            <a:endParaRPr lang="en-US" sz="750" dirty="0"/>
+          </a:p>
+        </p:txBody>
+      </p:sp>
+      <p:sp>
+        <p:nvSpPr>
+          <p:cNvPr id="28" name="Text 25"/>
+          <p:cNvSpPr/>
+          <p:nvPr/>
+        </p:nvSpPr>
+        <p:spPr>
+          <a:xfrm>
+            <a:off x="1308981" y="3149891"/>
+            <a:ext cx="1155055" cy="314325"/>
+          </a:xfrm>
+          <a:prstGeom prst="rect">
+            <a:avLst/>
+          </a:prstGeom>
+          <a:noFill/>
+          <a:ln/>
+        </p:spPr>
+        <p:txBody>
+          <a:bodyPr wrap="none" lIns="102108" tIns="102108" rIns="102108" bIns="102108" rtlCol="0" anchor="ctr">
+            <a:spAutoFit/>
+          </a:bodyPr>
+          <a:lstStyle/>
+          <a:p>
+            <a:pPr algn="l" indent="0" marL="0">
+              <a:buNone/>
+            </a:pPr>
+            <a:r>
+              <a:rPr lang="en-US" sz="750" dirty="0">
+                <a:solidFill>
+                  <a:srgbClr val="495057"/>
+                </a:solidFill>
+                <a:latin typeface="Open Sans" pitchFamily="34" charset="0"/>
+                <a:ea typeface="Open Sans" pitchFamily="34" charset="-122"/>
+                <a:cs typeface="Open Sans" pitchFamily="34" charset="-120"/>
+              </a:rPr>
+              <a:t>LightGBM</a:t>
+            </a:r>
+            <a:endParaRPr lang="en-US" sz="750" dirty="0"/>
+          </a:p>
+        </p:txBody>
+      </p:sp>
+      <p:sp>
+        <p:nvSpPr>
+          <p:cNvPr id="29" name="Text 26"/>
+          <p:cNvSpPr/>
+          <p:nvPr/>
+        </p:nvSpPr>
+        <p:spPr>
+          <a:xfrm>
+            <a:off x="2464036" y="3149891"/>
+            <a:ext cx="878570" cy="314325"/>
+          </a:xfrm>
+          <a:prstGeom prst="rect">
+            <a:avLst/>
+          </a:prstGeom>
+          <a:noFill/>
+          <a:ln/>
+        </p:spPr>
+        <p:txBody>
+          <a:bodyPr wrap="none" lIns="102108" tIns="102108" rIns="102108" bIns="102108" rtlCol="0" anchor="ctr">
+            <a:spAutoFit/>
+          </a:bodyPr>
+          <a:lstStyle/>
+          <a:p>
+            <a:pPr algn="l" indent="0" marL="0">
+              <a:buNone/>
+            </a:pPr>
+            <a:r>
+              <a:rPr lang="en-US" sz="750" dirty="0">
+                <a:solidFill>
+                  <a:srgbClr val="495057"/>
+                </a:solidFill>
+                <a:latin typeface="Open Sans" pitchFamily="34" charset="0"/>
+                <a:ea typeface="Open Sans" pitchFamily="34" charset="-122"/>
+                <a:cs typeface="Open Sans" pitchFamily="34" charset="-120"/>
+              </a:rPr>
+              <a:t>0.640</a:t>
+            </a:r>
+            <a:endParaRPr lang="en-US" sz="750" dirty="0"/>
+          </a:p>
+        </p:txBody>
+      </p:sp>
+      <p:sp>
+        <p:nvSpPr>
+          <p:cNvPr id="30" name="Text 27"/>
+          <p:cNvSpPr/>
+          <p:nvPr/>
+        </p:nvSpPr>
+        <p:spPr>
+          <a:xfrm>
+            <a:off x="3342605" y="3149891"/>
+            <a:ext cx="966415" cy="314325"/>
+          </a:xfrm>
+          <a:prstGeom prst="rect">
+            <a:avLst/>
+          </a:prstGeom>
+          <a:noFill/>
+          <a:ln/>
+        </p:spPr>
+        <p:txBody>
+          <a:bodyPr wrap="none" lIns="102108" tIns="102108" rIns="102108" bIns="102108" rtlCol="0" anchor="ctr">
+            <a:spAutoFit/>
+          </a:bodyPr>
+          <a:lstStyle/>
+          <a:p>
+            <a:pPr algn="l" indent="0" marL="0">
+              <a:buNone/>
+            </a:pPr>
+            <a:r>
+              <a:rPr lang="en-US" sz="750" dirty="0">
+                <a:solidFill>
+                  <a:srgbClr val="495057"/>
+                </a:solidFill>
+                <a:latin typeface="Open Sans" pitchFamily="34" charset="0"/>
+                <a:ea typeface="Open Sans" pitchFamily="34" charset="-122"/>
+                <a:cs typeface="Open Sans" pitchFamily="34" charset="-120"/>
+              </a:rPr>
+              <a:t>0.969</a:t>
+            </a:r>
+            <a:endParaRPr lang="en-US" sz="750" dirty="0"/>
+          </a:p>
+        </p:txBody>
+      </p:sp>
+      <p:sp>
+        <p:nvSpPr>
+          <p:cNvPr id="31" name="Text 28"/>
+          <p:cNvSpPr/>
+          <p:nvPr/>
+        </p:nvSpPr>
+        <p:spPr>
+          <a:xfrm>
+            <a:off x="4309021" y="3149891"/>
+            <a:ext cx="708096" cy="314325"/>
+          </a:xfrm>
+          <a:prstGeom prst="rect">
+            <a:avLst/>
+          </a:prstGeom>
+          <a:noFill/>
+          <a:ln/>
+        </p:spPr>
+        <p:txBody>
+          <a:bodyPr wrap="none" lIns="102108" tIns="102108" rIns="102108" bIns="102108" rtlCol="0" anchor="ctr">
+            <a:spAutoFit/>
+          </a:bodyPr>
+          <a:lstStyle/>
+          <a:p>
+            <a:pPr algn="l" indent="0" marL="0">
+              <a:buNone/>
+            </a:pPr>
+            <a:r>
+              <a:rPr lang="en-US" sz="750" dirty="0">
+                <a:solidFill>
+                  <a:srgbClr val="495057"/>
+                </a:solidFill>
+                <a:latin typeface="Open Sans" pitchFamily="34" charset="0"/>
+                <a:ea typeface="Open Sans" pitchFamily="34" charset="-122"/>
+                <a:cs typeface="Open Sans" pitchFamily="34" charset="-120"/>
+              </a:rPr>
+              <a:t>0.888</a:t>
+            </a:r>
+            <a:endParaRPr lang="en-US" sz="750" dirty="0"/>
+          </a:p>
+        </p:txBody>
+      </p:sp>
+      <p:sp>
+        <p:nvSpPr>
+          <p:cNvPr id="32" name="Text 29"/>
+          <p:cNvSpPr/>
+          <p:nvPr/>
+        </p:nvSpPr>
+        <p:spPr>
+          <a:xfrm>
+            <a:off x="771525" y="3464216"/>
+            <a:ext cx="537456" cy="314325"/>
+          </a:xfrm>
+          <a:prstGeom prst="rect">
+            <a:avLst/>
+          </a:prstGeom>
+          <a:noFill/>
+          <a:ln/>
+        </p:spPr>
+        <p:txBody>
+          <a:bodyPr wrap="none" lIns="102108" tIns="102108" rIns="102108" bIns="102108" rtlCol="0" anchor="ctr">
+            <a:spAutoFit/>
+          </a:bodyPr>
+          <a:lstStyle/>
+          <a:p>
+            <a:pPr algn="l" indent="0" marL="0">
+              <a:buNone/>
+            </a:pPr>
+            <a:r>
+              <a:rPr lang="en-US" sz="750" dirty="0">
+                <a:solidFill>
+                  <a:srgbClr val="495057"/>
+                </a:solidFill>
+                <a:latin typeface="Open Sans" pitchFamily="34" charset="0"/>
+                <a:ea typeface="Open Sans" pitchFamily="34" charset="-122"/>
+                <a:cs typeface="Open Sans" pitchFamily="34" charset="-120"/>
+              </a:rPr>
+              <a:t>5</a:t>
+            </a:r>
+            <a:endParaRPr lang="en-US" sz="750" dirty="0"/>
+          </a:p>
+        </p:txBody>
+      </p:sp>
+      <p:sp>
+        <p:nvSpPr>
+          <p:cNvPr id="33" name="Text 30"/>
+          <p:cNvSpPr/>
+          <p:nvPr/>
+        </p:nvSpPr>
+        <p:spPr>
+          <a:xfrm>
+            <a:off x="1308981" y="3464216"/>
+            <a:ext cx="1155055" cy="314325"/>
+          </a:xfrm>
+          <a:prstGeom prst="rect">
+            <a:avLst/>
+          </a:prstGeom>
+          <a:noFill/>
+          <a:ln/>
+        </p:spPr>
+        <p:txBody>
+          <a:bodyPr wrap="none" lIns="102108" tIns="102108" rIns="102108" bIns="102108" rtlCol="0" anchor="ctr">
+            <a:spAutoFit/>
+          </a:bodyPr>
+          <a:lstStyle/>
+          <a:p>
+            <a:pPr algn="l" indent="0" marL="0">
+              <a:buNone/>
+            </a:pPr>
+            <a:r>
+              <a:rPr lang="en-US" sz="750" dirty="0">
+                <a:solidFill>
+                  <a:srgbClr val="495057"/>
+                </a:solidFill>
+                <a:latin typeface="Open Sans" pitchFamily="34" charset="0"/>
+                <a:ea typeface="Open Sans" pitchFamily="34" charset="-122"/>
+                <a:cs typeface="Open Sans" pitchFamily="34" charset="-120"/>
+              </a:rPr>
+              <a:t>XGBoost</a:t>
+            </a:r>
+            <a:endParaRPr lang="en-US" sz="750" dirty="0"/>
+          </a:p>
+        </p:txBody>
+      </p:sp>
+      <p:sp>
+        <p:nvSpPr>
+          <p:cNvPr id="34" name="Text 31"/>
+          <p:cNvSpPr/>
+          <p:nvPr/>
+        </p:nvSpPr>
+        <p:spPr>
+          <a:xfrm>
+            <a:off x="2464036" y="3464216"/>
+            <a:ext cx="878570" cy="314325"/>
+          </a:xfrm>
+          <a:prstGeom prst="rect">
+            <a:avLst/>
+          </a:prstGeom>
+          <a:noFill/>
+          <a:ln/>
+        </p:spPr>
+        <p:txBody>
+          <a:bodyPr wrap="none" lIns="102108" tIns="102108" rIns="102108" bIns="102108" rtlCol="0" anchor="ctr">
+            <a:spAutoFit/>
+          </a:bodyPr>
+          <a:lstStyle/>
+          <a:p>
+            <a:pPr algn="l" indent="0" marL="0">
+              <a:buNone/>
+            </a:pPr>
+            <a:r>
+              <a:rPr lang="en-US" sz="750" dirty="0">
+                <a:solidFill>
+                  <a:srgbClr val="495057"/>
+                </a:solidFill>
+                <a:latin typeface="Open Sans" pitchFamily="34" charset="0"/>
+                <a:ea typeface="Open Sans" pitchFamily="34" charset="-122"/>
+                <a:cs typeface="Open Sans" pitchFamily="34" charset="-120"/>
+              </a:rPr>
+              <a:t>0.602</a:t>
+            </a:r>
+            <a:endParaRPr lang="en-US" sz="750" dirty="0"/>
+          </a:p>
+        </p:txBody>
+      </p:sp>
+      <p:sp>
+        <p:nvSpPr>
+          <p:cNvPr id="35" name="Text 32"/>
+          <p:cNvSpPr/>
+          <p:nvPr/>
+        </p:nvSpPr>
+        <p:spPr>
+          <a:xfrm>
+            <a:off x="3342605" y="3464216"/>
+            <a:ext cx="966415" cy="314325"/>
+          </a:xfrm>
+          <a:prstGeom prst="rect">
+            <a:avLst/>
+          </a:prstGeom>
+          <a:noFill/>
+          <a:ln/>
+        </p:spPr>
+        <p:txBody>
+          <a:bodyPr wrap="none" lIns="102108" tIns="102108" rIns="102108" bIns="102108" rtlCol="0" anchor="ctr">
+            <a:spAutoFit/>
+          </a:bodyPr>
+          <a:lstStyle/>
+          <a:p>
+            <a:pPr algn="l" indent="0" marL="0">
+              <a:buNone/>
+            </a:pPr>
+            <a:r>
+              <a:rPr lang="en-US" sz="750" dirty="0">
+                <a:solidFill>
+                  <a:srgbClr val="495057"/>
+                </a:solidFill>
+                <a:latin typeface="Open Sans" pitchFamily="34" charset="0"/>
+                <a:ea typeface="Open Sans" pitchFamily="34" charset="-122"/>
+                <a:cs typeface="Open Sans" pitchFamily="34" charset="-120"/>
+              </a:rPr>
+              <a:t>0.978</a:t>
+            </a:r>
+            <a:endParaRPr lang="en-US" sz="750" dirty="0"/>
+          </a:p>
+        </p:txBody>
+      </p:sp>
+      <p:sp>
+        <p:nvSpPr>
+          <p:cNvPr id="36" name="Text 33"/>
+          <p:cNvSpPr/>
+          <p:nvPr/>
+        </p:nvSpPr>
+        <p:spPr>
+          <a:xfrm>
+            <a:off x="4309021" y="3464216"/>
+            <a:ext cx="708096" cy="314325"/>
+          </a:xfrm>
+          <a:prstGeom prst="rect">
+            <a:avLst/>
+          </a:prstGeom>
+          <a:noFill/>
+          <a:ln/>
+        </p:spPr>
+        <p:txBody>
+          <a:bodyPr wrap="none" lIns="102108" tIns="102108" rIns="102108" bIns="102108" rtlCol="0" anchor="ctr">
+            <a:spAutoFit/>
+          </a:bodyPr>
+          <a:lstStyle/>
+          <a:p>
+            <a:pPr algn="l" indent="0" marL="0">
+              <a:buNone/>
+            </a:pPr>
+            <a:r>
+              <a:rPr lang="en-US" sz="750" dirty="0">
+                <a:solidFill>
+                  <a:srgbClr val="495057"/>
+                </a:solidFill>
+                <a:latin typeface="Open Sans" pitchFamily="34" charset="0"/>
+                <a:ea typeface="Open Sans" pitchFamily="34" charset="-122"/>
+                <a:cs typeface="Open Sans" pitchFamily="34" charset="-120"/>
+              </a:rPr>
+              <a:t>0.857</a:t>
+            </a:r>
+            <a:endParaRPr lang="en-US" sz="750" dirty="0"/>
+          </a:p>
+        </p:txBody>
+      </p:sp>
+      <p:sp>
+        <p:nvSpPr>
+          <p:cNvPr id="37" name="Text 34"/>
+          <p:cNvSpPr/>
+          <p:nvPr/>
+        </p:nvSpPr>
+        <p:spPr>
+          <a:xfrm>
+            <a:off x="771525" y="3924988"/>
+            <a:ext cx="4245592" cy="160009"/>
+          </a:xfrm>
+          <a:prstGeom prst="rect">
+            <a:avLst/>
+          </a:prstGeom>
+          <a:noFill/>
+          <a:ln/>
+        </p:spPr>
+        <p:txBody>
+          <a:bodyPr wrap="none" lIns="0" tIns="0" rIns="0" bIns="0" rtlCol="0" anchor="t">
+            <a:spAutoFit/>
+          </a:bodyPr>
+          <a:lstStyle/>
+          <a:p>
+            <a:pPr algn="l" indent="0" marL="0">
+              <a:lnSpc>
+                <a:spcPct val="128000"/>
+              </a:lnSpc>
+              <a:buNone/>
+            </a:pPr>
+            <a:r>
+              <a:rPr lang="en-US" sz="750" dirty="0">
+                <a:solidFill>
+                  <a:srgbClr val="495057"/>
+                </a:solidFill>
+                <a:latin typeface="Open Sans Light" pitchFamily="34" charset="0"/>
+                <a:ea typeface="Open Sans Light" pitchFamily="34" charset="-122"/>
+                <a:cs typeface="Open Sans Light" pitchFamily="34" charset="-120"/>
+              </a:rPr>
+              <a:t>* 불균형 데이터의 핵심 지표인 </a:t>
+            </a:r>
+            <a:r>
+              <a:rPr lang="en-US" sz="700" b="1" dirty="0">
+                <a:solidFill>
+                  <a:srgbClr val="087F5B"/>
+                </a:solidFill>
+                <a:latin typeface="Open Sans Bold" pitchFamily="34" charset="0"/>
+                <a:ea typeface="Open Sans Bold" pitchFamily="34" charset="-122"/>
+                <a:cs typeface="Open Sans Bold" pitchFamily="34" charset="-120"/>
+              </a:rPr>
+              <a:t>F1-Score</a:t>
+            </a:r>
+            <a:r>
+              <a:rPr lang="en-US" sz="750" dirty="0">
+                <a:solidFill>
+                  <a:srgbClr val="495057"/>
+                </a:solidFill>
+                <a:latin typeface="Open Sans Light" pitchFamily="34" charset="0"/>
+                <a:ea typeface="Open Sans Light" pitchFamily="34" charset="-122"/>
+                <a:cs typeface="Open Sans Light" pitchFamily="34" charset="-120"/>
+              </a:rPr>
+              <a:t> 기준으로 산정된 순위</a:t>
+            </a:r>
+            <a:endParaRPr lang="en-US" sz="750" dirty="0"/>
+          </a:p>
+        </p:txBody>
+      </p:sp>
+      <p:sp>
+        <p:nvSpPr>
+          <p:cNvPr id="38" name="Shape 35"/>
+          <p:cNvSpPr/>
+          <p:nvPr/>
+        </p:nvSpPr>
+        <p:spPr>
+          <a:xfrm>
+            <a:off x="5445742" y="1731857"/>
+            <a:ext cx="3183908" cy="3000375"/>
+          </a:xfrm>
+          <a:prstGeom prst="rect">
+            <a:avLst/>
+          </a:prstGeom>
+          <a:solidFill>
+            <a:srgbClr val="FFFFFF"/>
+          </a:solidFill>
+          <a:ln/>
+        </p:spPr>
+      </p:sp>
+      <p:sp>
+        <p:nvSpPr>
+          <p:cNvPr id="39" name="Shape 36"/>
+          <p:cNvSpPr/>
+          <p:nvPr/>
+        </p:nvSpPr>
+        <p:spPr>
+          <a:xfrm>
+            <a:off x="5445742" y="1731857"/>
+            <a:ext cx="14288" cy="3000375"/>
+          </a:xfrm>
+          <a:prstGeom prst="rect">
+            <a:avLst/>
+          </a:prstGeom>
+          <a:solidFill>
+            <a:srgbClr val="212529"/>
+          </a:solidFill>
+          <a:ln/>
+        </p:spPr>
+      </p:sp>
       <p:pic>
         <p:nvPicPr>
-          <p:cNvPr id="3" name="Image 1" descr="preencoded.png">    </p:cNvPr>
+          <p:cNvPr id="40" name="Image 1" descr="preencoded.png">    </p:cNvPr>
           <p:cNvPicPr>
             <a:picLocks noChangeAspect="1"/>
           </p:cNvPicPr>
@@ -2455,14 +8940,80 @@
         </p:blipFill>
         <p:spPr>
           <a:xfrm>
-            <a:off x="0" y="0"/>
-            <a:ext cx="9144000" cy="5143500"/>
+            <a:off x="5602905" y="1874732"/>
+            <a:ext cx="2882503" cy="2500313"/>
           </a:xfrm>
           <a:prstGeom prst="rect">
             <a:avLst/>
           </a:prstGeom>
         </p:spPr>
       </p:pic>
+      <p:sp>
+        <p:nvSpPr>
+          <p:cNvPr id="41" name="Text 37"/>
+          <p:cNvSpPr/>
+          <p:nvPr/>
+        </p:nvSpPr>
+        <p:spPr>
+          <a:xfrm>
+            <a:off x="5602905" y="4446482"/>
+            <a:ext cx="2883870" cy="320018"/>
+          </a:xfrm>
+          <a:prstGeom prst="rect">
+            <a:avLst/>
+          </a:prstGeom>
+          <a:noFill/>
+          <a:ln/>
+        </p:spPr>
+        <p:txBody>
+          <a:bodyPr wrap="square" lIns="0" tIns="0" rIns="0" bIns="0" rtlCol="0" anchor="t">
+            <a:spAutoFit/>
+          </a:bodyPr>
+          <a:lstStyle/>
+          <a:p>
+            <a:pPr algn="l" indent="0" marL="0">
+              <a:lnSpc>
+                <a:spcPct val="128000"/>
+              </a:lnSpc>
+              <a:buNone/>
+            </a:pPr>
+            <a:r>
+              <a:rPr lang="en-US" sz="700" b="1" dirty="0">
+                <a:solidFill>
+                  <a:srgbClr val="087F5B"/>
+                </a:solidFill>
+                <a:latin typeface="Open Sans Bold" pitchFamily="34" charset="0"/>
+                <a:ea typeface="Open Sans Bold" pitchFamily="34" charset="-122"/>
+                <a:cs typeface="Open Sans Bold" pitchFamily="34" charset="-120"/>
+              </a:rPr>
+              <a:t>KNN</a:t>
+            </a:r>
+            <a:r>
+              <a:rPr lang="en-US" sz="750" dirty="0">
+                <a:solidFill>
+                  <a:srgbClr val="495057"/>
+                </a:solidFill>
+                <a:latin typeface="Open Sans Light" pitchFamily="34" charset="0"/>
+                <a:ea typeface="Open Sans Light" pitchFamily="34" charset="-122"/>
+                <a:cs typeface="Open Sans Light" pitchFamily="34" charset="-120"/>
+              </a:rPr>
+              <a:t>이 이웃 기반 유사도 분석을 통해 가장 정밀한 탐지 성능을 </a:t>
+            </a:r>
+            <a:r>
+              <a:rPr lang="en-US" sz="750" dirty="0">
+                <a:solidFill>
+                  <a:srgbClr val="495057"/>
+                </a:solidFill>
+                <a:latin typeface="Open Sans Light" pitchFamily="34" charset="0"/>
+                <a:ea typeface="Open Sans Light" pitchFamily="34" charset="-122"/>
+                <a:cs typeface="Open Sans Light" pitchFamily="34" charset="-120"/>
+              </a:rPr>
+              <a:t>기록</a:t>
+            </a:r>
+            <a:endParaRPr lang="en-US" sz="700" dirty="0"/>
+          </a:p>
+        </p:txBody>
+      </p:sp>
     </p:spTree>
   </p:cSld>
   <p:clrMapOvr>
@@ -2504,17 +9055,98 @@
         </p:blipFill>
         <p:spPr>
           <a:xfrm>
-            <a:off x="0" y="0"/>
-            <a:ext cx="9144000" cy="5143500"/>
+            <a:off x="57150" y="57150"/>
+            <a:ext cx="9029700" cy="5143500"/>
           </a:xfrm>
           <a:prstGeom prst="rect">
             <a:avLst/>
           </a:prstGeom>
         </p:spPr>
       </p:pic>
+      <p:sp>
+        <p:nvSpPr>
+          <p:cNvPr id="3" name="Text 0"/>
+          <p:cNvSpPr/>
+          <p:nvPr/>
+        </p:nvSpPr>
+        <p:spPr>
+          <a:xfrm>
+            <a:off x="628650" y="770381"/>
+            <a:ext cx="8572500" cy="462558"/>
+          </a:xfrm>
+          <a:prstGeom prst="rect">
+            <a:avLst/>
+          </a:prstGeom>
+          <a:noFill/>
+          <a:ln/>
+        </p:spPr>
+        <p:txBody>
+          <a:bodyPr wrap="square" lIns="170053" tIns="0" rIns="0" bIns="0" rtlCol="0" anchor="t">
+            <a:spAutoFit/>
+          </a:bodyPr>
+          <a:lstStyle/>
+          <a:p>
+            <a:pPr algn="l" indent="0" marL="0">
+              <a:buNone/>
+            </a:pPr>
+            <a:r>
+              <a:rPr lang="en-US" sz="2450" b="1" dirty="0">
+                <a:solidFill>
+                  <a:srgbClr val="212529"/>
+                </a:solidFill>
+                <a:latin typeface="Montserrat Bold" pitchFamily="34" charset="0"/>
+                <a:ea typeface="Montserrat Bold" pitchFamily="34" charset="-122"/>
+                <a:cs typeface="Montserrat Bold" pitchFamily="34" charset="-120"/>
+              </a:rPr>
+              <a:t>결론 및 향후 과제: 데이터 이해가 핵심</a:t>
+            </a:r>
+            <a:endParaRPr lang="en-US" sz="2450" dirty="0"/>
+          </a:p>
+        </p:txBody>
+      </p:sp>
+      <p:sp>
+        <p:nvSpPr>
+          <p:cNvPr id="4" name="Shape 1"/>
+          <p:cNvSpPr/>
+          <p:nvPr/>
+        </p:nvSpPr>
+        <p:spPr>
+          <a:xfrm>
+            <a:off x="628650" y="1588982"/>
+            <a:ext cx="3971925" cy="1071563"/>
+          </a:xfrm>
+          <a:prstGeom prst="rect">
+            <a:avLst/>
+          </a:prstGeom>
+          <a:solidFill>
+            <a:srgbClr val="FFFFFF"/>
+          </a:solidFill>
+          <a:ln/>
+        </p:spPr>
+      </p:sp>
+      <p:sp>
+        <p:nvSpPr>
+          <p:cNvPr id="5" name="Shape 2"/>
+          <p:cNvSpPr/>
+          <p:nvPr/>
+        </p:nvSpPr>
+        <p:spPr>
+          <a:xfrm>
+            <a:off x="628650" y="1588982"/>
+            <a:ext cx="14288" cy="1071563"/>
+          </a:xfrm>
+          <a:prstGeom prst="rect">
+            <a:avLst/>
+          </a:prstGeom>
+          <a:solidFill>
+            <a:srgbClr val="087F5B"/>
+          </a:solidFill>
+          <a:ln/>
+        </p:spPr>
+      </p:sp>
       <p:pic>
         <p:nvPicPr>
-          <p:cNvPr id="3" name="Image 1" descr="preencoded.png">    </p:cNvPr>
+          <p:cNvPr id="6" name="Image 1" descr="preencoded.png">    </p:cNvPr>
           <p:cNvPicPr>
             <a:picLocks noChangeAspect="1"/>
           </p:cNvPicPr>
@@ -2528,14 +9160,1032 @@
         </p:blipFill>
         <p:spPr>
           <a:xfrm>
-            <a:off x="0" y="0"/>
-            <a:ext cx="9144000" cy="5143500"/>
+            <a:off x="771525" y="1721141"/>
+            <a:ext cx="107156" cy="142875"/>
           </a:xfrm>
           <a:prstGeom prst="rect">
             <a:avLst/>
           </a:prstGeom>
         </p:spPr>
       </p:pic>
+      <p:sp>
+        <p:nvSpPr>
+          <p:cNvPr id="7" name="Text 3"/>
+          <p:cNvSpPr/>
+          <p:nvPr/>
+        </p:nvSpPr>
+        <p:spPr>
+          <a:xfrm>
+            <a:off x="964406" y="1696138"/>
+            <a:ext cx="1225153" cy="192881"/>
+          </a:xfrm>
+          <a:prstGeom prst="rect">
+            <a:avLst/>
+          </a:prstGeom>
+          <a:noFill/>
+          <a:ln/>
+        </p:spPr>
+        <p:txBody>
+          <a:bodyPr wrap="none" lIns="0" tIns="0" rIns="0" bIns="0" rtlCol="0" anchor="t">
+            <a:spAutoFit/>
+          </a:bodyPr>
+          <a:lstStyle/>
+          <a:p>
+            <a:pPr algn="l" indent="0" marL="0">
+              <a:buNone/>
+            </a:pPr>
+            <a:r>
+              <a:rPr lang="en-US" sz="1000" b="1" dirty="0">
+                <a:solidFill>
+                  <a:srgbClr val="212529"/>
+                </a:solidFill>
+                <a:latin typeface="Montserrat Bold" pitchFamily="34" charset="0"/>
+                <a:ea typeface="Montserrat Bold" pitchFamily="34" charset="-122"/>
+                <a:cs typeface="Montserrat Bold" pitchFamily="34" charset="-120"/>
+              </a:rPr>
+              <a:t>정확도의 함정 탈피</a:t>
+            </a:r>
+            <a:endParaRPr lang="en-US" sz="1000" dirty="0"/>
+          </a:p>
+        </p:txBody>
+      </p:sp>
+      <p:sp>
+        <p:nvSpPr>
+          <p:cNvPr id="8" name="Text 4"/>
+          <p:cNvSpPr/>
+          <p:nvPr/>
+        </p:nvSpPr>
+        <p:spPr>
+          <a:xfrm>
+            <a:off x="771525" y="1974745"/>
+            <a:ext cx="3686175" cy="365727"/>
+          </a:xfrm>
+          <a:prstGeom prst="rect">
+            <a:avLst/>
+          </a:prstGeom>
+          <a:noFill/>
+          <a:ln/>
+        </p:spPr>
+        <p:txBody>
+          <a:bodyPr wrap="square" lIns="0" tIns="0" rIns="0" bIns="0" rtlCol="0" anchor="t">
+            <a:spAutoFit/>
+          </a:bodyPr>
+          <a:lstStyle/>
+          <a:p>
+            <a:pPr algn="l" indent="0" marL="0">
+              <a:lnSpc>
+                <a:spcPct val="128000"/>
+              </a:lnSpc>
+              <a:buNone/>
+            </a:pPr>
+            <a:r>
+              <a:rPr lang="en-US" sz="850" dirty="0">
+                <a:solidFill>
+                  <a:srgbClr val="495057"/>
+                </a:solidFill>
+                <a:latin typeface="Open Sans Light" pitchFamily="34" charset="0"/>
+                <a:ea typeface="Open Sans Light" pitchFamily="34" charset="-122"/>
+                <a:cs typeface="Open Sans Light" pitchFamily="34" charset="-120"/>
+              </a:rPr>
+              <a:t>불균형 데이터에서 Accuracy는 무의미</a:t>
+            </a:r>
+            <a:r>
+              <a:rPr lang="en-US" sz="850" dirty="0">
+                <a:solidFill>
+                  <a:srgbClr val="495057"/>
+                </a:solidFill>
+                <a:latin typeface="Open Sans Light" pitchFamily="34" charset="0"/>
+                <a:ea typeface="Open Sans Light" pitchFamily="34" charset="-122"/>
+                <a:cs typeface="Open Sans Light" pitchFamily="34" charset="-120"/>
+              </a:rPr>
+              <a:t>
+</a:t>
+            </a:r>
+            <a:r>
+              <a:rPr lang="en-US" sz="850" dirty="0">
+                <a:solidFill>
+                  <a:srgbClr val="495057"/>
+                </a:solidFill>
+                <a:latin typeface="Open Sans Light" pitchFamily="34" charset="0"/>
+                <a:ea typeface="Open Sans Light" pitchFamily="34" charset="-122"/>
+                <a:cs typeface="Open Sans Light" pitchFamily="34" charset="-120"/>
+              </a:rPr>
+              <a:t>비즈니스 목적에 맞는 </a:t>
+            </a:r>
+            <a:r>
+              <a:rPr lang="en-US" sz="850" dirty="0">
+                <a:solidFill>
+                  <a:srgbClr val="495057"/>
+                </a:solidFill>
+                <a:latin typeface="Open Sans" pitchFamily="34" charset="0"/>
+                <a:ea typeface="Open Sans" pitchFamily="34" charset="-122"/>
+                <a:cs typeface="Open Sans" pitchFamily="34" charset="-120"/>
+              </a:rPr>
+              <a:t>F1-Score와 Recall</a:t>
+            </a:r>
+            <a:r>
+              <a:rPr lang="en-US" sz="850" dirty="0">
+                <a:solidFill>
+                  <a:srgbClr val="495057"/>
+                </a:solidFill>
+                <a:latin typeface="Open Sans Light" pitchFamily="34" charset="0"/>
+                <a:ea typeface="Open Sans Light" pitchFamily="34" charset="-122"/>
+                <a:cs typeface="Open Sans Light" pitchFamily="34" charset="-120"/>
+              </a:rPr>
+              <a:t> 중심의 평가 체계 수립이 필수</a:t>
+            </a:r>
+            <a:endParaRPr lang="en-US" sz="850" dirty="0"/>
+          </a:p>
+        </p:txBody>
+      </p:sp>
+      <p:sp>
+        <p:nvSpPr>
+          <p:cNvPr id="9" name="Shape 5"/>
+          <p:cNvSpPr/>
+          <p:nvPr/>
+        </p:nvSpPr>
+        <p:spPr>
+          <a:xfrm>
+            <a:off x="4657725" y="1588982"/>
+            <a:ext cx="3971925" cy="1071563"/>
+          </a:xfrm>
+          <a:prstGeom prst="rect">
+            <a:avLst/>
+          </a:prstGeom>
+          <a:solidFill>
+            <a:srgbClr val="FFFFFF"/>
+          </a:solidFill>
+          <a:ln/>
+        </p:spPr>
+      </p:sp>
+      <p:sp>
+        <p:nvSpPr>
+          <p:cNvPr id="10" name="Shape 6"/>
+          <p:cNvSpPr/>
+          <p:nvPr/>
+        </p:nvSpPr>
+        <p:spPr>
+          <a:xfrm>
+            <a:off x="4657725" y="1588982"/>
+            <a:ext cx="14288" cy="1071563"/>
+          </a:xfrm>
+          <a:prstGeom prst="rect">
+            <a:avLst/>
+          </a:prstGeom>
+          <a:solidFill>
+            <a:srgbClr val="087F5B"/>
+          </a:solidFill>
+          <a:ln/>
+        </p:spPr>
+      </p:sp>
+      <p:pic>
+        <p:nvPicPr>
+          <p:cNvPr id="11" name="Image 2" descr="preencoded.png">    </p:cNvPr>
+          <p:cNvPicPr>
+            <a:picLocks noChangeAspect="1"/>
+          </p:cNvPicPr>
+          <p:nvPr/>
+        </p:nvPicPr>
+        <p:blipFill>
+          <a:blip r:embed="rId3"/>
+          <a:stretch>
+            <a:fillRect/>
+          </a:stretch>
+        </p:blipFill>
+        <p:spPr>
+          <a:xfrm>
+            <a:off x="4800600" y="1721141"/>
+            <a:ext cx="142875" cy="142875"/>
+          </a:xfrm>
+          <a:prstGeom prst="rect">
+            <a:avLst/>
+          </a:prstGeom>
+        </p:spPr>
+      </p:pic>
+      <p:sp>
+        <p:nvSpPr>
+          <p:cNvPr id="12" name="Text 7"/>
+          <p:cNvSpPr/>
+          <p:nvPr/>
+        </p:nvSpPr>
+        <p:spPr>
+          <a:xfrm>
+            <a:off x="5029200" y="1696138"/>
+            <a:ext cx="1225153" cy="192881"/>
+          </a:xfrm>
+          <a:prstGeom prst="rect">
+            <a:avLst/>
+          </a:prstGeom>
+          <a:noFill/>
+          <a:ln/>
+        </p:spPr>
+        <p:txBody>
+          <a:bodyPr wrap="none" lIns="0" tIns="0" rIns="0" bIns="0" rtlCol="0" anchor="t">
+            <a:spAutoFit/>
+          </a:bodyPr>
+          <a:lstStyle/>
+          <a:p>
+            <a:pPr algn="l" indent="0" marL="0">
+              <a:buNone/>
+            </a:pPr>
+            <a:r>
+              <a:rPr lang="en-US" sz="1000" b="1" dirty="0">
+                <a:solidFill>
+                  <a:srgbClr val="212529"/>
+                </a:solidFill>
+                <a:latin typeface="Montserrat Bold" pitchFamily="34" charset="0"/>
+                <a:ea typeface="Montserrat Bold" pitchFamily="34" charset="-122"/>
+                <a:cs typeface="Montserrat Bold" pitchFamily="34" charset="-120"/>
+              </a:rPr>
+              <a:t>전략적 데이터 증강</a:t>
+            </a:r>
+            <a:endParaRPr lang="en-US" sz="1000" dirty="0"/>
+          </a:p>
+        </p:txBody>
+      </p:sp>
+      <p:sp>
+        <p:nvSpPr>
+          <p:cNvPr id="13" name="Text 8"/>
+          <p:cNvSpPr/>
+          <p:nvPr/>
+        </p:nvSpPr>
+        <p:spPr>
+          <a:xfrm>
+            <a:off x="4800600" y="1974745"/>
+            <a:ext cx="3686175" cy="365727"/>
+          </a:xfrm>
+          <a:prstGeom prst="rect">
+            <a:avLst/>
+          </a:prstGeom>
+          <a:noFill/>
+          <a:ln/>
+        </p:spPr>
+        <p:txBody>
+          <a:bodyPr wrap="square" lIns="0" tIns="0" rIns="0" bIns="0" rtlCol="0" anchor="t">
+            <a:spAutoFit/>
+          </a:bodyPr>
+          <a:lstStyle/>
+          <a:p>
+            <a:pPr algn="l" indent="0" marL="0">
+              <a:lnSpc>
+                <a:spcPct val="128000"/>
+              </a:lnSpc>
+              <a:buNone/>
+            </a:pPr>
+            <a:r>
+              <a:rPr lang="en-US" sz="850" dirty="0">
+                <a:solidFill>
+                  <a:srgbClr val="495057"/>
+                </a:solidFill>
+                <a:latin typeface="Open Sans Light" pitchFamily="34" charset="0"/>
+                <a:ea typeface="Open Sans Light" pitchFamily="34" charset="-122"/>
+                <a:cs typeface="Open Sans Light" pitchFamily="34" charset="-120"/>
+              </a:rPr>
+              <a:t>SMOTE는 강력하지만 </a:t>
+            </a:r>
+            <a:r>
+              <a:rPr lang="en-US" sz="850" dirty="0">
+                <a:solidFill>
+                  <a:srgbClr val="495057"/>
+                </a:solidFill>
+                <a:latin typeface="Open Sans" pitchFamily="34" charset="0"/>
+                <a:ea typeface="Open Sans" pitchFamily="34" charset="-122"/>
+                <a:cs typeface="Open Sans" pitchFamily="34" charset="-120"/>
+              </a:rPr>
+              <a:t>학습 데이터에만 적용</a:t>
+            </a:r>
+            <a:r>
+              <a:rPr lang="en-US" sz="850" dirty="0">
+                <a:solidFill>
+                  <a:srgbClr val="495057"/>
+                </a:solidFill>
+                <a:latin typeface="Open Sans Light" pitchFamily="34" charset="0"/>
+                <a:ea typeface="Open Sans Light" pitchFamily="34" charset="-122"/>
+                <a:cs typeface="Open Sans Light" pitchFamily="34" charset="-120"/>
+              </a:rPr>
+              <a:t>
+</a:t>
+            </a:r>
+            <a:r>
+              <a:rPr lang="en-US" sz="850" dirty="0">
+                <a:solidFill>
+                  <a:srgbClr val="495057"/>
+                </a:solidFill>
+                <a:latin typeface="Open Sans Light" pitchFamily="34" charset="0"/>
+                <a:ea typeface="Open Sans Light" pitchFamily="34" charset="-122"/>
+                <a:cs typeface="Open Sans Light" pitchFamily="34" charset="-120"/>
+              </a:rPr>
+              <a:t>테스트 데이터 오염 방지가 모델 신뢰성의 핵심</a:t>
+            </a:r>
+            <a:endParaRPr lang="en-US" sz="850" dirty="0"/>
+          </a:p>
+        </p:txBody>
+      </p:sp>
+      <p:sp>
+        <p:nvSpPr>
+          <p:cNvPr id="14" name="Shape 9"/>
+          <p:cNvSpPr/>
+          <p:nvPr/>
+        </p:nvSpPr>
+        <p:spPr>
+          <a:xfrm>
+            <a:off x="628650" y="2717695"/>
+            <a:ext cx="3971925" cy="1071563"/>
+          </a:xfrm>
+          <a:prstGeom prst="rect">
+            <a:avLst/>
+          </a:prstGeom>
+          <a:solidFill>
+            <a:srgbClr val="FFFFFF"/>
+          </a:solidFill>
+          <a:ln/>
+        </p:spPr>
+      </p:sp>
+      <p:sp>
+        <p:nvSpPr>
+          <p:cNvPr id="15" name="Shape 10"/>
+          <p:cNvSpPr/>
+          <p:nvPr/>
+        </p:nvSpPr>
+        <p:spPr>
+          <a:xfrm>
+            <a:off x="628650" y="2717695"/>
+            <a:ext cx="14288" cy="1071563"/>
+          </a:xfrm>
+          <a:prstGeom prst="rect">
+            <a:avLst/>
+          </a:prstGeom>
+          <a:solidFill>
+            <a:srgbClr val="087F5B"/>
+          </a:solidFill>
+          <a:ln/>
+        </p:spPr>
+      </p:sp>
+      <p:pic>
+        <p:nvPicPr>
+          <p:cNvPr id="16" name="Image 3" descr="preencoded.png">    </p:cNvPr>
+          <p:cNvPicPr>
+            <a:picLocks noChangeAspect="1"/>
+          </p:cNvPicPr>
+          <p:nvPr/>
+        </p:nvPicPr>
+        <p:blipFill>
+          <a:blip r:embed="rId4"/>
+          <a:stretch>
+            <a:fillRect/>
+          </a:stretch>
+        </p:blipFill>
+        <p:spPr>
+          <a:xfrm>
+            <a:off x="771525" y="2849854"/>
+            <a:ext cx="142875" cy="142875"/>
+          </a:xfrm>
+          <a:prstGeom prst="rect">
+            <a:avLst/>
+          </a:prstGeom>
+        </p:spPr>
+      </p:pic>
+      <p:sp>
+        <p:nvSpPr>
+          <p:cNvPr id="17" name="Text 11"/>
+          <p:cNvSpPr/>
+          <p:nvPr/>
+        </p:nvSpPr>
+        <p:spPr>
+          <a:xfrm>
+            <a:off x="1000125" y="2824851"/>
+            <a:ext cx="1105495" cy="192881"/>
+          </a:xfrm>
+          <a:prstGeom prst="rect">
+            <a:avLst/>
+          </a:prstGeom>
+          <a:noFill/>
+          <a:ln/>
+        </p:spPr>
+        <p:txBody>
+          <a:bodyPr wrap="none" lIns="0" tIns="0" rIns="0" bIns="0" rtlCol="0" anchor="t">
+            <a:spAutoFit/>
+          </a:bodyPr>
+          <a:lstStyle/>
+          <a:p>
+            <a:pPr algn="l" indent="0" marL="0">
+              <a:buNone/>
+            </a:pPr>
+            <a:r>
+              <a:rPr lang="en-US" sz="1000" b="1" dirty="0">
+                <a:solidFill>
+                  <a:srgbClr val="212529"/>
+                </a:solidFill>
+                <a:latin typeface="Montserrat Bold" pitchFamily="34" charset="0"/>
+                <a:ea typeface="Montserrat Bold" pitchFamily="34" charset="-122"/>
+                <a:cs typeface="Montserrat Bold" pitchFamily="34" charset="-120"/>
+              </a:rPr>
+              <a:t>Recall 우선 원칙</a:t>
+            </a:r>
+            <a:endParaRPr lang="en-US" sz="1000" dirty="0"/>
+          </a:p>
+        </p:txBody>
+      </p:sp>
+      <p:sp>
+        <p:nvSpPr>
+          <p:cNvPr id="18" name="Text 12"/>
+          <p:cNvSpPr/>
+          <p:nvPr/>
+        </p:nvSpPr>
+        <p:spPr>
+          <a:xfrm>
+            <a:off x="771525" y="3103457"/>
+            <a:ext cx="3686175" cy="365727"/>
+          </a:xfrm>
+          <a:prstGeom prst="rect">
+            <a:avLst/>
+          </a:prstGeom>
+          <a:noFill/>
+          <a:ln/>
+        </p:spPr>
+        <p:txBody>
+          <a:bodyPr wrap="square" lIns="0" tIns="0" rIns="0" bIns="0" rtlCol="0" anchor="t">
+            <a:spAutoFit/>
+          </a:bodyPr>
+          <a:lstStyle/>
+          <a:p>
+            <a:pPr algn="l" indent="0" marL="0">
+              <a:lnSpc>
+                <a:spcPct val="128000"/>
+              </a:lnSpc>
+              <a:buNone/>
+            </a:pPr>
+            <a:r>
+              <a:rPr lang="en-US" sz="850" dirty="0">
+                <a:solidFill>
+                  <a:srgbClr val="495057"/>
+                </a:solidFill>
+                <a:latin typeface="Open Sans Light" pitchFamily="34" charset="0"/>
+                <a:ea typeface="Open Sans Light" pitchFamily="34" charset="-122"/>
+                <a:cs typeface="Open Sans Light" pitchFamily="34" charset="-120"/>
+              </a:rPr>
+              <a:t>이상거래 탐지에서는 사기를 놓치는 비용(FN)이 오탐 비용(FP)보다 큼</a:t>
+            </a:r>
+            <a:r>
+              <a:rPr lang="en-US" sz="850" dirty="0">
+                <a:solidFill>
+                  <a:srgbClr val="495057"/>
+                </a:solidFill>
+                <a:latin typeface="Open Sans Light" pitchFamily="34" charset="0"/>
+                <a:ea typeface="Open Sans Light" pitchFamily="34" charset="-122"/>
+                <a:cs typeface="Open Sans Light" pitchFamily="34" charset="-120"/>
+              </a:rPr>
+              <a:t>
+</a:t>
+            </a:r>
+            <a:r>
+              <a:rPr lang="en-US" sz="850" dirty="0">
+                <a:solidFill>
+                  <a:srgbClr val="495057"/>
+                </a:solidFill>
+                <a:latin typeface="Open Sans" pitchFamily="34" charset="0"/>
+                <a:ea typeface="Open Sans" pitchFamily="34" charset="-122"/>
+                <a:cs typeface="Open Sans" pitchFamily="34" charset="-120"/>
+              </a:rPr>
+              <a:t>Recall(재현율)</a:t>
+            </a:r>
+            <a:r>
+              <a:rPr lang="en-US" sz="850" dirty="0">
+                <a:solidFill>
+                  <a:srgbClr val="495057"/>
+                </a:solidFill>
+                <a:latin typeface="Open Sans Light" pitchFamily="34" charset="0"/>
+                <a:ea typeface="Open Sans Light" pitchFamily="34" charset="-122"/>
+                <a:cs typeface="Open Sans Light" pitchFamily="34" charset="-120"/>
+              </a:rPr>
+              <a:t>을 최우선으로 최적화 필요</a:t>
+            </a:r>
+            <a:endParaRPr lang="en-US" sz="850" dirty="0"/>
+          </a:p>
+        </p:txBody>
+      </p:sp>
+      <p:sp>
+        <p:nvSpPr>
+          <p:cNvPr id="19" name="Shape 13"/>
+          <p:cNvSpPr/>
+          <p:nvPr/>
+        </p:nvSpPr>
+        <p:spPr>
+          <a:xfrm>
+            <a:off x="4657725" y="2717695"/>
+            <a:ext cx="3971925" cy="1071563"/>
+          </a:xfrm>
+          <a:prstGeom prst="rect">
+            <a:avLst/>
+          </a:prstGeom>
+          <a:solidFill>
+            <a:srgbClr val="FFFFFF"/>
+          </a:solidFill>
+          <a:ln/>
+        </p:spPr>
+      </p:sp>
+      <p:sp>
+        <p:nvSpPr>
+          <p:cNvPr id="20" name="Shape 14"/>
+          <p:cNvSpPr/>
+          <p:nvPr/>
+        </p:nvSpPr>
+        <p:spPr>
+          <a:xfrm>
+            <a:off x="4657725" y="2717695"/>
+            <a:ext cx="14288" cy="1071563"/>
+          </a:xfrm>
+          <a:prstGeom prst="rect">
+            <a:avLst/>
+          </a:prstGeom>
+          <a:solidFill>
+            <a:srgbClr val="087F5B"/>
+          </a:solidFill>
+          <a:ln/>
+        </p:spPr>
+      </p:sp>
+      <p:pic>
+        <p:nvPicPr>
+          <p:cNvPr id="21" name="Image 4" descr="preencoded.png">    </p:cNvPr>
+          <p:cNvPicPr>
+            <a:picLocks noChangeAspect="1"/>
+          </p:cNvPicPr>
+          <p:nvPr/>
+        </p:nvPicPr>
+        <p:blipFill>
+          <a:blip r:embed="rId5"/>
+          <a:stretch>
+            <a:fillRect/>
+          </a:stretch>
+        </p:blipFill>
+        <p:spPr>
+          <a:xfrm>
+            <a:off x="4800600" y="2849854"/>
+            <a:ext cx="178594" cy="142875"/>
+          </a:xfrm>
+          <a:prstGeom prst="rect">
+            <a:avLst/>
+          </a:prstGeom>
+        </p:spPr>
+      </p:pic>
+      <p:sp>
+        <p:nvSpPr>
+          <p:cNvPr id="22" name="Text 15"/>
+          <p:cNvSpPr/>
+          <p:nvPr/>
+        </p:nvSpPr>
+        <p:spPr>
+          <a:xfrm>
+            <a:off x="5064919" y="2824851"/>
+            <a:ext cx="1082278" cy="192881"/>
+          </a:xfrm>
+          <a:prstGeom prst="rect">
+            <a:avLst/>
+          </a:prstGeom>
+          <a:noFill/>
+          <a:ln/>
+        </p:spPr>
+        <p:txBody>
+          <a:bodyPr wrap="none" lIns="0" tIns="0" rIns="0" bIns="0" rtlCol="0" anchor="t">
+            <a:spAutoFit/>
+          </a:bodyPr>
+          <a:lstStyle/>
+          <a:p>
+            <a:pPr algn="l" indent="0" marL="0">
+              <a:buNone/>
+            </a:pPr>
+            <a:r>
+              <a:rPr lang="en-US" sz="1000" b="1" dirty="0">
+                <a:solidFill>
+                  <a:srgbClr val="212529"/>
+                </a:solidFill>
+                <a:latin typeface="Montserrat Bold" pitchFamily="34" charset="0"/>
+                <a:ea typeface="Montserrat Bold" pitchFamily="34" charset="-122"/>
+                <a:cs typeface="Montserrat Bold" pitchFamily="34" charset="-120"/>
+              </a:rPr>
+              <a:t>모델별 맞춤 전략</a:t>
+            </a:r>
+            <a:endParaRPr lang="en-US" sz="1000" dirty="0"/>
+          </a:p>
+        </p:txBody>
+      </p:sp>
+      <p:sp>
+        <p:nvSpPr>
+          <p:cNvPr id="23" name="Text 16"/>
+          <p:cNvSpPr/>
+          <p:nvPr/>
+        </p:nvSpPr>
+        <p:spPr>
+          <a:xfrm>
+            <a:off x="4800600" y="3103457"/>
+            <a:ext cx="3686175" cy="365727"/>
+          </a:xfrm>
+          <a:prstGeom prst="rect">
+            <a:avLst/>
+          </a:prstGeom>
+          <a:noFill/>
+          <a:ln/>
+        </p:spPr>
+        <p:txBody>
+          <a:bodyPr wrap="square" lIns="0" tIns="0" rIns="0" bIns="0" rtlCol="0" anchor="t">
+            <a:spAutoFit/>
+          </a:bodyPr>
+          <a:lstStyle/>
+          <a:p>
+            <a:pPr algn="l" indent="0" marL="0">
+              <a:lnSpc>
+                <a:spcPct val="128000"/>
+              </a:lnSpc>
+              <a:buNone/>
+            </a:pPr>
+            <a:r>
+              <a:rPr lang="en-US" sz="850" dirty="0">
+                <a:solidFill>
+                  <a:srgbClr val="495057"/>
+                </a:solidFill>
+                <a:latin typeface="Open Sans Light" pitchFamily="34" charset="0"/>
+                <a:ea typeface="Open Sans Light" pitchFamily="34" charset="-122"/>
+                <a:cs typeface="Open Sans Light" pitchFamily="34" charset="-120"/>
+              </a:rPr>
+              <a:t>모든 모델에 동일한 전처리를 적용하기보다, </a:t>
+            </a:r>
+            <a:r>
+              <a:rPr lang="en-US" sz="850" dirty="0">
+                <a:solidFill>
+                  <a:srgbClr val="495057"/>
+                </a:solidFill>
+                <a:latin typeface="Open Sans" pitchFamily="34" charset="0"/>
+                <a:ea typeface="Open Sans" pitchFamily="34" charset="-122"/>
+                <a:cs typeface="Open Sans" pitchFamily="34" charset="-120"/>
+              </a:rPr>
+              <a:t>알고리즘의 특성(연산 복잡도, 가정 등)</a:t>
+            </a:r>
+            <a:r>
+              <a:rPr lang="en-US" sz="850" dirty="0">
+                <a:solidFill>
+                  <a:srgbClr val="495057"/>
+                </a:solidFill>
+                <a:latin typeface="Open Sans Light" pitchFamily="34" charset="0"/>
+                <a:ea typeface="Open Sans Light" pitchFamily="34" charset="-122"/>
+                <a:cs typeface="Open Sans Light" pitchFamily="34" charset="-120"/>
+              </a:rPr>
+              <a:t>에 맞는 개별 전략이 성능을 결정</a:t>
+            </a:r>
+            <a:endParaRPr lang="en-US" sz="850" dirty="0"/>
+          </a:p>
+        </p:txBody>
+      </p:sp>
+      <p:sp>
+        <p:nvSpPr>
+          <p:cNvPr id="24" name="Shape 17"/>
+          <p:cNvSpPr/>
+          <p:nvPr/>
+        </p:nvSpPr>
+        <p:spPr>
+          <a:xfrm>
+            <a:off x="628650" y="3860695"/>
+            <a:ext cx="8001000" cy="1042988"/>
+          </a:xfrm>
+          <a:prstGeom prst="rect">
+            <a:avLst/>
+          </a:prstGeom>
+          <a:solidFill>
+            <a:srgbClr val="212529"/>
+          </a:solidFill>
+          <a:ln/>
+        </p:spPr>
+      </p:sp>
+      <p:sp>
+        <p:nvSpPr>
+          <p:cNvPr id="25" name="Shape 18"/>
+          <p:cNvSpPr/>
+          <p:nvPr/>
+        </p:nvSpPr>
+        <p:spPr>
+          <a:xfrm>
+            <a:off x="628650" y="3860695"/>
+            <a:ext cx="14288" cy="1042988"/>
+          </a:xfrm>
+          <a:prstGeom prst="rect">
+            <a:avLst/>
+          </a:prstGeom>
+          <a:solidFill>
+            <a:srgbClr val="087F5B"/>
+          </a:solidFill>
+          <a:ln/>
+        </p:spPr>
+      </p:sp>
+      <p:sp>
+        <p:nvSpPr>
+          <p:cNvPr id="26" name="Text 19"/>
+          <p:cNvSpPr/>
+          <p:nvPr/>
+        </p:nvSpPr>
+        <p:spPr>
+          <a:xfrm>
+            <a:off x="885825" y="4003570"/>
+            <a:ext cx="7486650" cy="191095"/>
+          </a:xfrm>
+          <a:prstGeom prst="rect">
+            <a:avLst/>
+          </a:prstGeom>
+          <a:noFill/>
+          <a:ln/>
+        </p:spPr>
+        <p:txBody>
+          <a:bodyPr wrap="square" lIns="0" tIns="0" rIns="0" bIns="0" rtlCol="0" anchor="t">
+            <a:spAutoFit/>
+          </a:bodyPr>
+          <a:lstStyle/>
+          <a:p>
+            <a:pPr algn="l" indent="0" marL="0">
+              <a:buNone/>
+            </a:pPr>
+            <a:r>
+              <a:rPr lang="en-US" sz="1100" b="1" dirty="0">
+                <a:solidFill>
+                  <a:srgbClr val="087F5B"/>
+                </a:solidFill>
+                <a:latin typeface="Montserrat Bold" pitchFamily="34" charset="0"/>
+                <a:ea typeface="Montserrat Bold" pitchFamily="34" charset="-122"/>
+                <a:cs typeface="Montserrat Bold" pitchFamily="34" charset="-120"/>
+              </a:rPr>
+              <a:t>NEXT STEPS &amp; FUTURE WORK</a:t>
+            </a:r>
+            <a:endParaRPr lang="en-US" sz="1100" dirty="0"/>
+          </a:p>
+        </p:txBody>
+      </p:sp>
+      <p:sp>
+        <p:nvSpPr>
+          <p:cNvPr id="27" name="Text 20"/>
+          <p:cNvSpPr/>
+          <p:nvPr/>
+        </p:nvSpPr>
+        <p:spPr>
+          <a:xfrm>
+            <a:off x="885825" y="4280390"/>
+            <a:ext cx="2409816" cy="482203"/>
+          </a:xfrm>
+          <a:prstGeom prst="rect">
+            <a:avLst/>
+          </a:prstGeom>
+          <a:noFill/>
+          <a:ln/>
+        </p:spPr>
+        <p:txBody>
+          <a:bodyPr wrap="square" lIns="0" tIns="0" rIns="102108" bIns="0" rtlCol="0" anchor="t">
+            <a:spAutoFit/>
+          </a:bodyPr>
+          <a:lstStyle/>
+          <a:p>
+            <a:pPr algn="l" indent="0" marL="0">
+              <a:lnSpc>
+                <a:spcPct val="120000"/>
+              </a:lnSpc>
+              <a:buNone/>
+            </a:pPr>
+            <a:r>
+              <a:rPr lang="en-US" sz="800" dirty="0">
+                <a:solidFill>
+                  <a:srgbClr val="F8F9FA"/>
+                </a:solidFill>
+                <a:latin typeface="Open Sans" pitchFamily="34" charset="0"/>
+                <a:ea typeface="Open Sans" pitchFamily="34" charset="-122"/>
+                <a:cs typeface="Open Sans" pitchFamily="34" charset="-120"/>
+              </a:rPr>
+              <a:t>피처 엔지니어링 강화</a:t>
+            </a:r>
+            <a:r>
+              <a:rPr lang="en-US" sz="800" dirty="0">
+                <a:solidFill>
+                  <a:srgbClr val="F8F9FA"/>
+                </a:solidFill>
+                <a:latin typeface="Open Sans Light" pitchFamily="34" charset="0"/>
+                <a:ea typeface="Open Sans Light" pitchFamily="34" charset="-122"/>
+                <a:cs typeface="Open Sans Light" pitchFamily="34" charset="-120"/>
+              </a:rPr>
+              <a:t>
+</a:t>
+            </a:r>
+            <a:r>
+              <a:rPr lang="en-US" sz="800" dirty="0">
+                <a:solidFill>
+                  <a:srgbClr val="F8F9FA"/>
+                </a:solidFill>
+                <a:latin typeface="Open Sans Light" pitchFamily="34" charset="0"/>
+                <a:ea typeface="Open Sans Light" pitchFamily="34" charset="-122"/>
+                <a:cs typeface="Open Sans Light" pitchFamily="34" charset="-120"/>
+              </a:rPr>
+              <a:t>V14 등 핵심 지표를 활용한 파생 변수 생성으로 </a:t>
+            </a:r>
+            <a:r>
+              <a:rPr lang="en-US" sz="800" dirty="0">
+                <a:solidFill>
+                  <a:srgbClr val="F8F9FA"/>
+                </a:solidFill>
+                <a:latin typeface="Open Sans Light" pitchFamily="34" charset="0"/>
+                <a:ea typeface="Open Sans Light" pitchFamily="34" charset="-122"/>
+                <a:cs typeface="Open Sans Light" pitchFamily="34" charset="-120"/>
+              </a:rPr>
+              <a:t>
+</a:t>
+            </a:r>
+            <a:r>
+              <a:rPr lang="en-US" sz="800" dirty="0">
+                <a:solidFill>
+                  <a:srgbClr val="F8F9FA"/>
+                </a:solidFill>
+                <a:latin typeface="Open Sans Light" pitchFamily="34" charset="0"/>
+                <a:ea typeface="Open Sans Light" pitchFamily="34" charset="-122"/>
+                <a:cs typeface="Open Sans Light" pitchFamily="34" charset="-120"/>
+              </a:rPr>
+              <a:t>탐지력 고도화</a:t>
+            </a:r>
+            <a:endParaRPr lang="en-US" sz="800" dirty="0"/>
+          </a:p>
+        </p:txBody>
+      </p:sp>
+      <p:sp>
+        <p:nvSpPr>
+          <p:cNvPr id="28" name="Text 21"/>
+          <p:cNvSpPr/>
+          <p:nvPr/>
+        </p:nvSpPr>
+        <p:spPr>
+          <a:xfrm>
+            <a:off x="3424228" y="4280390"/>
+            <a:ext cx="2409816" cy="482203"/>
+          </a:xfrm>
+          <a:prstGeom prst="rect">
+            <a:avLst/>
+          </a:prstGeom>
+          <a:noFill/>
+          <a:ln/>
+        </p:spPr>
+        <p:txBody>
+          <a:bodyPr wrap="square" lIns="0" tIns="0" rIns="102108" bIns="0" rtlCol="0" anchor="t">
+            <a:spAutoFit/>
+          </a:bodyPr>
+          <a:lstStyle/>
+          <a:p>
+            <a:pPr algn="l" indent="0" marL="0">
+              <a:lnSpc>
+                <a:spcPct val="120000"/>
+              </a:lnSpc>
+              <a:buNone/>
+            </a:pPr>
+            <a:r>
+              <a:rPr lang="en-US" sz="800" dirty="0">
+                <a:solidFill>
+                  <a:srgbClr val="F8F9FA"/>
+                </a:solidFill>
+                <a:latin typeface="Open Sans" pitchFamily="34" charset="0"/>
+                <a:ea typeface="Open Sans" pitchFamily="34" charset="-122"/>
+                <a:cs typeface="Open Sans" pitchFamily="34" charset="-120"/>
+              </a:rPr>
+              <a:t>하이퍼파라미터 튜닝</a:t>
+            </a:r>
+            <a:r>
+              <a:rPr lang="en-US" sz="800" dirty="0">
+                <a:solidFill>
+                  <a:srgbClr val="F8F9FA"/>
+                </a:solidFill>
+                <a:latin typeface="Open Sans Light" pitchFamily="34" charset="0"/>
+                <a:ea typeface="Open Sans Light" pitchFamily="34" charset="-122"/>
+                <a:cs typeface="Open Sans Light" pitchFamily="34" charset="-120"/>
+              </a:rPr>
+              <a:t>
+</a:t>
+            </a:r>
+            <a:r>
+              <a:rPr lang="en-US" sz="800" dirty="0">
+                <a:solidFill>
+                  <a:srgbClr val="F8F9FA"/>
+                </a:solidFill>
+                <a:latin typeface="Open Sans Light" pitchFamily="34" charset="0"/>
+                <a:ea typeface="Open Sans Light" pitchFamily="34" charset="-122"/>
+                <a:cs typeface="Open Sans Light" pitchFamily="34" charset="-120"/>
+              </a:rPr>
+              <a:t>XGBoost, LightGBM의 정밀 튜닝을 통한 </a:t>
+            </a:r>
+            <a:r>
+              <a:rPr lang="en-US" sz="800" dirty="0">
+                <a:solidFill>
+                  <a:srgbClr val="F8F9FA"/>
+                </a:solidFill>
+                <a:latin typeface="Open Sans Light" pitchFamily="34" charset="0"/>
+                <a:ea typeface="Open Sans Light" pitchFamily="34" charset="-122"/>
+                <a:cs typeface="Open Sans Light" pitchFamily="34" charset="-120"/>
+              </a:rPr>
+              <a:t>
+</a:t>
+            </a:r>
+            <a:r>
+              <a:rPr lang="en-US" sz="800" dirty="0">
+                <a:solidFill>
+                  <a:srgbClr val="F8F9FA"/>
+                </a:solidFill>
+                <a:latin typeface="Open Sans Light" pitchFamily="34" charset="0"/>
+                <a:ea typeface="Open Sans Light" pitchFamily="34" charset="-122"/>
+                <a:cs typeface="Open Sans Light" pitchFamily="34" charset="-120"/>
+              </a:rPr>
+              <a:t>F1-Score 0.85+ 달성</a:t>
+            </a:r>
+            <a:endParaRPr lang="en-US" sz="800" dirty="0"/>
+          </a:p>
+        </p:txBody>
+      </p:sp>
+      <p:sp>
+        <p:nvSpPr>
+          <p:cNvPr id="29" name="Text 22"/>
+          <p:cNvSpPr/>
+          <p:nvPr/>
+        </p:nvSpPr>
+        <p:spPr>
+          <a:xfrm>
+            <a:off x="5962631" y="4280390"/>
+            <a:ext cx="2409816" cy="482203"/>
+          </a:xfrm>
+          <a:prstGeom prst="rect">
+            <a:avLst/>
+          </a:prstGeom>
+          <a:noFill/>
+          <a:ln/>
+        </p:spPr>
+        <p:txBody>
+          <a:bodyPr wrap="square" lIns="0" tIns="0" rIns="102108" bIns="0" rtlCol="0" anchor="t">
+            <a:spAutoFit/>
+          </a:bodyPr>
+          <a:lstStyle/>
+          <a:p>
+            <a:pPr algn="l" indent="0" marL="0">
+              <a:lnSpc>
+                <a:spcPct val="120000"/>
+              </a:lnSpc>
+              <a:buNone/>
+            </a:pPr>
+            <a:r>
+              <a:rPr lang="en-US" sz="800" dirty="0">
+                <a:solidFill>
+                  <a:srgbClr val="F8F9FA"/>
+                </a:solidFill>
+                <a:latin typeface="Open Sans" pitchFamily="34" charset="0"/>
+                <a:ea typeface="Open Sans" pitchFamily="34" charset="-122"/>
+                <a:cs typeface="Open Sans" pitchFamily="34" charset="-120"/>
+              </a:rPr>
+              <a:t>실시간 탐지 시스템</a:t>
+            </a:r>
+            <a:r>
+              <a:rPr lang="en-US" sz="800" dirty="0">
+                <a:solidFill>
+                  <a:srgbClr val="F8F9FA"/>
+                </a:solidFill>
+                <a:latin typeface="Open Sans Light" pitchFamily="34" charset="0"/>
+                <a:ea typeface="Open Sans Light" pitchFamily="34" charset="-122"/>
+                <a:cs typeface="Open Sans Light" pitchFamily="34" charset="-120"/>
+              </a:rPr>
+              <a:t>
+</a:t>
+            </a:r>
+            <a:r>
+              <a:rPr lang="en-US" sz="800" dirty="0">
+                <a:solidFill>
+                  <a:srgbClr val="F8F9FA"/>
+                </a:solidFill>
+                <a:latin typeface="Open Sans Light" pitchFamily="34" charset="0"/>
+                <a:ea typeface="Open Sans Light" pitchFamily="34" charset="-122"/>
+                <a:cs typeface="Open Sans Light" pitchFamily="34" charset="-120"/>
+              </a:rPr>
+              <a:t>추론 속도가 빠른 모델을 활용한 </a:t>
+            </a:r>
+            <a:r>
+              <a:rPr lang="en-US" sz="800" dirty="0">
+                <a:solidFill>
+                  <a:srgbClr val="F8F9FA"/>
+                </a:solidFill>
+                <a:latin typeface="Open Sans Light" pitchFamily="34" charset="0"/>
+                <a:ea typeface="Open Sans Light" pitchFamily="34" charset="-122"/>
+                <a:cs typeface="Open Sans Light" pitchFamily="34" charset="-120"/>
+              </a:rPr>
+              <a:t>
+</a:t>
+            </a:r>
+            <a:r>
+              <a:rPr lang="en-US" sz="800" dirty="0">
+                <a:solidFill>
+                  <a:srgbClr val="F8F9FA"/>
+                </a:solidFill>
+                <a:latin typeface="Open Sans Light" pitchFamily="34" charset="0"/>
+                <a:ea typeface="Open Sans Light" pitchFamily="34" charset="-122"/>
+                <a:cs typeface="Open Sans Light" pitchFamily="34" charset="-120"/>
+              </a:rPr>
+              <a:t>실시간 이상거래 차단 파이프라인 구축</a:t>
+            </a:r>
+            <a:endParaRPr lang="en-US" sz="800" dirty="0"/>
+          </a:p>
+        </p:txBody>
+      </p:sp>
     </p:spTree>
   </p:cSld>
   <p:clrMapOvr>
